--- a/docs/교재/실전반/03일차/실전반_03일차.pptx
+++ b/docs/교재/실전반/03일차/실전반_03일차.pptx
@@ -2046,7 +2046,7 @@
           <a:lstStyle/>
           <a:p>
             <a:r>
-              <a:t>모델의 출력이 틀릴 수 있는 방식은 크게 네 가지이고, 넷 모두 형식 검사를 통과합니다. 위의 둘부터 봅니다. 조건 문장이 통째로 빠지면 결과에는 틀린 글자가 하나도 없고, 단위만 바뀌면 숫자 자리에 숫자가 있으므로 프로그램이 이상을 찾지 못합니다. 아래의 둘은 매뉴얼이 쿨러 핀 오염에만 이은 핀 세척을 다른 원인에 짐작으로 잇는 오류와, 팬 최대 운전의 세 단계에 없는 단계를 만들어 넣는 오류입니다. 넷을 가려내는 방법은 원문과 인용을 나란히 놓고 읽는 것입니다.</a:t>
+              <a:t>모델의 출력이 틀릴 수 있는 방식은 크게 네 가지이고, 넷 모두 형식 검사를 통과합니다. 위의 둘부터 봅니다. 조건 문장이 통째로 빠지면 결과에는 틀린 글자가 하나도 없고, 단위만 바뀌면 숫자 자리에 숫자가 있으므로 프로그램이 이상을 찾지 못합니다. 아래의 둘은 매뉴얼이 쿨러 핀 오염에만 이은 핀 세척을 다른 원인에 짐작으로 잇는 오류, 곧 조치 방법이 듣는 원인을 가리키는 관계 ADDRESSES를 틀리게 잇는 오류와, 팬 최대 운전의 세 단계에 없는 단계를 만들어 넣는 오류입니다. 넷을 가려내는 방법은 원문과 인용을 나란히 놓고 읽는 것입니다.</a:t>
             </a:r>
           </a:p>
         </p:txBody>
@@ -8618,7 +8618,7 @@
       </p:sp>
       <p:pic>
         <p:nvPicPr>
-          <p:cNvPr id="6" name="삽화:인터록여유_1.svg" descr="illust_6988251539234621198_1791717219.png"/>
+          <p:cNvPr id="6" name="삽화:인터록여유_1.svg" descr="illust_3969185360744367305_1791717219.png"/>
           <p:cNvPicPr>
             <a:picLocks noChangeAspect="1"/>
           </p:cNvPicPr>
@@ -9213,7 +9213,7 @@
       </p:sp>
       <p:pic>
         <p:nvPicPr>
-          <p:cNvPr id="6" name="삽화:성과경로_2.svg" descr="illust_3023198405599387656_1791717219.png"/>
+          <p:cNvPr id="6" name="삽화:성과경로_2.svg" descr="illust_6603792168707390855_1791717219.png"/>
           <p:cNvPicPr>
             <a:picLocks noChangeAspect="1"/>
           </p:cNvPicPr>
@@ -9724,7 +9724,7 @@
       </p:sp>
       <p:pic>
         <p:nvPicPr>
-          <p:cNvPr id="6" name="삽화:성과경로_5.svg" descr="illust_5198876105644708158_1791717219.png"/>
+          <p:cNvPr id="6" name="삽화:성과경로_5.svg" descr="illust_8320307519415364257_1791717219.png"/>
           <p:cNvPicPr>
             <a:picLocks noChangeAspect="1"/>
           </p:cNvPicPr>
@@ -12827,7 +12827,7 @@
       </p:sp>
       <p:pic>
         <p:nvPicPr>
-          <p:cNvPr id="6" name="삽화:가정분석_2.svg" descr="illust_7573540808611624882_1791717219.png"/>
+          <p:cNvPr id="6" name="삽화:가정분석_2.svg" descr="illust_7191398225758446907_1791717219.png"/>
           <p:cNvPicPr>
             <a:picLocks noChangeAspect="1"/>
           </p:cNvPicPr>
@@ -13317,7 +13317,7 @@
       </p:sp>
       <p:pic>
         <p:nvPicPr>
-          <p:cNvPr id="6" name="삽화:가정분석_5.svg" descr="illust_8655800248058314019_1791717219.png"/>
+          <p:cNvPr id="6" name="삽화:가정분석_5.svg" descr="illust_4651257076957178806_1791717219.png"/>
           <p:cNvPicPr>
             <a:picLocks noChangeAspect="1"/>
           </p:cNvPicPr>
@@ -20714,7 +20714,7 @@
       </p:sp>
       <p:pic>
         <p:nvPicPr>
-          <p:cNvPr id="6" name="삽화:인제스천_전체.svg" descr="illust_5462337664779930022_1791715498.png"/>
+          <p:cNvPr id="6" name="삽화:인제스천_전체.svg" descr="illust_603971374041309141_1791715498.png"/>
           <p:cNvPicPr>
             <a:picLocks noChangeAspect="1"/>
           </p:cNvPicPr>
@@ -27738,7 +27738,7 @@
       </p:sp>
       <p:pic>
         <p:nvPicPr>
-          <p:cNvPr id="6" name="삽화:한문장.svg" descr="illust_7112162923865645447_1791715498.png"/>
+          <p:cNvPr id="6" name="삽화:한문장.svg" descr="illust_7739948470188947528_1791715498.png"/>
           <p:cNvPicPr>
             <a:picLocks noChangeAspect="1"/>
           </p:cNvPicPr>
@@ -29246,7 +29246,7 @@
       </p:sp>
       <p:pic>
         <p:nvPicPr>
-          <p:cNvPr id="6" name="삽화:인용.svg" descr="illust_5003960864761914136_1791715498.png"/>
+          <p:cNvPr id="6" name="삽화:인용.svg" descr="illust_5193778502145254449_1791715498.png"/>
           <p:cNvPicPr>
             <a:picLocks noChangeAspect="1"/>
           </p:cNvPicPr>
@@ -30847,7 +30847,7 @@
       </p:sp>
       <p:pic>
         <p:nvPicPr>
-          <p:cNvPr id="6" name="삽화:인제스천_6.svg" descr="illust_3576575982390179879_1791715498.png"/>
+          <p:cNvPr id="6" name="삽화:인제스천_6.svg" descr="illust_8432607400288367960_1791715498.png"/>
           <p:cNvPicPr>
             <a:picLocks noChangeAspect="1"/>
           </p:cNvPicPr>
@@ -31401,7 +31401,7 @@
       </p:sp>
       <p:pic>
         <p:nvPicPr>
-          <p:cNvPr id="6" name="삽화:적재묶음_사슬.svg" descr="illust_4961450171115296560_1791715498.png"/>
+          <p:cNvPr id="6" name="삽화:적재묶음_사슬.svg" descr="illust_1827550750414391004_1791715498.png"/>
           <p:cNvPicPr>
             <a:picLocks noChangeAspect="1"/>
           </p:cNvPicPr>
@@ -34421,7 +34421,7 @@
       </p:sp>
       <p:pic>
         <p:nvPicPr>
-          <p:cNvPr id="6" name="삽화:입력데이터_자리.svg" descr="illust_8524518486173216689_1791715498.png"/>
+          <p:cNvPr id="6" name="삽화:입력데이터_자리.svg" descr="illust_6317862230045958960_1791715498.png"/>
           <p:cNvPicPr>
             <a:picLocks noChangeAspect="1"/>
           </p:cNvPicPr>
@@ -40500,7 +40500,7 @@
       </p:sp>
       <p:pic>
         <p:nvPicPr>
-          <p:cNvPr id="6" name="삽화:네일차_흐름.svg" descr="illust_3304035535093788916_1791715498.png"/>
+          <p:cNvPr id="6" name="삽화:네일차_흐름.svg" descr="illust_7728678620933042218_1791715498.png"/>
           <p:cNvPicPr>
             <a:picLocks noChangeAspect="1"/>
           </p:cNvPicPr>
@@ -41179,7 +41179,7 @@
       </p:sp>
       <p:pic>
         <p:nvPicPr>
-          <p:cNvPr id="6" name="삽화:관계.svg" descr="illust_3682646629583461626_1791715399.png"/>
+          <p:cNvPr id="6" name="삽화:관계.svg" descr="illust_2212652392615816376_1791715399.png"/>
           <p:cNvPicPr>
             <a:picLocks noChangeAspect="1"/>
           </p:cNvPicPr>
@@ -47031,7 +47031,7 @@
       </p:sp>
       <p:pic>
         <p:nvPicPr>
-          <p:cNvPr id="6" name="삽화:경로_3.svg" descr="illust_5473168817848108822_1791715399.png"/>
+          <p:cNvPr id="6" name="삽화:경로_3.svg" descr="illust_4037343831785095525_1791715399.png"/>
           <p:cNvPicPr>
             <a:picLocks noChangeAspect="1"/>
           </p:cNvPicPr>
@@ -63882,8 +63882,8 @@
         </p:nvSpPr>
         <p:spPr>
           <a:xfrm>
-            <a:off x="548640" y="1978215"/>
-            <a:ext cx="5181447" cy="4026281"/>
+            <a:off x="548640" y="2128647"/>
+            <a:ext cx="5181447" cy="3725418"/>
           </a:xfrm>
           <a:prstGeom prst="roundRect">
             <a:avLst>
@@ -63913,7 +63913,7 @@
         </p:nvSpPr>
         <p:spPr>
           <a:xfrm>
-            <a:off x="822959" y="2179383"/>
+            <a:off x="822959" y="2329815"/>
             <a:ext cx="731520" cy="731520"/>
           </a:xfrm>
           <a:prstGeom prst="ellipse">
@@ -63950,7 +63950,7 @@
         </p:blipFill>
         <p:spPr>
           <a:xfrm>
-            <a:off x="976579" y="2333002"/>
+            <a:off x="976579" y="2483434"/>
             <a:ext cx="424281" cy="424281"/>
           </a:xfrm>
           <a:prstGeom prst="rect">
@@ -63966,7 +63966,7 @@
         </p:nvSpPr>
         <p:spPr>
           <a:xfrm>
-            <a:off x="1691640" y="2179383"/>
+            <a:off x="1691640" y="2329815"/>
             <a:ext cx="3855567" cy="731520"/>
           </a:xfrm>
           <a:prstGeom prst="rect">
@@ -64005,8 +64005,8 @@
         </p:nvSpPr>
         <p:spPr>
           <a:xfrm>
-            <a:off x="822959" y="3029775"/>
-            <a:ext cx="4632807" cy="2426081"/>
+            <a:off x="822959" y="3180207"/>
+            <a:ext cx="4632807" cy="2125218"/>
           </a:xfrm>
           <a:prstGeom prst="rect">
             <a:avLst/>
@@ -64089,7 +64089,7 @@
         </p:nvSpPr>
         <p:spPr>
           <a:xfrm>
-            <a:off x="868680" y="5547296"/>
+            <a:off x="868680" y="5396865"/>
             <a:ext cx="1325879" cy="292608"/>
           </a:xfrm>
           <a:prstGeom prst="roundRect">
@@ -64120,7 +64120,7 @@
         </p:nvSpPr>
         <p:spPr>
           <a:xfrm>
-            <a:off x="868680" y="5547296"/>
+            <a:off x="868680" y="5396865"/>
             <a:ext cx="1325879" cy="292608"/>
           </a:xfrm>
           <a:prstGeom prst="rect">
@@ -64159,8 +64159,8 @@
         </p:nvSpPr>
         <p:spPr>
           <a:xfrm>
-            <a:off x="6461607" y="1978215"/>
-            <a:ext cx="5181447" cy="4026281"/>
+            <a:off x="6461607" y="2128647"/>
+            <a:ext cx="5181447" cy="3725418"/>
           </a:xfrm>
           <a:prstGeom prst="roundRect">
             <a:avLst>
@@ -64192,7 +64192,7 @@
         </p:nvSpPr>
         <p:spPr>
           <a:xfrm>
-            <a:off x="6735927" y="2179383"/>
+            <a:off x="6735927" y="2329815"/>
             <a:ext cx="731520" cy="731520"/>
           </a:xfrm>
           <a:prstGeom prst="ellipse">
@@ -64229,7 +64229,7 @@
         </p:blipFill>
         <p:spPr>
           <a:xfrm>
-            <a:off x="6889546" y="2333002"/>
+            <a:off x="6889546" y="2483434"/>
             <a:ext cx="424281" cy="424281"/>
           </a:xfrm>
           <a:prstGeom prst="rect">
@@ -64245,7 +64245,7 @@
         </p:nvSpPr>
         <p:spPr>
           <a:xfrm>
-            <a:off x="7604607" y="2179383"/>
+            <a:off x="7604607" y="2329815"/>
             <a:ext cx="3855567" cy="731520"/>
           </a:xfrm>
           <a:prstGeom prst="rect">
@@ -64271,7 +64271,7 @@
                 <a:ea typeface="맑은 고딕"/>
                 <a:cs typeface="맑은 고딕"/>
               </a:rPr>
-              <a:t>KPI (Key Performance Indicator)</a:t>
+              <a:t>KPI (핵심 성과 지표)</a:t>
             </a:r>
           </a:p>
         </p:txBody>
@@ -64284,8 +64284,8 @@
         </p:nvSpPr>
         <p:spPr>
           <a:xfrm>
-            <a:off x="6735927" y="3029775"/>
-            <a:ext cx="4632807" cy="2426081"/>
+            <a:off x="6735927" y="3180207"/>
+            <a:ext cx="4632807" cy="2125218"/>
           </a:xfrm>
           <a:prstGeom prst="rect">
             <a:avLst/>
@@ -64313,7 +64313,7 @@
                 <a:ea typeface="맑은 고딕"/>
                 <a:cs typeface="맑은 고딕"/>
               </a:rPr>
-              <a:t>• 목표를 얼마나 이루었는지를 수치로 재는 핵심 성과 지표이다</a:t>
+              <a:t>• 목표를 얼마나 이루었는지를 수치로 재는 지표이다</a:t>
             </a:r>
           </a:p>
           <a:p>
@@ -64389,7 +64389,7 @@
         </p:nvSpPr>
         <p:spPr>
           <a:xfrm>
-            <a:off x="6781647" y="5547296"/>
+            <a:off x="6781647" y="5396865"/>
             <a:ext cx="1021080" cy="292608"/>
           </a:xfrm>
           <a:prstGeom prst="roundRect">
@@ -64420,7 +64420,7 @@
         </p:nvSpPr>
         <p:spPr>
           <a:xfrm>
-            <a:off x="6781647" y="5547296"/>
+            <a:off x="6781647" y="5396865"/>
             <a:ext cx="1021080" cy="292608"/>
           </a:xfrm>
           <a:prstGeom prst="rect">

--- a/docs/교재/실전반/03일차/실전반_03일차.pptx
+++ b/docs/교재/실전반/03일차/실전반_03일차.pptx
@@ -646,7 +646,7 @@
           <a:lstStyle/>
           <a:p>
             <a:r>
-              <a:t>그 저울질의 실제 결과입니다. 네 후보에 점수가 매겨졌고 팬 최대 운전이 가장 높았습니다. 부하를 낮추는 두 조치는 유온을 더 내리는데도 점수가 낮습니다.</a:t>
+              <a:t>그 저울질의 실제 결과입니다. 네 후보에 점수가 매겨졌고 팬 최대 운전이 가장 높았습니다. 부하를 낮추는 두 조치는 유온을 더 내리는데도 점수가 낮습니다. 이 둘은 점수가 +2.75로 같아서, 표의 둘째 줄과 셋째 줄 사이의 순서에는 뜻을 두지 않습니다.</a:t>
             </a:r>
           </a:p>
         </p:txBody>
@@ -716,7 +716,7 @@
           <a:lstStyle/>
           <a:p>
             <a:r>
-              <a:t>왼쪽은 3순위 조치를 1순위와 견준 내역입니다. 유온을 더 내려서 0.26점을 얻었으나, 부하를 낮추면 생산이 줄어 납기에서 0.67점, 성과 지표에서 0.22점을 잃었습니다. 오른쪽의 쿨러 핀 세척은 원인을 없애는 조치인데 4순위입니다. 예측 유온이 62.5도로 경보 기준을 넘고, 경고가 붙었으며, 품질에서도 깎였습니다. 그래서 지난 사건에서는 먼저 팬 최대 운전으로 유온을 내리고 핀 세척은 뒤에 이어 했습니다.</a:t>
+              <a:t>왼쪽은 부하를 낮추는 두 조치를 1순위와 견준 내역입니다. 유온을 더 내려서 0.26점을 얻었으나, 부하를 낮추면 생산이 줄어 납기에서 0.67점, 성과 지표에서 0.22점을 잃었습니다. 예측 유온에서 얻는 점수에는 상한이 있어 두 조치가 같은 값을 받았고, 잃은 것도 같아서 두 조치의 점수가 같습니다. 오른쪽의 쿨러 핀 세척은 원인을 없애는 조치인데 4순위입니다. 예측 유온이 62.5도로 경보 기준을 넘고, 경고가 붙었으며, 품질에서도 깎였습니다. 그래서 지난 사건에서는 먼저 팬 최대 운전으로 유온을 내리고 핀 세척은 뒤에 이어 했습니다.</a:t>
             </a:r>
           </a:p>
         </p:txBody>
@@ -1136,7 +1136,7 @@
           <a:lstStyle/>
           <a:p>
             <a:r>
-              <a:t>첫날의 시연에서 추천안에는 원인과 조치와 출처가 함께 나왔습니다. 이 셋은 처음부터 지식 그래프에 있던 것이 아니라 쿨러 팬 정비 매뉴얼 HM-8에서 왔습니다. 이 단원에서는 이 문서가 지식이 되는 과정을 봅니다.</a:t>
+              <a:t>1일차의 시연에서 추천안에는 원인과 조치와 출처가 함께 나왔습니다. 이 셋은 처음부터 지식 그래프에 있던 것이 아니라 쿨러 팬 정비 매뉴얼 HM-8에서 왔습니다. 이 단원에서는 이 문서가 지식이 되는 과정을 봅니다.</a:t>
             </a:r>
           </a:p>
         </p:txBody>
@@ -1346,7 +1346,7 @@
           <a:lstStyle/>
           <a:p>
             <a:r>
-              <a:t>규칙을 통과한 후보 가운데 어느 것이 더 나은가를 따집니다. 지난 사건에서는 설비가 원격 자동이었고 팬은 60 %로 돌고 있었으므로 제외된 후보가 없었습니다. 그래프의 값은 2일차에 본 조치 후 예측 유온, 곧 후보마다 조치를 했을 때 유온이 어디에 머물지를 계산한 값이며, 가장 낮은 것은 44.6도, 가장 높은 것은 62.5도입니다. 그런데 1순위는 5도나 덜 내리는 팬 최대 운전이었고 유온을 가장 많이 내리는 조치는 3순위였습니다. 순위를 가른 기준이 유온 하나가 아니라는 뜻입니다.</a:t>
+              <a:t>규칙을 통과한 후보 가운데 어느 것이 더 나은가를 따집니다. 지난 사건에서는 설비가 원격 자동이었고 팬은 60 %로 돌고 있었으므로 제외된 후보가 없었습니다. 그래프의 값은 2일차에 본 조치 후 예측 유온, 곧 후보마다 조치를 했을 때 유온이 어디에 머물지를 계산한 값이며, 가장 낮은 것은 44.6도, 가장 높은 것은 62.5도입니다. 그런데 1순위는 5도나 덜 내리는 팬 최대 운전이었고 유온을 가장 많이 내리는 조치는 1순위가 아니었습니다. 순위를 가른 기준이 유온 하나가 아니라는 뜻입니다.</a:t>
             </a:r>
           </a:p>
         </p:txBody>
@@ -1556,7 +1556,7 @@
           <a:lstStyle/>
           <a:p>
             <a:r>
-              <a:t>먼저 왼쪽의 원문 보관을 봅니다. 뒤에서 추출 결과가 맞는지를 확인할 때 비교하는 대상이 이 원문이므로, 원문이 바뀔 수 있다면 대조가 의미를 잃습니다. 다음으로 가운데의 파일 이름은 바뀌고 겹칠 수 있어 문서를 가리키는 값으로 쓰지 못합니다. 그래서 오른쪽처럼 문서마다 식별자를 발급합니다. 둘째 날에 배운, 대상 하나를 가리키는 고유한 값이 문서에도 붙는 것입니다.</a:t>
+              <a:t>먼저 왼쪽의 원문 보관을 봅니다. 뒤에서 추출 결과가 맞는지를 확인할 때 비교하는 대상이 이 원문이므로, 원문이 바뀔 수 있다면 대조가 의미를 잃습니다. 다음으로 가운데의 파일 이름은 바뀌고 겹칠 수 있어 문서를 가리키는 값으로 쓰지 못합니다. 그래서 오른쪽처럼 문서마다 식별자를 발급합니다. 2일차에 배운, 대상 하나를 가리키는 고유한 값이 문서에도 붙는 것입니다.</a:t>
             </a:r>
           </a:p>
         </p:txBody>
@@ -1836,7 +1836,7 @@
           <a:lstStyle/>
           <a:p>
             <a:r>
-              <a:t>위가 원문이고 아래가 모델이 낸 원인 한 건이며, 이름과 값의 쌍을 중괄호로 묶은 이 형식이 JSON입니다. 먼저 위의 세 줄을 봅니다. 식별자와 이름과 별칭은 둘째 날에 배운 그대로입니다. 다음으로 prior는 문장에 있던 값이고 맨 아래의 section은 근거가 된 절입니다. 그 사이의 failure_mode와 parts는 이 원인이 이어질 대상을 식별자로 가리킵니다.</a:t>
+              <a:t>위가 원문이고 아래가 모델이 낸 원인 한 건이며, 이름과 값의 쌍을 중괄호로 묶은 이 형식이 JSON입니다. 먼저 위의 세 줄을 봅니다. 식별자와 이름과 별칭은 2일차에 배운 그대로입니다. 다음으로 prior는 문장에 있던 사전 확률, 곧 매뉴얼이 이 원인을 얼마나 흔하다고 보는지를 적은 값이고 맨 아래의 section은 근거가 된 절입니다. 그 사이의 failure_mode와 parts는 이 원인이 이어질 대상을 식별자로 가리킵니다.</a:t>
             </a:r>
           </a:p>
         </p:txBody>
@@ -2046,7 +2046,7 @@
           <a:lstStyle/>
           <a:p>
             <a:r>
-              <a:t>모델의 출력이 틀릴 수 있는 방식은 크게 네 가지이고, 넷 모두 형식 검사를 통과합니다. 위의 둘부터 봅니다. 조건 문장이 통째로 빠지면 결과에는 틀린 글자가 하나도 없고, 단위만 바뀌면 숫자 자리에 숫자가 있으므로 프로그램이 이상을 찾지 못합니다. 아래의 둘은 매뉴얼이 쿨러 핀 오염에만 이은 핀 세척을 다른 원인에 짐작으로 잇는 오류, 곧 조치 방법이 듣는 원인을 가리키는 관계 ADDRESSES를 틀리게 잇는 오류와, 팬 최대 운전의 세 단계에 없는 단계를 만들어 넣는 오류입니다. 넷을 가려내는 방법은 원문과 인용을 나란히 놓고 읽는 것입니다.</a:t>
+              <a:t>모델의 출력이 틀릴 수 있는 방식은 크게 네 가지이고, 넷 모두 형식 검사를 통과합니다. 위의 둘부터 봅니다. 조건 문장이 통째로 빠지면 결과에는 틀린 글자가 하나도 없고, 단위만 바뀌면 숫자 자리에 숫자가 있으므로 프로그램이 이상을 찾지 못합니다. 셋째는 관계를 틀리게 잇는 오류입니다. ADDRESSES는 조치 방법이 어느 원인에 듣는지를 적는 관계인데, 매뉴얼은 핀 세척을 쿨러 핀 오염에만 이었습니다. 넷째는 팬 최대 운전의 세 단계에 없는 단계를 만들어 넣는 오류입니다. 넷을 가려내는 방법은 원문과 인용을 나란히 놓고 읽는 것입니다.</a:t>
             </a:r>
           </a:p>
         </p:txBody>
@@ -2396,7 +2396,7 @@
           <a:lstStyle/>
           <a:p>
             <a:r>
-              <a:t>먼저 맨 위의 판본입니다. 문서 식별자는 그대로이고 내용이 바뀔 때마다 판본만 새로 생깁니다. 다음으로 판본 아래의 적재 기록에는 누가 언제 검토해 넣었는지와 넣기 전후의 지식 그래프의 상태가 들어갑니다. 기록 사이의 화살표는 새 기록이 앞 기록을 가리킨다는 뜻이고, 이 사슬이 그 문서의 개정 이력입니다. 전과 후의 상태를 비교하면 어느 개정에서 무엇이 바뀌었는지를 알 수 있고, 되돌릴 때는 가장 새 기록부터 되돌립니다.</a:t>
+              <a:t>먼저 맨 위의 판본입니다. 문서 식별자는 그대로이고 내용이 바뀔 때마다 판본만 새로 생깁니다. 다음으로 판본 아래의 적재 기록에는 누가 언제 검토해 넣었는지와 넣기 전후의 지식 그래프의 상태가 들어가므로, 어느 지식이 어느 문서의 것인지가 남아 개정 때 그 문서의 지식만 바꿀 수 있습니다. 기록 사이의 화살표는 새 기록이 앞 기록을 가리킨다는 뜻이고, 이 사슬이 그 문서의 개정 이력입니다. 전과 후의 상태를 비교하면 어느 개정에서 무엇이 바뀌었는지를 알 수 있고, 되돌릴 때는 가장 새 기록부터 되돌립니다.</a:t>
             </a:r>
           </a:p>
         </p:txBody>
@@ -2466,7 +2466,7 @@
           <a:lstStyle/>
           <a:p>
             <a:r>
-              <a:t>일곱 단계의 끝이고, 쿨러 사건에서 추천안에 출처가 함께 나온 것이 이 단계의 결과입니다. 윗줄을 왼쪽부터 따라갑니다. 첫날에는 조치 방법과 근거 문서 사이를 화살표 하나로 보았는데, 펼치면 단계와 절이 그 사이에 있습니다. 다음으로 아래의 규칙도 자신이 나온 절을 가리킵니다. 그래서 출처는 따로 검색하는 것이 아니라 관계를 따라가면 나옵니다.</a:t>
+              <a:t>일곱 단계의 끝이고, 쿨러 사건에서 추천안에 출처가 함께 나온 것이 이 단계의 결과입니다. 윗줄을 왼쪽부터 따라갑니다. 1일차에는 조치 방법과 근거 문서 사이를 화살표 하나로 보았는데, 펼치면 단계와 절이 그 사이에 있습니다. 다음으로 아래의 후보 선택 규칙은 고장 유형이 쿨러 냉각 성능 상실이면 완화 조치 셋을 후보로 올리는 판단 규칙이며, 이 규칙도 자신이 나온 절을 가리킵니다. 그래서 출처는 따로 검색하는 것이 아니라 관계를 따라가면 나옵니다.</a:t>
             </a:r>
           </a:p>
         </p:txBody>
@@ -2536,7 +2536,7 @@
           <a:lstStyle/>
           <a:p>
             <a:r>
-              <a:t>결정표의 기준은 표에 적고 지금의 값은 판단할 때 읽어 온다는 구분을 지식 그래프 전체에 적용한 것입니다. 먼저 왼쪽입니다. 매뉴얼에서 뽑아 등록한 것은 모두 지식입니다. 다음으로 오른쪽의 값은 등록하지 않습니다. 편하다는 이유로 지금의 값을 노드의 속성으로 넣어 두면, 유온이 2분 사이에 6 ℃ 오른 쿨러 사건에서는 지난 값으로 판단하게 됩니다.</a:t>
+              <a:t>2일차의 결정표에서 기준은 표에 적혀 있었고 운전 모드와 연속 운전 시간 같은 입력 값은 그때 대어 보았습니다. 같은 구분을 지식 그래프 전체에 적용한 것입니다. 먼저 왼쪽입니다. 매뉴얼에서 뽑아 등록한 것은 모두 지식입니다. 다음으로 오른쪽의 값은 등록하지 않습니다. 편하다는 이유로 지금의 값을 노드의 속성으로 넣어 두면, 유온이 2분 사이에 6 ℃ 오른 쿨러 사건에서는 지난 값으로 판단하게 됩니다.</a:t>
             </a:r>
           </a:p>
         </p:txBody>
@@ -3026,7 +3026,7 @@
           <a:lstStyle/>
           <a:p>
             <a:r>
-              <a:t>칸마다 하늘색으로 칠한 부분이 그 단계에서 새로 더해진 것입니다. 앞 칸의 결과물이 다음 칸의 바탕이 됩니다. 첫 칸이 1일차, 둘째 칸 전부와 셋째 칸의 조치 절차 · 판단 규칙이 2일차, 셋째 칸의 성과 지표와 넷째 칸이 3일차입니다.</a:t>
+              <a:t>왼쪽 칸부터 봅니다. 1일차의 결과물은 손으로 그린 관계 그림이었고, 2일차에 그 그림에 클래스와 식별자라는 틀이 생겼습니다. 셋째 칸에서는 2일차의 조치 방법과 판단 규칙에 3일차의 성과 지표가 더해져 같은 그래프에 이어졌고, 넷째 칸에서는 3일차의 인제스천으로 문서에서 온 원인과 증거가 출처와 함께 더해졌습니다. 칸마다 하늘색으로 칠한 부분이 그 단계에서 새로 더해진 것이며, 앞 칸의 결과물이 다음 칸의 바탕이 됩니다.</a:t>
             </a:r>
           </a:p>
         </p:txBody>
@@ -3096,7 +3096,7 @@
           <a:lstStyle/>
           <a:p>
             <a:r>
-              <a:t>첫날의 출발점은 쿨러 사건의 경보 한 건과 시계열 DB, PLC, 매뉴얼, MES에 흩어진 정보였고, 그 사이를 잇는 연결은 사람의 머릿속에만 있었습니다. 그 연결을 꺼내 적은 것이 이 그림입니다. 증상은 고장 유형을 가리키고, 원인은 고장 유형을 일으키며, 고장 유형은 조치로 완화된다는 세 문장을 화살표를 따라 읽습니다. 다만 그림에는 증상에서 조치로 CAUSES를 그어도 막을 방법이 없습니다. 그 틀을 만드는 것이 둘째 날의 일이었습니다.</a:t>
+              <a:t>1일차의 출발점은 쿨러 사건의 경보 한 건과 시계열 DB, PLC, 매뉴얼, MES에 흩어진 정보였고, 그 사이를 잇는 연결은 사람의 머릿속에만 있었습니다. 그 연결을 꺼내 적은 것이 이 그림입니다. 증상은 고장 유형을 가리키고, 원인은 고장 유형을 일으키며, 고장 유형은 조치로 완화된다는 세 문장을 화살표를 따라 읽습니다. 다만 그림에는 증상에서 조치로 CAUSES를 그어도 막을 방법이 없습니다. 그 틀을 만드는 것이 2일차의 일이었습니다.</a:t>
             </a:r>
           </a:p>
         </p:txBody>
@@ -3166,7 +3166,7 @@
           <a:lstStyle/>
           <a:p>
             <a:r>
-              <a:t>첫 줄부터 봅니다. 2일차가 받은 것은 설비 자료와 답할 질문이었고, 스키마 설계는 클래스가 아니라 질문에서 출발했습니다. 질문이 정해져야 무엇을 넣고 무엇을 넣지 않을지가 갈립니다. 둘째 줄의 스키마가 첫 결과물로, 첫날의 그림에 없던 틀입니다.</a:t>
+              <a:t>첫 줄부터 봅니다. 2일차가 받은 것은 설비 자료와 답할 질문이었고, 스키마 설계는 클래스가 아니라 질문에서 출발했습니다. 질문이 정해져야 무엇을 넣고 무엇을 넣지 않을지가 갈립니다. 둘째 줄의 스키마가 첫 결과물로, 1일차의 그림에 없던 틀입니다.</a:t>
             </a:r>
           </a:p>
         </p:txBody>
@@ -3236,7 +3236,7 @@
           <a:lstStyle/>
           <a:p>
             <a:r>
-              <a:t>대상마다 식별자가 있고 관계는 스키마가 정한 방향으로 놓였습니다. Cypher로 이 관계를 따라가면 처음의 질문에 답이 나옵니다.</a:t>
+              <a:t>위의 점선 상자 줄이 첫 결과물인 스키마이고 아래의 원 줄이 둘째 결과물인 인스턴스 데이터입니다. 아래 줄의 대상마다 식별자가 있고, 관계는 위 줄의 스키마가 정한 이름과 방향으로만 놓였습니다. 왼쪽의 HYD-01에서 오일 쿨러, 유온 센서, 유온까지 관계를 따라가면 2일차가 처음에 정한 질문의 답인 센서와 한계값 65도가 나옵니다. Cypher로 조회한 것이 이 길입니다.</a:t>
             </a:r>
           </a:p>
         </p:txBody>
@@ -3306,7 +3306,7 @@
           <a:lstStyle/>
           <a:p>
             <a:r>
-              <a:t>2일차에 SOP의 구성요소로 본 것 가운데 셋이 이 결과물의 입력입니다. 첫 행에서 SOP 한 편이 조치 방법 노드 하나가 되고 번호가 붙은 줄이 작업 단계가 되었습니다. 둘째 행의 금지는 부하를 60 % 아래로 내리지 못한다는 조치의 하한으로 남았습니다. 셋째 행의 전제 조건은 2일차에 DMN의 결정표에서 본 제외 규칙이 되었습니다. 조건에 댈 운전 모드의 값은 규칙에 없고 판단할 때 읽어 옵니다.</a:t>
+              <a:t>2일차에 SOP의 구성요소로 본 것 가운데 셋이 이 결과물의 입력입니다. 첫 행에서 SOP 한 편이 조치 방법 노드 하나가 되고 번호가 붙은 줄이 작업 단계가 되었습니다. 둘째 행의 금지는 부하를 60 % 아래로 내리지 못한다는 조치의 한계로 남았습니다. 셋째 행의 전제 조건은 2일차에 DMN의 결정표에서 본 제외 규칙이 되었습니다. 조건에 댈 운전 모드의 값은 규칙에 없고 판단할 때 읽어 옵니다.</a:t>
             </a:r>
           </a:p>
         </p:txBody>
@@ -3376,7 +3376,7 @@
           <a:lstStyle/>
           <a:p>
             <a:r>
-              <a:t>성과 단원에서 BSC의 목표를 재는 KPI로 본 지표들입니다. 조치가 지표에 미치는 영향을 따라가며 보았습니다. 한 조치가 한 지표에는 이롭고 다른 지표에는 불리했습니다.</a:t>
+              <a:t>3일차의 첫 결과물은 성과 지표와, 조치가 그 지표에 닿는 길입니다. 왼쪽의 조치 후보에서 출발해 팬 속도와 펌프 부하라는 설비의 값을 거쳐 오른쪽의 세 지표에 이릅니다. 인터록 여유는 무재해 운전을, 전력 사용량은 에너지 효율을 재는 내부 프로세스 관점의 지표이고, 납기 준수율은 납기 신뢰를 재는 고객 관점의 지표입니다. 한 조치가 한 지표에는 이롭고 다른 지표에는 불리하므로, 규칙을 통과한 후보끼리는 이 지표로 견줍니다.</a:t>
             </a:r>
           </a:p>
         </p:txBody>
@@ -3446,7 +3446,7 @@
           <a:lstStyle/>
           <a:p>
             <a:r>
-              <a:t>2일차에는 지식이 들어갈 자리를 만들었고, 오늘은 그 자리를 채우는 방법을 다루었습니다. 왼쪽부터 원문, 후보, 검토된 지식, 출처를 가진 지식의 순서입니다. 마지막 칸에는 내용과 함께 그것이 어디에서 왔고 누가 확인했는지가 같이 들어 있습니다. 내용만 있는 지식과 달리 뒤의 둘이 있어야 판단의 근거로 내놓을 수 있습니다.</a:t>
+              <a:t>2일차에는 지식이 들어갈 자리를 만들었고, 인제스천 단원에서는 그 자리를 채우는 방법을 다루었습니다. 왼쪽부터 원문, 후보, 검토된 지식, 출처를 가진 지식의 순서입니다. 마지막 칸에는 내용과 함께 그것이 어디에서 왔고 누가 확인했는지가 같이 들어 있습니다. 내용만 있는 지식과 달리 뒤의 둘이 있어야 판단의 근거로 내놓을 수 있습니다.</a:t>
             </a:r>
           </a:p>
         </p:txBody>
@@ -3516,7 +3516,7 @@
           <a:lstStyle/>
           <a:p>
             <a:r>
-              <a:t>다섯 걸음 전체의 밑그림은 첫날의 관계 그림입니다. 첫날 94초 동안 에이전트가 한 일이 이것이었고, 그것이 가능했던 것은 세 일차의 결과물이 미리 쌓여 있었기 때문입니다. 넷째 걸음의 순위는 성과 단원에서 본 그대로이므로 다시 펴지 않고, 나머지 걸음을 하나씩 봅니다.</a:t>
+              <a:t>왼쪽부터 다섯 걸음입니다. 경보에서 고장 유형까지는 2일차의 스키마가 정한 관계를 따라갔고, 원인 후보와 그 기준은 3일차에 매뉴얼에서 들어온 지식이며, 기준에 댄 값은 그 순간 원천에서 읽었습니다. 넷째 걸음에서 2일차의 판단 규칙과 3일차의 성과 기준이 후보를 가려 순서를 정했고, 마지막에 문서의 절과 인용이 근거로 붙었습니다. 다섯 걸음 전체의 밑그림은 1일차의 관계 그림입니다. 1일차의 사건에서 에이전트가 94초 동안 한 일이 이것이었고, 그것이 가능했던 것은 세 일차의 결과물이 미리 쌓여 있었기 때문입니다. 넷째 걸음의 순위는 성과 단원에서 본 그대로이므로 다시 펴지 않고, 나머지 걸음을 하나씩 봅니다.</a:t>
             </a:r>
           </a:p>
         </p:txBody>
@@ -3656,7 +3656,7 @@
           <a:lstStyle/>
           <a:p>
             <a:r>
-              <a:t>네 관점을 위에서 아래로 봅니다. 재무 관점은 결과가 돈으로 어떻게 나타나는가를 보며 목표는 영업이익 확대와 원가 절감입니다. 고객 관점은 고객에게 무엇을 지키는가를 보며 목표는 납기 신뢰와 품질 신뢰입니다. 내부 프로세스 관점은 그 약속을 지키려면 안에서 무엇을 잘 운영해야 하는가를 보며, 유온을 다루는 쿨러 과열 사건이 이 관점에 놓입니다. 학습과 성장 관점의 목표는 현장 판단 지식 축적으로, 사람이 내린 판단과 그 이유를 남겨 다음 판단에 쓰겠다는 뜻입니다.</a:t>
+              <a:t>네 관점을 위에서 아래로 봅니다. 재무 관점은 결과가 돈으로 어떻게 나타나는가를 보며 목표는 영업이익 확대와 원가 절감입니다. 고객 관점은 고객에게 무엇을 지키는가를 보며 목표는 납기 신뢰와 품질 신뢰입니다. 내부 프로세스 관점은 그 약속을 지키려면 안에서 무엇을 잘 운영해야 하는가를 보며, 유온을 다루는 쿨러 사건이 이 관점에 놓입니다. 학습과 성장 관점의 목표는 현장 판단 지식 축적으로, 사람이 내린 판단과 그 이유를 남겨 다음 판단에 쓰겠다는 뜻입니다.</a:t>
             </a:r>
           </a:p>
         </p:txBody>
@@ -3726,7 +3726,7 @@
           <a:lstStyle/>
           <a:p>
             <a:r>
-              <a:t>행마다 윗줄이 매뉴얼에서 온 기준이고 아랫줄이 그 순간에 시계열 DB에서 읽은 값입니다. 첫 행부터 봅니다. 기준 70은 지식이고 46.2는 읽은 값이며, 둘은 서로 다른 곳에 있다가 판단하는 순간에만 만납니다. 팬 진동 0.575는 팬이 정상이라는 뜻이어서 핀 오염에는 맞고 팬 구동 불량에는 맞지 않습니다. 캐비닛 온도도 기준에 못 미쳐 원인은 쿨러 핀 오염 하나로 정해졌습니다.</a:t>
+              <a:t>가운데의 계기 셋이 그 순간에 시계열 DB에서 읽은 값이고, 오른쪽의 원인마다 적힌 기준이 매뉴얼에서 온 지식입니다. 맨 위부터 봅니다. 기준 70은 지식이고 46.2는 읽은 값이며, 둘은 서로 다른 곳에 있다가 판단하는 순간에만 만납니다. 팬 진동 0.575는 팬이 정상이라는 뜻이어서 핀 오염에는 맞고 팬 구동 불량에는 맞지 않습니다. 캐비닛 온도도 기준에 못 미쳐 원인은 쿨러 핀 오염 하나로 정해졌습니다.</a:t>
             </a:r>
           </a:p>
         </p:txBody>
@@ -3796,7 +3796,7 @@
           <a:lstStyle/>
           <a:p>
             <a:r>
-              <a:t>첫날의 시연에서는 추천에 근거가 붙어 나온다는 정도로 보고 지나간 화면입니다. 지금은 줄마다 그것이 어디에서 왔는지를 말할 수 있습니다.</a:t>
+              <a:t>1일차의 시연에서는 추천에 근거가 붙어 나온다는 정도로 보고 지나간 화면입니다. 지금은 줄마다 그것이 어디에서 왔는지를 말할 수 있습니다. 추천안에 이른 길은 2일차의 스키마가 정한 관계를 따라온 경로이고, 후보로 고른 규칙은 이 고장 유형에 쓸 수 있는 조치를 후보로 올린 판단 규칙이며, 출처는 인제스천에서 조치 방법의 단계에 이어 둔 매뉴얼의 절입니다. 담당자는 이 세 가지를 보고 승인할지를 정합니다.</a:t>
             </a:r>
           </a:p>
         </p:txBody>
@@ -3866,7 +3866,7 @@
           <a:lstStyle/>
           <a:p>
             <a:r>
-              <a:t>위에서 아래로 스키마, 인스턴스 데이터, 값입니다. 위의 둘은 지식 그래프에 있고 맨 아래의 값은 지식 그래프 밖의 원천에 있습니다. 줄마다 둘째 줄이 그 층이 바뀌는 때입니다. 센서를 하나 새로 달면 인스턴스가 늘 뿐 스키마는 그대로이고, 매뉴얼의 기준이 바뀌면 인스턴스 데이터가 바뀌며, 유온은 매초 바뀝니다.</a:t>
+              <a:t>위에서 아래로 스키마, 인스턴스 데이터, 값입니다. 맨 위의 점선 상자는 원인이 고장 유형을 CAUSES로 가리킨다는 정의이고, 가운데는 그 정의에 맞추어 들어간 쿨러 핀 오염과 쿨러 냉각 성능 상실, 그리고 증거 기준입니다. 위의 둘은 지식 그래프에 있고 맨 아래의 값은 지식 그래프 밖의 원천에 있어, 판단하는 순간에 파란 점선을 따라 읽습니다. 왼쪽에 적힌 것이 그 층이 바뀌는 때입니다. 센서를 하나 새로 달면 인스턴스가 늘 뿐 스키마는 그대로이고, 매뉴얼의 기준이 바뀌면 인스턴스 데이터가 바뀌며, 유온은 매초 바뀝니다.</a:t>
             </a:r>
           </a:p>
         </p:txBody>
@@ -3936,7 +3936,7 @@
           <a:lstStyle/>
           <a:p>
             <a:r>
-              <a:t>층을 나누어 둔 덕분에 어디를 보아야 하는지가 갈립니다. 기준이 틀렸으면 인용을 따라 문서로 가고, 숫자가 틀렸으면 출처 기록을 따라 원천으로 갑니다.</a:t>
+              <a:t>층을 나누어 둔 덕분에 어디를 보아야 하는지가 갈립니다. 첫 행처럼 따라갈 관계가 없어 답이 나오지 않으면 스키마의 정의를 봅니다. 둘째 행처럼 기준이 매뉴얼과 다르면 인용을 따라 문서로 가서 인스턴스 데이터를 고칩니다. 셋째 행처럼 숫자가 실제와 다르면 값의 출처 기록을 따라 원천으로 갑니다.</a:t>
             </a:r>
           </a:p>
         </p:txBody>
@@ -4076,7 +4076,7 @@
           <a:lstStyle/>
           <a:p>
             <a:r>
-              <a:t>규칙은 오른쪽으로 문서에 이어지고 아래로 값의 자리에 이어집니다. 근거는 문서 쪽으로, 값은 입력 데이터 쪽으로 따라갑니다.</a:t>
+              <a:t>감점 규칙에서 오른쪽으로 가면 근거가 나옵니다. 규칙은 DERIVED_FROM으로 매뉴얼 8.8절을 가리키고 그 절은 PART_OF로 문서 HM-8에 속합니다. 아래로 가면 값의 자리가 나옵니다. 규칙이 TESTS로 검사하는 입력 데이터가 연속 운전 시간이고, 그 값은 판단할 때 원천에서 읽습니다. 그래서 규칙 하나에서 근거는 문서 쪽으로, 값은 입력 데이터 쪽으로 따라갑니다.</a:t>
             </a:r>
           </a:p>
         </p:txBody>
@@ -4146,7 +4146,7 @@
           <a:lstStyle/>
           <a:p>
             <a:r>
-              <a:t>규칙만 있고 근거가 없으면 어느 규칙을 고쳐야 하는지 찾을 수 없습니다. 출처 관계와 개정 이력이 여기서 함께 쓰입니다.</a:t>
+              <a:t>매뉴얼이 개정되어 24시간이라는 기준이 바뀐다고 해 봅니다. 문서 식별자는 그대로 두고 새 판본을 올린 뒤, 바뀐 절을 DERIVED_FROM으로 가리키는 규칙을 찾으면 고칠 대상이 나옵니다. 고친 내용은 처음 넣을 때와 같이 검토를 거쳐 적재하고 적재 기록을 남깁니다. 규칙만 있고 근거가 없으면 어느 규칙을 고쳐야 하는지 찾을 수 없으므로, 출처 관계와 개정 이력이 여기서 함께 쓰입니다.</a:t>
             </a:r>
           </a:p>
         </p:txBody>
@@ -4286,7 +4286,7 @@
           <a:lstStyle/>
           <a:p>
             <a:r>
-              <a:t>첫날에 AI에게 그대로 물으면 답의 근거를 확인할 수 없다고 했습니다. 그 문제에 대한 답이 이 구분입니다.</a:t>
+              <a:t>1일차에 AI에게 그대로 물으면 답의 근거를 확인할 수 없다고 했습니다. 그 문제에 대한 답이 이 구분입니다. 왼쪽의 사실과 기준은 사람이 검토해 지식 그래프와 규칙에 정해 두고, 오른쪽의 조회와 종합만 에이전트에게 맡깁니다. 그래서 에이전트가 낸 추천은 어느 지식과 어느 값에서 나왔는지를 되짚을 수 있습니다.</a:t>
             </a:r>
           </a:p>
         </p:txBody>
@@ -4916,7 +4916,7 @@
           <a:lstStyle/>
           <a:p>
             <a:r>
-              <a:t>유온을 가장 많이 내리던 3순위 조치가 성과에 닿는 길을 따라가 보겠습니다. 조치는 성과 지표를 직접 바꾸지 않고 설비의 값을 바꾸며, 이 조치는 팬 속도를 올리고 펌프 부하를 내립니다. 팬 속도를 올리면 냉각이 늘어 유온이 내려가고, 부하를 내려도 발열이 줄어 유온이 내려갑니다. 두 길이 유온에서 만나므로 이 조치가 유온을 가장 많이 내리고, 유온이 내려가면 인터록 여유가 늘어납니다.</a:t>
+              <a:t>유온을 가장 많이 내리던 조치인 팬 최대 운전과 부하 80 %가 성과에 닿는 길을 따라가 보겠습니다. 조치는 성과 지표를 직접 바꾸지 않고 설비의 값을 바꾸며, 이 조치는 팬 속도를 올리고 펌프 부하를 내립니다. 팬 속도를 올리면 냉각이 늘어 유온이 내려가고, 부하를 내려도 발열이 줄어 유온이 내려갑니다. 두 길이 유온에서 만나므로 이 조치가 유온을 가장 많이 내리고, 유온이 내려가면 인터록 여유가 늘어납니다.</a:t>
             </a:r>
           </a:p>
         </p:txBody>
@@ -8618,7 +8618,7 @@
       </p:sp>
       <p:pic>
         <p:nvPicPr>
-          <p:cNvPr id="6" name="삽화:인터록여유_1.svg" descr="illust_3969185360744367305_1791717219.png"/>
+          <p:cNvPr id="6" name="삽화:인터록여유_1.svg" descr="illust_4761761449605343997_1791769661.png"/>
           <p:cNvPicPr>
             <a:picLocks noChangeAspect="1"/>
           </p:cNvPicPr>
@@ -9213,7 +9213,7 @@
       </p:sp>
       <p:pic>
         <p:nvPicPr>
-          <p:cNvPr id="6" name="삽화:성과경로_2.svg" descr="illust_6603792168707390855_1791717219.png"/>
+          <p:cNvPr id="6" name="삽화:성과경로_2.svg" descr="illust_5150522425874776888_1791769661.png"/>
           <p:cNvPicPr>
             <a:picLocks noChangeAspect="1"/>
           </p:cNvPicPr>
@@ -9724,7 +9724,7 @@
       </p:sp>
       <p:pic>
         <p:nvPicPr>
-          <p:cNvPr id="6" name="삽화:성과경로_5.svg" descr="illust_8320307519415364257_1791717219.png"/>
+          <p:cNvPr id="6" name="삽화:성과경로_5.svg" descr="illust_8091845198819376105_1791769661.png"/>
           <p:cNvPicPr>
             <a:picLocks noChangeAspect="1"/>
           </p:cNvPicPr>
@@ -10310,7 +10310,7 @@
                 <a:ea typeface="맑은 고딕"/>
                 <a:cs typeface="맑은 고딕"/>
               </a:rPr>
-              <a:t>실제 순위: 쿨러 과열 한 건의 네 후보</a:t>
+              <a:t>실제 순위: 쿨러 사건의 네 후보</a:t>
             </a:r>
           </a:p>
         </p:txBody>
@@ -10349,7 +10349,7 @@
                 <a:ea typeface="맑은 고딕"/>
                 <a:cs typeface="맑은 고딕"/>
               </a:rPr>
-              <a:t>네 후보에 실제로 매겨진 점수에서는 생산을 그대로 두는 팬 최대 운전이 1순위였다.</a:t>
+              <a:t>실제 점수에서는 생산을 그대로 두는 팬 최대 운전이 1순위였고, 부하를 낮추는 두 후보는 점수가 같았다.</a:t>
             </a:r>
           </a:p>
         </p:txBody>
@@ -11222,7 +11222,7 @@
                 <a:ea typeface="맑은 고딕"/>
                 <a:cs typeface="맑은 고딕"/>
               </a:rPr>
-              <a:t>3순위와 4순위가 뒤진 까닭: 항목별 득실</a:t>
+              <a:t>세 후보가 1순위에 뒤진 까닭: 항목별 득실</a:t>
             </a:r>
           </a:p>
         </p:txBody>
@@ -11452,7 +11452,7 @@
                 <a:ea typeface="맑은 고딕"/>
                 <a:cs typeface="맑은 고딕"/>
               </a:rPr>
-              <a:t>3순위: 부하를 낮추는 조치</a:t>
+              <a:t>부하를 낮추는 두 조치</a:t>
             </a:r>
           </a:p>
         </p:txBody>
@@ -11494,7 +11494,7 @@
                 <a:ea typeface="맑은 고딕"/>
                 <a:cs typeface="맑은 고딕"/>
               </a:rPr>
-              <a:t>• 팬 최대 운전과 부하 80 %를 1순위와 견준 점수이다</a:t>
+              <a:t>• 1순위와 견준 점수이며 두 조치의 내역이 같다</a:t>
             </a:r>
           </a:p>
           <a:p>
@@ -11516,6 +11516,27 @@
                 <a:cs typeface="맑은 고딕"/>
               </a:rPr>
               <a:t>• 얻은 것 +0.26: 예측 유온, 유온을 더 내린다</a:t>
+            </a:r>
+          </a:p>
+          <a:p>
+            <a:pPr algn="l">
+              <a:lnSpc>
+                <a:spcPct val="110000"/>
+              </a:lnSpc>
+              <a:spcAft>
+                <a:spcPts val="600"/>
+              </a:spcAft>
+            </a:pPr>
+            <a:r>
+              <a:rPr sz="1450" b="0">
+                <a:solidFill>
+                  <a:srgbClr val="1F2A3A"/>
+                </a:solidFill>
+                <a:latin typeface="맑은 고딕"/>
+                <a:ea typeface="맑은 고딕"/>
+                <a:cs typeface="맑은 고딕"/>
+              </a:rPr>
+              <a:t>• 이 점수에는 상한이 있어 47.7 ℃와 44.6 ℃가 같은 값을 받았다</a:t>
             </a:r>
           </a:p>
           <a:p>
@@ -12827,7 +12848,7 @@
       </p:sp>
       <p:pic>
         <p:nvPicPr>
-          <p:cNvPr id="6" name="삽화:가정분석_2.svg" descr="illust_7191398225758446907_1791717219.png"/>
+          <p:cNvPr id="6" name="삽화:가정분석_2.svg" descr="illust_2840670803297004563_1791769661.png"/>
           <p:cNvPicPr>
             <a:picLocks noChangeAspect="1"/>
           </p:cNvPicPr>
@@ -13317,7 +13338,7 @@
       </p:sp>
       <p:pic>
         <p:nvPicPr>
-          <p:cNvPr id="6" name="삽화:가정분석_5.svg" descr="illust_4651257076957178806_1791717219.png"/>
+          <p:cNvPr id="6" name="삽화:가정분석_5.svg" descr="illust_1981780010052619609_1791769661.png"/>
           <p:cNvPicPr>
             <a:picLocks noChangeAspect="1"/>
           </p:cNvPicPr>
@@ -14121,7 +14142,7 @@
                 <a:ea typeface="맑은 고딕"/>
                 <a:cs typeface="맑은 고딕"/>
               </a:rPr>
-              <a:t>이 실습을 마치면 같은 이상 상황에 운전 조건과 성과 기준을 달리한 판단 결과를 나란히 견준 기록이 남는다.</a:t>
+              <a:t>이 실습의 결과물은 같은 이상 상황에 운전 조건과 성과 기준을 달리한 판단 결과를 나란히 견준 기록이다.</a:t>
             </a:r>
           </a:p>
         </p:txBody>
@@ -18796,7 +18817,7 @@
                 <a:ea typeface="맑은 고딕"/>
                 <a:cs typeface="맑은 고딕"/>
               </a:rPr>
-              <a:t>• 「쿨러 핀 오염이 가장 흔하다. 최근 30초 냉각 효율 평균이 70 % 미만이고 팬은 정상이면 핀 오염으로 판정한다.」</a:t>
+              <a:t>• 쿨러 핀 오염이 가장 흔하며, 최근 30초 냉각 효율 평균이 70 % 미만이고 팬이 정상이면 핀 오염으로 판정한다고 적혀 있다</a:t>
             </a:r>
           </a:p>
           <a:p>
@@ -20714,7 +20735,7 @@
       </p:sp>
       <p:pic>
         <p:nvPicPr>
-          <p:cNvPr id="6" name="삽화:인제스천_전체.svg" descr="illust_603971374041309141_1791715498.png"/>
+          <p:cNvPr id="6" name="삽화:인제스천_전체.svg" descr="illust_2426465941144567842_1791770333.png"/>
           <p:cNvPicPr>
             <a:picLocks noChangeAspect="1"/>
           </p:cNvPicPr>
@@ -25529,8 +25550,8 @@
         </p:nvSpPr>
         <p:spPr>
           <a:xfrm>
-            <a:off x="548640" y="1773936"/>
-            <a:ext cx="6766560" cy="4434840"/>
+            <a:off x="548640" y="1665478"/>
+            <a:ext cx="6766560" cy="4651755"/>
           </a:xfrm>
           <a:prstGeom prst="roundRect">
             <a:avLst>
@@ -25560,8 +25581,8 @@
         </p:nvSpPr>
         <p:spPr>
           <a:xfrm>
-            <a:off x="731520" y="1911096"/>
-            <a:ext cx="6400800" cy="4160520"/>
+            <a:off x="731520" y="1802638"/>
+            <a:ext cx="6400800" cy="4377436"/>
           </a:xfrm>
           <a:prstGeom prst="rect">
             <a:avLst/>
@@ -26524,8 +26545,8 @@
         </p:nvSpPr>
         <p:spPr>
           <a:xfrm>
-            <a:off x="7635240" y="1773936"/>
-            <a:ext cx="4007815" cy="1108710"/>
+            <a:off x="7635240" y="1665478"/>
+            <a:ext cx="4007815" cy="1162938"/>
           </a:xfrm>
           <a:prstGeom prst="rect">
             <a:avLst/>
@@ -26587,8 +26608,8 @@
         </p:nvSpPr>
         <p:spPr>
           <a:xfrm>
-            <a:off x="7635240" y="2882646"/>
-            <a:ext cx="4007815" cy="1108710"/>
+            <a:off x="7635240" y="2828417"/>
+            <a:ext cx="4007815" cy="1162938"/>
           </a:xfrm>
           <a:prstGeom prst="rect">
             <a:avLst/>
@@ -26651,7 +26672,7 @@
         <p:spPr>
           <a:xfrm>
             <a:off x="7635240" y="3991356"/>
-            <a:ext cx="4007815" cy="1108710"/>
+            <a:ext cx="4007815" cy="1162938"/>
           </a:xfrm>
           <a:prstGeom prst="rect">
             <a:avLst/>
@@ -26700,7 +26721,7 @@
                 <a:ea typeface="맑은 고딕"/>
                 <a:cs typeface="맑은 고딕"/>
               </a:rPr>
-              <a:t>문장의 「사전 확률 0.6」이 값으로 옮겨졌고, 이 내용이 나온 절의 번호가 붙었다.</a:t>
+              <a:t>원문의 「사전 확률 0.6」은 이 원인이 얼마나 흔한지를 적은 값이며 prior로 옮겨졌다. 이 내용이 나온 절의 번호가 section에 붙었다.</a:t>
             </a:r>
           </a:p>
         </p:txBody>
@@ -26713,8 +26734,8 @@
         </p:nvSpPr>
         <p:spPr>
           <a:xfrm>
-            <a:off x="7635240" y="5100066"/>
-            <a:ext cx="4007815" cy="1108710"/>
+            <a:off x="7635240" y="5154295"/>
+            <a:ext cx="4007815" cy="1162938"/>
           </a:xfrm>
           <a:prstGeom prst="rect">
             <a:avLst/>
@@ -27738,7 +27759,7 @@
       </p:sp>
       <p:pic>
         <p:nvPicPr>
-          <p:cNvPr id="6" name="삽화:한문장.svg" descr="illust_7739948470188947528_1791715498.png"/>
+          <p:cNvPr id="6" name="삽화:한문장.svg" descr="illust_3131223168920983005_1791770333.png"/>
           <p:cNvPicPr>
             <a:picLocks noChangeAspect="1"/>
           </p:cNvPicPr>
@@ -28858,7 +28879,7 @@
                 <a:ea typeface="맑은 고딕"/>
                 <a:cs typeface="맑은 고딕"/>
               </a:rPr>
-              <a:t>쿨러 핀 세척을 주변 온도 상승에 ADDRESSES로 잇는다면 → 듣지 않는 조치의 추천</a:t>
+              <a:t>쿨러 핀 세척을 주변 온도 상승에 ADDRESSES(듣는 원인)로 잇는다면 → 듣지 않는 조치의 추천</a:t>
             </a:r>
           </a:p>
         </p:txBody>
@@ -29246,7 +29267,7 @@
       </p:sp>
       <p:pic>
         <p:nvPicPr>
-          <p:cNvPr id="6" name="삽화:인용.svg" descr="illust_5193778502145254449_1791715498.png"/>
+          <p:cNvPr id="6" name="삽화:인용.svg" descr="illust_7194022710018681946_1791770333.png"/>
           <p:cNvPicPr>
             <a:picLocks noChangeAspect="1"/>
           </p:cNvPicPr>
@@ -30847,7 +30868,7 @@
       </p:sp>
       <p:pic>
         <p:nvPicPr>
-          <p:cNvPr id="6" name="삽화:인제스천_6.svg" descr="illust_8432607400288367960_1791715498.png"/>
+          <p:cNvPr id="6" name="삽화:인제스천_6.svg" descr="illust_8994685440392938235_1791770333.png"/>
           <p:cNvPicPr>
             <a:picLocks noChangeAspect="1"/>
           </p:cNvPicPr>
@@ -31401,7 +31422,7 @@
       </p:sp>
       <p:pic>
         <p:nvPicPr>
-          <p:cNvPr id="6" name="삽화:적재묶음_사슬.svg" descr="illust_1827550750414391004_1791715498.png"/>
+          <p:cNvPr id="6" name="삽화:적재묶음_사슬.svg" descr="illust_3483673401988418668_1791770333.png"/>
           <p:cNvPicPr>
             <a:picLocks noChangeAspect="1"/>
           </p:cNvPicPr>
@@ -34421,7 +34442,7 @@
       </p:sp>
       <p:pic>
         <p:nvPicPr>
-          <p:cNvPr id="6" name="삽화:입력데이터_자리.svg" descr="illust_6317862230045958960_1791715498.png"/>
+          <p:cNvPr id="6" name="삽화:입력데이터_자리.svg" descr="illust_4687401238430181515_1791770333.png"/>
           <p:cNvPicPr>
             <a:picLocks noChangeAspect="1"/>
           </p:cNvPicPr>
@@ -37072,7 +37093,7 @@
                 <a:ea typeface="맑은 고딕"/>
                 <a:cs typeface="맑은 고딕"/>
               </a:rPr>
-              <a:t>이 실습을 마치면 문서 식별자, 원문 구간, 인용문이 붙은 검토용 구조화 데이터가 만들어진다.</a:t>
+              <a:t>추출 실습의 결과물은 문서 식별자, 원문 구간, 인용문이 붙은 검토용 구조화 데이터이다.</a:t>
             </a:r>
           </a:p>
         </p:txBody>
@@ -38206,7 +38227,7 @@
                 <a:ea typeface="맑은 고딕"/>
                 <a:cs typeface="맑은 고딕"/>
               </a:rPr>
-              <a:t>이 실습을 마치면 앞서 만든 그래프에 문서에서 온 지식이 더해지고 고장 유형에서 출처까지를 한 번에 조회할 수 있다.</a:t>
+              <a:t>앞서 만든 그래프에 문서에서 온 지식을 더하면 고장 유형에서 원문 출처까지가 한 번의 조회로 이어진다.</a:t>
             </a:r>
           </a:p>
         </p:txBody>
@@ -39317,7 +39338,7 @@
                 <a:ea typeface="맑은 고딕"/>
                 <a:cs typeface="맑은 고딕"/>
               </a:rPr>
-              <a:t>유온을 44.6 ℃까지 내리는 조치가 3순위였다는 것은 순위를 가른 기준이 유온 하나가 아님을 뜻한다.</a:t>
+              <a:t>유온을 44.6 ℃까지 내리는 조치가 1순위가 아니었다는 것은 순위를 가른 기준이 유온 하나가 아님을 뜻한다.</a:t>
             </a:r>
           </a:p>
         </p:txBody>
@@ -39718,7 +39739,7 @@
                 <a:ea typeface="맑은 고딕"/>
                 <a:cs typeface="맑은 고딕"/>
               </a:rPr>
-              <a:t>44.6 ℃이지만 3순위</a:t>
+              <a:t>44.6 ℃이지만 1순위가 아니다</a:t>
             </a:r>
           </a:p>
         </p:txBody>
@@ -40500,7 +40521,7 @@
       </p:sp>
       <p:pic>
         <p:nvPicPr>
-          <p:cNvPr id="6" name="삽화:네일차_흐름.svg" descr="illust_7728678620933042218_1791715498.png"/>
+          <p:cNvPr id="6" name="삽화:네일차_흐름.svg" descr="illust_3180783256676859588_1791770333.png"/>
           <p:cNvPicPr>
             <a:picLocks noChangeAspect="1"/>
           </p:cNvPicPr>
@@ -41179,7 +41200,7 @@
       </p:sp>
       <p:pic>
         <p:nvPicPr>
-          <p:cNvPr id="6" name="삽화:관계.svg" descr="illust_2212652392615816376_1791715399.png"/>
+          <p:cNvPr id="6" name="삽화:관계.svg" descr="illust_8363113913182383374_1791715399.png"/>
           <p:cNvPicPr>
             <a:picLocks noChangeAspect="1"/>
           </p:cNvPicPr>
@@ -42424,40 +42445,9 @@
           </a:p>
         </p:txBody>
       </p:sp>
-      <p:sp>
-        <p:nvSpPr>
-          <p:cNvPr id="6" name="Oval 5"/>
-          <p:cNvSpPr/>
-          <p:nvPr/>
-        </p:nvSpPr>
-        <p:spPr>
-          <a:xfrm>
-            <a:off x="548639" y="3122676"/>
-            <a:ext cx="1737360" cy="1737360"/>
-          </a:xfrm>
-          <a:prstGeom prst="ellipse">
-            <a:avLst/>
-          </a:prstGeom>
-          <a:solidFill>
-            <a:srgbClr val="E7F3FD"/>
-          </a:solidFill>
-          <a:ln w="25400">
-            <a:solidFill>
-              <a:srgbClr val="5CB8F2"/>
-            </a:solidFill>
-          </a:ln>
-        </p:spPr>
-        <p:txBody>
-          <a:bodyPr rtlCol="0" anchor="ctr"/>
-          <a:lstStyle/>
-          <a:p>
-            <a:pPr algn="ctr"/>
-          </a:p>
-        </p:txBody>
-      </p:sp>
       <p:pic>
         <p:nvPicPr>
-          <p:cNvPr id="7" name="아이콘:engine" descr="engine_13294B_1.6.png"/>
+          <p:cNvPr id="6" name="삽화:두층_3.svg" descr="illust_4351859361709594569_1791770880.png"/>
           <p:cNvPicPr>
             <a:picLocks noChangeAspect="1"/>
           </p:cNvPicPr>
@@ -42471,8 +42461,8 @@
         </p:blipFill>
         <p:spPr>
           <a:xfrm>
-            <a:off x="1208836" y="3365906"/>
-            <a:ext cx="416966" cy="416966"/>
+            <a:off x="641100" y="1627632"/>
+            <a:ext cx="10909495" cy="4727448"/>
           </a:xfrm>
           <a:prstGeom prst="rect">
             <a:avLst/>
@@ -42481,31 +42471,97 @@
       </p:pic>
       <p:sp>
         <p:nvSpPr>
+          <p:cNvPr id="7" name="TextBox 6"/>
+          <p:cNvSpPr txBox="1"/>
+          <p:nvPr/>
+        </p:nvSpPr>
+        <p:spPr>
+          <a:xfrm>
+            <a:off x="3804853" y="1651269"/>
+            <a:ext cx="6763886" cy="507618"/>
+          </a:xfrm>
+          <a:prstGeom prst="rect">
+            <a:avLst/>
+          </a:prstGeom>
+          <a:noFill/>
+        </p:spPr>
+        <p:txBody>
+          <a:bodyPr wrap="square" anchor="t"/>
+          <a:lstStyle/>
+          <a:p>
+            <a:pPr algn="ctr">
+              <a:lnSpc>
+                <a:spcPct val="110000"/>
+              </a:lnSpc>
+              <a:spcAft>
+                <a:spcPts val="100"/>
+              </a:spcAft>
+            </a:pPr>
+            <a:r>
+              <a:rPr sz="1350" b="1">
+                <a:solidFill>
+                  <a:srgbClr val="13294B"/>
+                </a:solidFill>
+                <a:latin typeface="맑은 고딕"/>
+                <a:ea typeface="맑은 고딕"/>
+                <a:cs typeface="맑은 고딕"/>
+              </a:rPr>
+              <a:t>질문의 답이 나오는 길</a:t>
+            </a:r>
+          </a:p>
+          <a:p>
+            <a:pPr algn="ctr">
+              <a:lnSpc>
+                <a:spcPct val="110000"/>
+              </a:lnSpc>
+              <a:spcAft>
+                <a:spcPts val="100"/>
+              </a:spcAft>
+            </a:pPr>
+            <a:r>
+              <a:rPr sz="1100" b="0">
+                <a:solidFill>
+                  <a:srgbClr val="556175"/>
+                </a:solidFill>
+                <a:latin typeface="맑은 고딕"/>
+                <a:ea typeface="맑은 고딕"/>
+                <a:cs typeface="맑은 고딕"/>
+              </a:rPr>
+              <a:t>오일 쿨러를 재는 센서와 그 한계값은 아래 줄의 관계를 따라가면 나온다</a:t>
+            </a:r>
+          </a:p>
+        </p:txBody>
+      </p:sp>
+      <p:sp>
+        <p:nvSpPr>
           <p:cNvPr id="8" name="TextBox 7"/>
           <p:cNvSpPr txBox="1"/>
           <p:nvPr/>
         </p:nvSpPr>
         <p:spPr>
           <a:xfrm>
-            <a:off x="670255" y="3817620"/>
-            <a:ext cx="1494129" cy="868680"/>
-          </a:xfrm>
-          <a:prstGeom prst="rect">
-            <a:avLst/>
-          </a:prstGeom>
-          <a:noFill/>
-        </p:spPr>
-        <p:txBody>
-          <a:bodyPr wrap="square" anchor="ctr"/>
+            <a:off x="804742" y="2573121"/>
+            <a:ext cx="1854614" cy="678053"/>
+          </a:xfrm>
+          <a:prstGeom prst="rect">
+            <a:avLst/>
+          </a:prstGeom>
+          <a:noFill/>
+        </p:spPr>
+        <p:txBody>
+          <a:bodyPr wrap="square" anchor="t"/>
           <a:lstStyle/>
           <a:p>
             <a:pPr algn="ctr">
               <a:lnSpc>
                 <a:spcPct val="110000"/>
               </a:lnSpc>
-            </a:pPr>
-            <a:r>
-              <a:rPr sz="1400" b="1">
+              <a:spcAft>
+                <a:spcPts val="100"/>
+              </a:spcAft>
+            </a:pPr>
+            <a:r>
+              <a:rPr sz="1350" b="1">
                 <a:solidFill>
                   <a:srgbClr val="13294B"/>
                 </a:solidFill>
@@ -42513,6 +42569,552 @@
                 <a:ea typeface="맑은 고딕"/>
                 <a:cs typeface="맑은 고딕"/>
               </a:rPr>
+              <a:t>결과물 ① 스키마</a:t>
+            </a:r>
+          </a:p>
+          <a:p>
+            <a:pPr algn="ctr">
+              <a:lnSpc>
+                <a:spcPct val="110000"/>
+              </a:lnSpc>
+              <a:spcAft>
+                <a:spcPts val="100"/>
+              </a:spcAft>
+            </a:pPr>
+            <a:r>
+              <a:rPr sz="1100" b="0">
+                <a:solidFill>
+                  <a:srgbClr val="556175"/>
+                </a:solidFill>
+                <a:latin typeface="맑은 고딕"/>
+                <a:ea typeface="맑은 고딕"/>
+                <a:cs typeface="맑은 고딕"/>
+              </a:rPr>
+              <a:t>무엇이 무엇에</a:t>
+            </a:r>
+          </a:p>
+          <a:p>
+            <a:pPr algn="ctr">
+              <a:lnSpc>
+                <a:spcPct val="110000"/>
+              </a:lnSpc>
+              <a:spcAft>
+                <a:spcPts val="100"/>
+              </a:spcAft>
+            </a:pPr>
+            <a:r>
+              <a:rPr sz="1100" b="0">
+                <a:solidFill>
+                  <a:srgbClr val="556175"/>
+                </a:solidFill>
+                <a:latin typeface="맑은 고딕"/>
+                <a:ea typeface="맑은 고딕"/>
+                <a:cs typeface="맑은 고딕"/>
+              </a:rPr>
+              <a:t>이어질 수 있는가</a:t>
+            </a:r>
+          </a:p>
+        </p:txBody>
+      </p:sp>
+      <p:sp>
+        <p:nvSpPr>
+          <p:cNvPr id="9" name="TextBox 8"/>
+          <p:cNvSpPr txBox="1"/>
+          <p:nvPr/>
+        </p:nvSpPr>
+        <p:spPr>
+          <a:xfrm>
+            <a:off x="2986641" y="2762219"/>
+            <a:ext cx="1309139" cy="507618"/>
+          </a:xfrm>
+          <a:prstGeom prst="rect">
+            <a:avLst/>
+          </a:prstGeom>
+          <a:noFill/>
+        </p:spPr>
+        <p:txBody>
+          <a:bodyPr wrap="square" anchor="t"/>
+          <a:lstStyle/>
+          <a:p>
+            <a:pPr algn="ctr">
+              <a:lnSpc>
+                <a:spcPct val="110000"/>
+              </a:lnSpc>
+              <a:spcAft>
+                <a:spcPts val="100"/>
+              </a:spcAft>
+            </a:pPr>
+            <a:r>
+              <a:rPr sz="1350" b="1">
+                <a:solidFill>
+                  <a:srgbClr val="13294B"/>
+                </a:solidFill>
+                <a:latin typeface="맑은 고딕"/>
+                <a:ea typeface="맑은 고딕"/>
+                <a:cs typeface="맑은 고딕"/>
+              </a:rPr>
+              <a:t>Asset</a:t>
+            </a:r>
+          </a:p>
+          <a:p>
+            <a:pPr algn="ctr">
+              <a:lnSpc>
+                <a:spcPct val="110000"/>
+              </a:lnSpc>
+              <a:spcAft>
+                <a:spcPts val="100"/>
+              </a:spcAft>
+            </a:pPr>
+            <a:r>
+              <a:rPr sz="1100" b="0">
+                <a:solidFill>
+                  <a:srgbClr val="556175"/>
+                </a:solidFill>
+                <a:latin typeface="맑은 고딕"/>
+                <a:ea typeface="맑은 고딕"/>
+                <a:cs typeface="맑은 고딕"/>
+              </a:rPr>
+              <a:t>설비</a:t>
+            </a:r>
+          </a:p>
+        </p:txBody>
+      </p:sp>
+      <p:sp>
+        <p:nvSpPr>
+          <p:cNvPr id="10" name="TextBox 9"/>
+          <p:cNvSpPr txBox="1"/>
+          <p:nvPr/>
+        </p:nvSpPr>
+        <p:spPr>
+          <a:xfrm>
+            <a:off x="5354001" y="2762219"/>
+            <a:ext cx="1309139" cy="507618"/>
+          </a:xfrm>
+          <a:prstGeom prst="rect">
+            <a:avLst/>
+          </a:prstGeom>
+          <a:noFill/>
+        </p:spPr>
+        <p:txBody>
+          <a:bodyPr wrap="square" anchor="t"/>
+          <a:lstStyle/>
+          <a:p>
+            <a:pPr algn="ctr">
+              <a:lnSpc>
+                <a:spcPct val="110000"/>
+              </a:lnSpc>
+              <a:spcAft>
+                <a:spcPts val="100"/>
+              </a:spcAft>
+            </a:pPr>
+            <a:r>
+              <a:rPr sz="1350" b="1">
+                <a:solidFill>
+                  <a:srgbClr val="13294B"/>
+                </a:solidFill>
+                <a:latin typeface="맑은 고딕"/>
+                <a:ea typeface="맑은 고딕"/>
+                <a:cs typeface="맑은 고딕"/>
+              </a:rPr>
+              <a:t>Component</a:t>
+            </a:r>
+          </a:p>
+          <a:p>
+            <a:pPr algn="ctr">
+              <a:lnSpc>
+                <a:spcPct val="110000"/>
+              </a:lnSpc>
+              <a:spcAft>
+                <a:spcPts val="100"/>
+              </a:spcAft>
+            </a:pPr>
+            <a:r>
+              <a:rPr sz="1100" b="0">
+                <a:solidFill>
+                  <a:srgbClr val="556175"/>
+                </a:solidFill>
+                <a:latin typeface="맑은 고딕"/>
+                <a:ea typeface="맑은 고딕"/>
+                <a:cs typeface="맑은 고딕"/>
+              </a:rPr>
+              <a:t>구성 요소</a:t>
+            </a:r>
+          </a:p>
+        </p:txBody>
+      </p:sp>
+      <p:sp>
+        <p:nvSpPr>
+          <p:cNvPr id="11" name="TextBox 10"/>
+          <p:cNvSpPr txBox="1"/>
+          <p:nvPr/>
+        </p:nvSpPr>
+        <p:spPr>
+          <a:xfrm>
+            <a:off x="7710452" y="2762219"/>
+            <a:ext cx="1309139" cy="507618"/>
+          </a:xfrm>
+          <a:prstGeom prst="rect">
+            <a:avLst/>
+          </a:prstGeom>
+          <a:noFill/>
+        </p:spPr>
+        <p:txBody>
+          <a:bodyPr wrap="square" anchor="t"/>
+          <a:lstStyle/>
+          <a:p>
+            <a:pPr algn="ctr">
+              <a:lnSpc>
+                <a:spcPct val="110000"/>
+              </a:lnSpc>
+              <a:spcAft>
+                <a:spcPts val="100"/>
+              </a:spcAft>
+            </a:pPr>
+            <a:r>
+              <a:rPr sz="1350" b="1">
+                <a:solidFill>
+                  <a:srgbClr val="13294B"/>
+                </a:solidFill>
+                <a:latin typeface="맑은 고딕"/>
+                <a:ea typeface="맑은 고딕"/>
+                <a:cs typeface="맑은 고딕"/>
+              </a:rPr>
+              <a:t>Sensor</a:t>
+            </a:r>
+          </a:p>
+          <a:p>
+            <a:pPr algn="ctr">
+              <a:lnSpc>
+                <a:spcPct val="110000"/>
+              </a:lnSpc>
+              <a:spcAft>
+                <a:spcPts val="100"/>
+              </a:spcAft>
+            </a:pPr>
+            <a:r>
+              <a:rPr sz="1100" b="0">
+                <a:solidFill>
+                  <a:srgbClr val="556175"/>
+                </a:solidFill>
+                <a:latin typeface="맑은 고딕"/>
+                <a:ea typeface="맑은 고딕"/>
+                <a:cs typeface="맑은 고딕"/>
+              </a:rPr>
+              <a:t>센서</a:t>
+            </a:r>
+          </a:p>
+        </p:txBody>
+      </p:sp>
+      <p:sp>
+        <p:nvSpPr>
+          <p:cNvPr id="12" name="TextBox 11"/>
+          <p:cNvSpPr txBox="1"/>
+          <p:nvPr/>
+        </p:nvSpPr>
+        <p:spPr>
+          <a:xfrm>
+            <a:off x="10077813" y="2762219"/>
+            <a:ext cx="1309139" cy="716788"/>
+          </a:xfrm>
+          <a:prstGeom prst="rect">
+            <a:avLst/>
+          </a:prstGeom>
+          <a:noFill/>
+        </p:spPr>
+        <p:txBody>
+          <a:bodyPr wrap="square" anchor="t"/>
+          <a:lstStyle/>
+          <a:p>
+            <a:pPr algn="ctr">
+              <a:lnSpc>
+                <a:spcPct val="110000"/>
+              </a:lnSpc>
+              <a:spcAft>
+                <a:spcPts val="100"/>
+              </a:spcAft>
+            </a:pPr>
+            <a:r>
+              <a:rPr sz="1350" b="1">
+                <a:solidFill>
+                  <a:srgbClr val="13294B"/>
+                </a:solidFill>
+                <a:latin typeface="맑은 고딕"/>
+                <a:ea typeface="맑은 고딕"/>
+                <a:cs typeface="맑은 고딕"/>
+              </a:rPr>
+              <a:t>StateVariable</a:t>
+            </a:r>
+          </a:p>
+          <a:p>
+            <a:pPr algn="ctr">
+              <a:lnSpc>
+                <a:spcPct val="110000"/>
+              </a:lnSpc>
+              <a:spcAft>
+                <a:spcPts val="100"/>
+              </a:spcAft>
+            </a:pPr>
+            <a:r>
+              <a:rPr sz="1100" b="0">
+                <a:solidFill>
+                  <a:srgbClr val="556175"/>
+                </a:solidFill>
+                <a:latin typeface="맑은 고딕"/>
+                <a:ea typeface="맑은 고딕"/>
+                <a:cs typeface="맑은 고딕"/>
+              </a:rPr>
+              <a:t>상태 변수</a:t>
+            </a:r>
+          </a:p>
+        </p:txBody>
+      </p:sp>
+      <p:sp>
+        <p:nvSpPr>
+          <p:cNvPr id="13" name="TextBox 12"/>
+          <p:cNvSpPr txBox="1"/>
+          <p:nvPr/>
+        </p:nvSpPr>
+        <p:spPr>
+          <a:xfrm>
+            <a:off x="3783034" y="2251655"/>
+            <a:ext cx="2072804" cy="337185"/>
+          </a:xfrm>
+          <a:prstGeom prst="rect">
+            <a:avLst/>
+          </a:prstGeom>
+          <a:noFill/>
+        </p:spPr>
+        <p:txBody>
+          <a:bodyPr wrap="square" anchor="t"/>
+          <a:lstStyle/>
+          <a:p>
+            <a:pPr algn="ctr">
+              <a:lnSpc>
+                <a:spcPct val="110000"/>
+              </a:lnSpc>
+              <a:spcAft>
+                <a:spcPts val="100"/>
+              </a:spcAft>
+            </a:pPr>
+            <a:r>
+              <a:rPr sz="1350" b="1">
+                <a:solidFill>
+                  <a:srgbClr val="13294B"/>
+                </a:solidFill>
+                <a:latin typeface="맑은 고딕"/>
+                <a:ea typeface="맑은 고딕"/>
+                <a:cs typeface="맑은 고딕"/>
+              </a:rPr>
+              <a:t>HAS_COMPONENT</a:t>
+            </a:r>
+          </a:p>
+        </p:txBody>
+      </p:sp>
+      <p:sp>
+        <p:nvSpPr>
+          <p:cNvPr id="14" name="TextBox 13"/>
+          <p:cNvSpPr txBox="1"/>
+          <p:nvPr/>
+        </p:nvSpPr>
+        <p:spPr>
+          <a:xfrm>
+            <a:off x="6368584" y="2251655"/>
+            <a:ext cx="1636424" cy="337185"/>
+          </a:xfrm>
+          <a:prstGeom prst="rect">
+            <a:avLst/>
+          </a:prstGeom>
+          <a:noFill/>
+        </p:spPr>
+        <p:txBody>
+          <a:bodyPr wrap="square" anchor="t"/>
+          <a:lstStyle/>
+          <a:p>
+            <a:pPr algn="ctr">
+              <a:lnSpc>
+                <a:spcPct val="110000"/>
+              </a:lnSpc>
+              <a:spcAft>
+                <a:spcPts val="100"/>
+              </a:spcAft>
+            </a:pPr>
+            <a:r>
+              <a:rPr sz="1350" b="1">
+                <a:solidFill>
+                  <a:srgbClr val="13294B"/>
+                </a:solidFill>
+                <a:latin typeface="맑은 고딕"/>
+                <a:ea typeface="맑은 고딕"/>
+                <a:cs typeface="맑은 고딕"/>
+              </a:rPr>
+              <a:t>MONITORED_BY</a:t>
+            </a:r>
+          </a:p>
+        </p:txBody>
+      </p:sp>
+      <p:sp>
+        <p:nvSpPr>
+          <p:cNvPr id="15" name="TextBox 14"/>
+          <p:cNvSpPr txBox="1"/>
+          <p:nvPr/>
+        </p:nvSpPr>
+        <p:spPr>
+          <a:xfrm>
+            <a:off x="8735945" y="2251655"/>
+            <a:ext cx="1636424" cy="337185"/>
+          </a:xfrm>
+          <a:prstGeom prst="rect">
+            <a:avLst/>
+          </a:prstGeom>
+          <a:noFill/>
+        </p:spPr>
+        <p:txBody>
+          <a:bodyPr wrap="square" anchor="t"/>
+          <a:lstStyle/>
+          <a:p>
+            <a:pPr algn="ctr">
+              <a:lnSpc>
+                <a:spcPct val="110000"/>
+              </a:lnSpc>
+              <a:spcAft>
+                <a:spcPts val="100"/>
+              </a:spcAft>
+            </a:pPr>
+            <a:r>
+              <a:rPr sz="1350" b="1">
+                <a:solidFill>
+                  <a:srgbClr val="13294B"/>
+                </a:solidFill>
+                <a:latin typeface="맑은 고딕"/>
+                <a:ea typeface="맑은 고딕"/>
+                <a:cs typeface="맑은 고딕"/>
+              </a:rPr>
+              <a:t>OBSERVES</a:t>
+            </a:r>
+          </a:p>
+        </p:txBody>
+      </p:sp>
+      <p:sp>
+        <p:nvSpPr>
+          <p:cNvPr id="16" name="TextBox 15"/>
+          <p:cNvSpPr txBox="1"/>
+          <p:nvPr/>
+        </p:nvSpPr>
+        <p:spPr>
+          <a:xfrm>
+            <a:off x="695647" y="4605924"/>
+            <a:ext cx="2072804" cy="887222"/>
+          </a:xfrm>
+          <a:prstGeom prst="rect">
+            <a:avLst/>
+          </a:prstGeom>
+          <a:noFill/>
+        </p:spPr>
+        <p:txBody>
+          <a:bodyPr wrap="square" anchor="t"/>
+          <a:lstStyle/>
+          <a:p>
+            <a:pPr algn="ctr">
+              <a:lnSpc>
+                <a:spcPct val="110000"/>
+              </a:lnSpc>
+              <a:spcAft>
+                <a:spcPts val="100"/>
+              </a:spcAft>
+            </a:pPr>
+            <a:r>
+              <a:rPr sz="1350" b="1">
+                <a:solidFill>
+                  <a:srgbClr val="1A6FC4"/>
+                </a:solidFill>
+                <a:latin typeface="맑은 고딕"/>
+                <a:ea typeface="맑은 고딕"/>
+                <a:cs typeface="맑은 고딕"/>
+              </a:rPr>
+              <a:t>결과물 ② 인스턴스 데이터</a:t>
+            </a:r>
+          </a:p>
+          <a:p>
+            <a:pPr algn="ctr">
+              <a:lnSpc>
+                <a:spcPct val="110000"/>
+              </a:lnSpc>
+              <a:spcAft>
+                <a:spcPts val="100"/>
+              </a:spcAft>
+            </a:pPr>
+            <a:r>
+              <a:rPr sz="1100" b="0">
+                <a:solidFill>
+                  <a:srgbClr val="556175"/>
+                </a:solidFill>
+                <a:latin typeface="맑은 고딕"/>
+                <a:ea typeface="맑은 고딕"/>
+                <a:cs typeface="맑은 고딕"/>
+              </a:rPr>
+              <a:t>무엇이 무엇에</a:t>
+            </a:r>
+          </a:p>
+          <a:p>
+            <a:pPr algn="ctr">
+              <a:lnSpc>
+                <a:spcPct val="110000"/>
+              </a:lnSpc>
+              <a:spcAft>
+                <a:spcPts val="100"/>
+              </a:spcAft>
+            </a:pPr>
+            <a:r>
+              <a:rPr sz="1100" b="0">
+                <a:solidFill>
+                  <a:srgbClr val="556175"/>
+                </a:solidFill>
+                <a:latin typeface="맑은 고딕"/>
+                <a:ea typeface="맑은 고딕"/>
+                <a:cs typeface="맑은 고딕"/>
+              </a:rPr>
+              <a:t>이어져 있는가</a:t>
+            </a:r>
+          </a:p>
+        </p:txBody>
+      </p:sp>
+      <p:sp>
+        <p:nvSpPr>
+          <p:cNvPr id="17" name="TextBox 16"/>
+          <p:cNvSpPr txBox="1"/>
+          <p:nvPr/>
+        </p:nvSpPr>
+        <p:spPr>
+          <a:xfrm>
+            <a:off x="2550261" y="5608143"/>
+            <a:ext cx="2181899" cy="507618"/>
+          </a:xfrm>
+          <a:prstGeom prst="rect">
+            <a:avLst/>
+          </a:prstGeom>
+          <a:noFill/>
+        </p:spPr>
+        <p:txBody>
+          <a:bodyPr wrap="square" anchor="t"/>
+          <a:lstStyle/>
+          <a:p>
+            <a:pPr algn="ctr">
+              <a:lnSpc>
+                <a:spcPct val="110000"/>
+              </a:lnSpc>
+              <a:spcAft>
+                <a:spcPts val="100"/>
+              </a:spcAft>
+            </a:pPr>
+            <a:r>
+              <a:rPr sz="1350" b="1">
+                <a:solidFill>
+                  <a:srgbClr val="13294B"/>
+                </a:solidFill>
+                <a:latin typeface="맑은 고딕"/>
+                <a:ea typeface="맑은 고딕"/>
+                <a:cs typeface="맑은 고딕"/>
+              </a:rPr>
               <a:t>HYD-01</a:t>
             </a:r>
           </a:p>
@@ -42521,6 +43123,9 @@
               <a:lnSpc>
                 <a:spcPct val="110000"/>
               </a:lnSpc>
+              <a:spcAft>
+                <a:spcPts val="100"/>
+              </a:spcAft>
             </a:pPr>
             <a:r>
               <a:rPr sz="1100" b="0">
@@ -42531,14 +43136,59 @@
                 <a:ea typeface="맑은 고딕"/>
                 <a:cs typeface="맑은 고딕"/>
               </a:rPr>
-              <a:t>설비</a:t>
-            </a:r>
-          </a:p>
+              <a:t>asset:hyd-01</a:t>
+            </a:r>
+          </a:p>
+        </p:txBody>
+      </p:sp>
+      <p:sp>
+        <p:nvSpPr>
+          <p:cNvPr id="18" name="TextBox 17"/>
+          <p:cNvSpPr txBox="1"/>
+          <p:nvPr/>
+        </p:nvSpPr>
+        <p:spPr>
+          <a:xfrm>
+            <a:off x="4917622" y="5608143"/>
+            <a:ext cx="2181899" cy="507618"/>
+          </a:xfrm>
+          <a:prstGeom prst="rect">
+            <a:avLst/>
+          </a:prstGeom>
+          <a:noFill/>
+        </p:spPr>
+        <p:txBody>
+          <a:bodyPr wrap="square" anchor="t"/>
+          <a:lstStyle/>
           <a:p>
             <a:pPr algn="ctr">
               <a:lnSpc>
                 <a:spcPct val="110000"/>
               </a:lnSpc>
+              <a:spcAft>
+                <a:spcPts val="100"/>
+              </a:spcAft>
+            </a:pPr>
+            <a:r>
+              <a:rPr sz="1350" b="1">
+                <a:solidFill>
+                  <a:srgbClr val="13294B"/>
+                </a:solidFill>
+                <a:latin typeface="맑은 고딕"/>
+                <a:ea typeface="맑은 고딕"/>
+                <a:cs typeface="맑은 고딕"/>
+              </a:rPr>
+              <a:t>오일 쿨러</a:t>
+            </a:r>
+          </a:p>
+          <a:p>
+            <a:pPr algn="ctr">
+              <a:lnSpc>
+                <a:spcPct val="110000"/>
+              </a:lnSpc>
+              <a:spcAft>
+                <a:spcPts val="100"/>
+              </a:spcAft>
             </a:pPr>
             <a:r>
               <a:rPr sz="1100" b="0">
@@ -42549,93 +43199,41 @@
                 <a:ea typeface="맑은 고딕"/>
                 <a:cs typeface="맑은 고딕"/>
               </a:rPr>
-              <a:t>asset:hyd-01</a:t>
-            </a:r>
-          </a:p>
-        </p:txBody>
-      </p:sp>
-      <p:sp>
-        <p:nvSpPr>
-          <p:cNvPr id="9" name="Oval 8"/>
-          <p:cNvSpPr/>
-          <p:nvPr/>
-        </p:nvSpPr>
-        <p:spPr>
-          <a:xfrm>
-            <a:off x="5227167" y="3122676"/>
-            <a:ext cx="1737360" cy="1737360"/>
-          </a:xfrm>
-          <a:prstGeom prst="ellipse">
-            <a:avLst/>
-          </a:prstGeom>
-          <a:solidFill>
-            <a:srgbClr val="5CB8F2"/>
-          </a:solidFill>
-          <a:ln w="25400">
-            <a:solidFill>
-              <a:srgbClr val="13294B"/>
-            </a:solidFill>
-          </a:ln>
-        </p:spPr>
-        <p:txBody>
-          <a:bodyPr rtlCol="0" anchor="ctr"/>
-          <a:lstStyle/>
-          <a:p>
-            <a:pPr algn="ctr"/>
-          </a:p>
-        </p:txBody>
-      </p:sp>
-      <p:pic>
-        <p:nvPicPr>
-          <p:cNvPr id="10" name="아이콘:components" descr="components_13294B_1.6.png"/>
-          <p:cNvPicPr>
-            <a:picLocks noChangeAspect="1"/>
-          </p:cNvPicPr>
-          <p:nvPr/>
-        </p:nvPicPr>
-        <p:blipFill>
-          <a:blip r:embed="rId4"/>
-          <a:stretch>
-            <a:fillRect/>
-          </a:stretch>
-        </p:blipFill>
-        <p:spPr>
-          <a:xfrm>
-            <a:off x="5887364" y="3365906"/>
-            <a:ext cx="416966" cy="416966"/>
-          </a:xfrm>
-          <a:prstGeom prst="rect">
-            <a:avLst/>
-          </a:prstGeom>
-        </p:spPr>
-      </p:pic>
-      <p:sp>
-        <p:nvSpPr>
-          <p:cNvPr id="11" name="TextBox 10"/>
-          <p:cNvSpPr txBox="1"/>
-          <p:nvPr/>
-        </p:nvSpPr>
-        <p:spPr>
-          <a:xfrm>
-            <a:off x="5348782" y="3817620"/>
-            <a:ext cx="1494129" cy="868680"/>
-          </a:xfrm>
-          <a:prstGeom prst="rect">
-            <a:avLst/>
-          </a:prstGeom>
-          <a:noFill/>
-        </p:spPr>
-        <p:txBody>
-          <a:bodyPr wrap="square" anchor="ctr"/>
+              <a:t>comp:cooler</a:t>
+            </a:r>
+          </a:p>
+        </p:txBody>
+      </p:sp>
+      <p:sp>
+        <p:nvSpPr>
+          <p:cNvPr id="19" name="TextBox 18"/>
+          <p:cNvSpPr txBox="1"/>
+          <p:nvPr/>
+        </p:nvSpPr>
+        <p:spPr>
+          <a:xfrm>
+            <a:off x="7274073" y="5608143"/>
+            <a:ext cx="2181899" cy="507618"/>
+          </a:xfrm>
+          <a:prstGeom prst="rect">
+            <a:avLst/>
+          </a:prstGeom>
+          <a:noFill/>
+        </p:spPr>
+        <p:txBody>
+          <a:bodyPr wrap="square" anchor="t"/>
           <a:lstStyle/>
           <a:p>
             <a:pPr algn="ctr">
               <a:lnSpc>
                 <a:spcPct val="110000"/>
               </a:lnSpc>
-            </a:pPr>
-            <a:r>
-              <a:rPr sz="1400" b="1">
+              <a:spcAft>
+                <a:spcPts val="100"/>
+              </a:spcAft>
+            </a:pPr>
+            <a:r>
+              <a:rPr sz="1350" b="1">
                 <a:solidFill>
                   <a:srgbClr val="13294B"/>
                 </a:solidFill>
@@ -42643,7 +43241,7 @@
                 <a:ea typeface="맑은 고딕"/>
                 <a:cs typeface="맑은 고딕"/>
               </a:rPr>
-              <a:t>오일 쿨러</a:t>
+              <a:t>유온 센서</a:t>
             </a:r>
           </a:p>
           <a:p>
@@ -42651,6 +43249,9 @@
               <a:lnSpc>
                 <a:spcPct val="110000"/>
               </a:lnSpc>
+              <a:spcAft>
+                <a:spcPts val="100"/>
+              </a:spcAft>
             </a:pPr>
             <a:r>
               <a:rPr sz="1100" b="0">
@@ -42661,14 +43262,59 @@
                 <a:ea typeface="맑은 고딕"/>
                 <a:cs typeface="맑은 고딕"/>
               </a:rPr>
-              <a:t>구성 요소</a:t>
-            </a:r>
-          </a:p>
+              <a:t>sen:ts1</a:t>
+            </a:r>
+          </a:p>
+        </p:txBody>
+      </p:sp>
+      <p:sp>
+        <p:nvSpPr>
+          <p:cNvPr id="20" name="TextBox 19"/>
+          <p:cNvSpPr txBox="1"/>
+          <p:nvPr/>
+        </p:nvSpPr>
+        <p:spPr>
+          <a:xfrm>
+            <a:off x="9641433" y="5608143"/>
+            <a:ext cx="2181899" cy="507618"/>
+          </a:xfrm>
+          <a:prstGeom prst="rect">
+            <a:avLst/>
+          </a:prstGeom>
+          <a:noFill/>
+        </p:spPr>
+        <p:txBody>
+          <a:bodyPr wrap="square" anchor="t"/>
+          <a:lstStyle/>
           <a:p>
             <a:pPr algn="ctr">
               <a:lnSpc>
                 <a:spcPct val="110000"/>
               </a:lnSpc>
+              <a:spcAft>
+                <a:spcPts val="100"/>
+              </a:spcAft>
+            </a:pPr>
+            <a:r>
+              <a:rPr sz="1350" b="1">
+                <a:solidFill>
+                  <a:srgbClr val="13294B"/>
+                </a:solidFill>
+                <a:latin typeface="맑은 고딕"/>
+                <a:ea typeface="맑은 고딕"/>
+                <a:cs typeface="맑은 고딕"/>
+              </a:rPr>
+              <a:t>유온</a:t>
+            </a:r>
+          </a:p>
+          <a:p>
+            <a:pPr algn="ctr">
+              <a:lnSpc>
+                <a:spcPct val="110000"/>
+              </a:lnSpc>
+              <a:spcAft>
+                <a:spcPts val="100"/>
+              </a:spcAft>
             </a:pPr>
             <a:r>
               <a:rPr sz="1100" b="0">
@@ -42679,325 +43325,7 @@
                 <a:ea typeface="맑은 고딕"/>
                 <a:cs typeface="맑은 고딕"/>
               </a:rPr>
-              <a:t>comp:cooler</a:t>
-            </a:r>
-          </a:p>
-        </p:txBody>
-      </p:sp>
-      <p:sp>
-        <p:nvSpPr>
-          <p:cNvPr id="12" name="Oval 11"/>
-          <p:cNvSpPr/>
-          <p:nvPr/>
-        </p:nvSpPr>
-        <p:spPr>
-          <a:xfrm>
-            <a:off x="9905695" y="3122676"/>
-            <a:ext cx="1737360" cy="1737360"/>
-          </a:xfrm>
-          <a:prstGeom prst="ellipse">
-            <a:avLst/>
-          </a:prstGeom>
-          <a:solidFill>
-            <a:srgbClr val="E7F3FD"/>
-          </a:solidFill>
-          <a:ln w="25400">
-            <a:solidFill>
-              <a:srgbClr val="5CB8F2"/>
-            </a:solidFill>
-          </a:ln>
-        </p:spPr>
-        <p:txBody>
-          <a:bodyPr rtlCol="0" anchor="ctr"/>
-          <a:lstStyle/>
-          <a:p>
-            <a:pPr algn="ctr"/>
-          </a:p>
-        </p:txBody>
-      </p:sp>
-      <p:pic>
-        <p:nvPicPr>
-          <p:cNvPr id="13" name="아이콘:gauge" descr="gauge_13294B_1.6.png"/>
-          <p:cNvPicPr>
-            <a:picLocks noChangeAspect="1"/>
-          </p:cNvPicPr>
-          <p:nvPr/>
-        </p:nvPicPr>
-        <p:blipFill>
-          <a:blip r:embed="rId5"/>
-          <a:stretch>
-            <a:fillRect/>
-          </a:stretch>
-        </p:blipFill>
-        <p:spPr>
-          <a:xfrm>
-            <a:off x="10565892" y="3365906"/>
-            <a:ext cx="416966" cy="416966"/>
-          </a:xfrm>
-          <a:prstGeom prst="rect">
-            <a:avLst/>
-          </a:prstGeom>
-        </p:spPr>
-      </p:pic>
-      <p:sp>
-        <p:nvSpPr>
-          <p:cNvPr id="14" name="TextBox 13"/>
-          <p:cNvSpPr txBox="1"/>
-          <p:nvPr/>
-        </p:nvSpPr>
-        <p:spPr>
-          <a:xfrm>
-            <a:off x="10027310" y="3817620"/>
-            <a:ext cx="1494129" cy="868680"/>
-          </a:xfrm>
-          <a:prstGeom prst="rect">
-            <a:avLst/>
-          </a:prstGeom>
-          <a:noFill/>
-        </p:spPr>
-        <p:txBody>
-          <a:bodyPr wrap="square" anchor="ctr"/>
-          <a:lstStyle/>
-          <a:p>
-            <a:pPr algn="ctr">
-              <a:lnSpc>
-                <a:spcPct val="110000"/>
-              </a:lnSpc>
-            </a:pPr>
-            <a:r>
-              <a:rPr sz="1400" b="1">
-                <a:solidFill>
-                  <a:srgbClr val="13294B"/>
-                </a:solidFill>
-                <a:latin typeface="맑은 고딕"/>
-                <a:ea typeface="맑은 고딕"/>
-                <a:cs typeface="맑은 고딕"/>
-              </a:rPr>
-              <a:t>유온 센서</a:t>
-            </a:r>
-          </a:p>
-          <a:p>
-            <a:pPr algn="ctr">
-              <a:lnSpc>
-                <a:spcPct val="110000"/>
-              </a:lnSpc>
-            </a:pPr>
-            <a:r>
-              <a:rPr sz="1100" b="0">
-                <a:solidFill>
-                  <a:srgbClr val="556175"/>
-                </a:solidFill>
-                <a:latin typeface="맑은 고딕"/>
-                <a:ea typeface="맑은 고딕"/>
-                <a:cs typeface="맑은 고딕"/>
-              </a:rPr>
-              <a:t>센서</a:t>
-            </a:r>
-          </a:p>
-          <a:p>
-            <a:pPr algn="ctr">
-              <a:lnSpc>
-                <a:spcPct val="110000"/>
-              </a:lnSpc>
-            </a:pPr>
-            <a:r>
-              <a:rPr sz="1100" b="0">
-                <a:solidFill>
-                  <a:srgbClr val="556175"/>
-                </a:solidFill>
-                <a:latin typeface="맑은 고딕"/>
-                <a:ea typeface="맑은 고딕"/>
-                <a:cs typeface="맑은 고딕"/>
-              </a:rPr>
-              <a:t>sen:ts1</a:t>
-            </a:r>
-          </a:p>
-        </p:txBody>
-      </p:sp>
-      <p:cxnSp>
-        <p:nvCxnSpPr>
-          <p:cNvPr id="15" name="Connector 14"/>
-          <p:cNvCxnSpPr/>
-          <p:nvPr/>
-        </p:nvCxnSpPr>
-        <p:spPr>
-          <a:xfrm>
-            <a:off x="2331720" y="3991356"/>
-            <a:ext cx="2822295" cy="0"/>
-          </a:xfrm>
-          <a:prstGeom prst="line">
-            <a:avLst/>
-          </a:prstGeom>
-          <a:ln w="28575">
-            <a:solidFill>
-              <a:srgbClr val="13294B"/>
-            </a:solidFill>
-            <a:tailEnd type="triangle" w="med" len="med"/>
-          </a:ln>
-        </p:spPr>
-      </p:cxnSp>
-      <p:sp>
-        <p:nvSpPr>
-          <p:cNvPr id="16" name="Rounded Rectangle 15"/>
-          <p:cNvSpPr/>
-          <p:nvPr/>
-        </p:nvSpPr>
-        <p:spPr>
-          <a:xfrm>
-            <a:off x="2919798" y="3625596"/>
-            <a:ext cx="1646138" cy="292608"/>
-          </a:xfrm>
-          <a:prstGeom prst="roundRect">
-            <a:avLst>
-              <a:gd name="adj" fmla="val 50000"/>
-            </a:avLst>
-          </a:prstGeom>
-          <a:solidFill>
-            <a:srgbClr val="FFFFFF"/>
-          </a:solidFill>
-          <a:ln w="12700">
-            <a:solidFill>
-              <a:srgbClr val="13294B"/>
-            </a:solidFill>
-          </a:ln>
-        </p:spPr>
-        <p:txBody>
-          <a:bodyPr rtlCol="0" anchor="ctr"/>
-          <a:lstStyle/>
-          <a:p>
-            <a:pPr algn="ctr"/>
-          </a:p>
-        </p:txBody>
-      </p:sp>
-      <p:sp>
-        <p:nvSpPr>
-          <p:cNvPr id="17" name="TextBox 16"/>
-          <p:cNvSpPr txBox="1"/>
-          <p:nvPr/>
-        </p:nvSpPr>
-        <p:spPr>
-          <a:xfrm>
-            <a:off x="2919798" y="3625596"/>
-            <a:ext cx="1646138" cy="292608"/>
-          </a:xfrm>
-          <a:prstGeom prst="rect">
-            <a:avLst/>
-          </a:prstGeom>
-          <a:noFill/>
-        </p:spPr>
-        <p:txBody>
-          <a:bodyPr wrap="square" anchor="ctr"/>
-          <a:lstStyle/>
-          <a:p>
-            <a:pPr algn="ctr">
-              <a:lnSpc>
-                <a:spcPct val="110000"/>
-              </a:lnSpc>
-            </a:pPr>
-            <a:r>
-              <a:rPr sz="1150" b="1">
-                <a:solidFill>
-                  <a:srgbClr val="13294B"/>
-                </a:solidFill>
-                <a:latin typeface="맑은 고딕"/>
-                <a:ea typeface="맑은 고딕"/>
-                <a:cs typeface="맑은 고딕"/>
-              </a:rPr>
-              <a:t>HAS_COMPONENT</a:t>
-            </a:r>
-          </a:p>
-        </p:txBody>
-      </p:sp>
-      <p:cxnSp>
-        <p:nvCxnSpPr>
-          <p:cNvPr id="18" name="Connector 17"/>
-          <p:cNvCxnSpPr/>
-          <p:nvPr/>
-        </p:nvCxnSpPr>
-        <p:spPr>
-          <a:xfrm>
-            <a:off x="7010247" y="3991356"/>
-            <a:ext cx="2822296" cy="0"/>
-          </a:xfrm>
-          <a:prstGeom prst="line">
-            <a:avLst/>
-          </a:prstGeom>
-          <a:ln w="28575">
-            <a:solidFill>
-              <a:srgbClr val="13294B"/>
-            </a:solidFill>
-            <a:tailEnd type="triangle" w="med" len="med"/>
-          </a:ln>
-        </p:spPr>
-      </p:cxnSp>
-      <p:sp>
-        <p:nvSpPr>
-          <p:cNvPr id="19" name="Rounded Rectangle 18"/>
-          <p:cNvSpPr/>
-          <p:nvPr/>
-        </p:nvSpPr>
-        <p:spPr>
-          <a:xfrm>
-            <a:off x="7651751" y="3625596"/>
-            <a:ext cx="1539288" cy="292608"/>
-          </a:xfrm>
-          <a:prstGeom prst="roundRect">
-            <a:avLst>
-              <a:gd name="adj" fmla="val 50000"/>
-            </a:avLst>
-          </a:prstGeom>
-          <a:solidFill>
-            <a:srgbClr val="FFFFFF"/>
-          </a:solidFill>
-          <a:ln w="12700">
-            <a:solidFill>
-              <a:srgbClr val="13294B"/>
-            </a:solidFill>
-          </a:ln>
-        </p:spPr>
-        <p:txBody>
-          <a:bodyPr rtlCol="0" anchor="ctr"/>
-          <a:lstStyle/>
-          <a:p>
-            <a:pPr algn="ctr"/>
-          </a:p>
-        </p:txBody>
-      </p:sp>
-      <p:sp>
-        <p:nvSpPr>
-          <p:cNvPr id="20" name="TextBox 19"/>
-          <p:cNvSpPr txBox="1"/>
-          <p:nvPr/>
-        </p:nvSpPr>
-        <p:spPr>
-          <a:xfrm>
-            <a:off x="7651751" y="3625596"/>
-            <a:ext cx="1539288" cy="292608"/>
-          </a:xfrm>
-          <a:prstGeom prst="rect">
-            <a:avLst/>
-          </a:prstGeom>
-          <a:noFill/>
-        </p:spPr>
-        <p:txBody>
-          <a:bodyPr wrap="square" anchor="ctr"/>
-          <a:lstStyle/>
-          <a:p>
-            <a:pPr algn="ctr">
-              <a:lnSpc>
-                <a:spcPct val="110000"/>
-              </a:lnSpc>
-            </a:pPr>
-            <a:r>
-              <a:rPr sz="1150" b="1">
-                <a:solidFill>
-                  <a:srgbClr val="13294B"/>
-                </a:solidFill>
-                <a:latin typeface="맑은 고딕"/>
-                <a:ea typeface="맑은 고딕"/>
-                <a:cs typeface="맑은 고딕"/>
-              </a:rPr>
-              <a:t>MONITORED_BY</a:t>
+              <a:t>sv:ts1 · 한계 65 ℃</a:t>
             </a:r>
           </a:p>
         </p:txBody>
@@ -43101,7 +43429,7 @@
                 <a:ea typeface="맑은 고딕"/>
                 <a:cs typeface="맑은 고딕"/>
               </a:rPr>
-              <a:t>수행 단계는 조치 방법의 작업 단계로, 전제 조건은 판단 규칙으로 옮겨지고 금지 사항은 조치의 하한으로 남는다.</a:t>
+              <a:t>수행 단계는 조치 방법의 작업 단계로, 전제 조건은 판단 규칙으로, 금지 사항은 펌프 부하의 하한 60 %로 옮겨진다.</a:t>
             </a:r>
           </a:p>
         </p:txBody>
@@ -43610,7 +43938,7 @@
                 <a:ea typeface="맑은 고딕"/>
                 <a:cs typeface="맑은 고딕"/>
               </a:rPr>
-              <a:t>「펌프 부하를 60 % 미만으로 설정하지 않는다.」</a:t>
+              <a:t>「펌프 부하는 60 % 아래로 내리지 않는다.」</a:t>
             </a:r>
           </a:p>
           <a:p>
@@ -44046,71 +44374,9 @@
           </a:p>
         </p:txBody>
       </p:sp>
-      <p:sp>
-        <p:nvSpPr>
-          <p:cNvPr id="6" name="Rounded Rectangle 5"/>
-          <p:cNvSpPr/>
-          <p:nvPr/>
-        </p:nvSpPr>
-        <p:spPr>
-          <a:xfrm>
-            <a:off x="548640" y="2728468"/>
-            <a:ext cx="3515258" cy="2525776"/>
-          </a:xfrm>
-          <a:prstGeom prst="roundRect">
-            <a:avLst>
-              <a:gd name="adj" fmla="val 4000"/>
-            </a:avLst>
-          </a:prstGeom>
-          <a:solidFill>
-            <a:srgbClr val="FFFFFF"/>
-          </a:solidFill>
-          <a:ln w="15875">
-            <a:solidFill>
-              <a:srgbClr val="D3D9E1"/>
-            </a:solidFill>
-          </a:ln>
-        </p:spPr>
-        <p:txBody>
-          <a:bodyPr rtlCol="0" anchor="ctr"/>
-          <a:lstStyle/>
-          <a:p>
-            <a:pPr algn="ctr"/>
-          </a:p>
-        </p:txBody>
-      </p:sp>
-      <p:sp>
-        <p:nvSpPr>
-          <p:cNvPr id="7" name="Oval 6"/>
-          <p:cNvSpPr/>
-          <p:nvPr/>
-        </p:nvSpPr>
-        <p:spPr>
-          <a:xfrm>
-            <a:off x="777240" y="2929636"/>
-            <a:ext cx="731520" cy="731520"/>
-          </a:xfrm>
-          <a:prstGeom prst="ellipse">
-            <a:avLst/>
-          </a:prstGeom>
-          <a:solidFill>
-            <a:srgbClr val="E7F3FD"/>
-          </a:solidFill>
-          <a:ln>
-            <a:noFill/>
-          </a:ln>
-        </p:spPr>
-        <p:txBody>
-          <a:bodyPr rtlCol="0" anchor="ctr"/>
-          <a:lstStyle/>
-          <a:p>
-            <a:pPr algn="ctr"/>
-          </a:p>
-        </p:txBody>
-      </p:sp>
       <p:pic>
         <p:nvPicPr>
-          <p:cNvPr id="8" name="아이콘:shield-check" descr="shield-check_13294B_1.6.png"/>
+          <p:cNvPr id="6" name="삽화:성과경로_5.svg" descr="illust_8091845198819376105_1791769661.png"/>
           <p:cNvPicPr>
             <a:picLocks noChangeAspect="1"/>
           </p:cNvPicPr>
@@ -44124,8 +44390,8 @@
         </p:blipFill>
         <p:spPr>
           <a:xfrm>
-            <a:off x="930859" y="3083255"/>
-            <a:ext cx="424281" cy="424281"/>
+            <a:off x="641100" y="1627632"/>
+            <a:ext cx="10909495" cy="4727448"/>
           </a:xfrm>
           <a:prstGeom prst="rect">
             <a:avLst/>
@@ -44134,14 +44400,140 @@
       </p:pic>
       <p:sp>
         <p:nvSpPr>
+          <p:cNvPr id="7" name="TextBox 6"/>
+          <p:cNvSpPr txBox="1"/>
+          <p:nvPr/>
+        </p:nvSpPr>
+        <p:spPr>
+          <a:xfrm>
+            <a:off x="673828" y="4345914"/>
+            <a:ext cx="1963709" cy="825246"/>
+          </a:xfrm>
+          <a:prstGeom prst="rect">
+            <a:avLst/>
+          </a:prstGeom>
+          <a:noFill/>
+        </p:spPr>
+        <p:txBody>
+          <a:bodyPr wrap="square" anchor="t"/>
+          <a:lstStyle/>
+          <a:p>
+            <a:pPr algn="ctr">
+              <a:lnSpc>
+                <a:spcPct val="110000"/>
+              </a:lnSpc>
+              <a:spcAft>
+                <a:spcPts val="100"/>
+              </a:spcAft>
+            </a:pPr>
+            <a:r>
+              <a:rPr sz="1600" b="1">
+                <a:solidFill>
+                  <a:srgbClr val="13294B"/>
+                </a:solidFill>
+                <a:latin typeface="맑은 고딕"/>
+                <a:ea typeface="맑은 고딕"/>
+                <a:cs typeface="맑은 고딕"/>
+              </a:rPr>
+              <a:t>팬 최대 운전과 부하 80 %</a:t>
+            </a:r>
+          </a:p>
+          <a:p>
+            <a:pPr algn="ctr">
+              <a:lnSpc>
+                <a:spcPct val="110000"/>
+              </a:lnSpc>
+              <a:spcAft>
+                <a:spcPts val="100"/>
+              </a:spcAft>
+            </a:pPr>
+            <a:r>
+              <a:rPr sz="1300" b="0">
+                <a:solidFill>
+                  <a:srgbClr val="556175"/>
+                </a:solidFill>
+                <a:latin typeface="맑은 고딕"/>
+                <a:ea typeface="맑은 고딕"/>
+                <a:cs typeface="맑은 고딕"/>
+              </a:rPr>
+              <a:t>조치 후보</a:t>
+            </a:r>
+          </a:p>
+        </p:txBody>
+      </p:sp>
+      <p:sp>
+        <p:nvSpPr>
+          <p:cNvPr id="8" name="TextBox 7"/>
+          <p:cNvSpPr txBox="1"/>
+          <p:nvPr/>
+        </p:nvSpPr>
+        <p:spPr>
+          <a:xfrm>
+            <a:off x="3204831" y="2818948"/>
+            <a:ext cx="1636424" cy="577342"/>
+          </a:xfrm>
+          <a:prstGeom prst="rect">
+            <a:avLst/>
+          </a:prstGeom>
+          <a:noFill/>
+        </p:spPr>
+        <p:txBody>
+          <a:bodyPr wrap="square" anchor="t"/>
+          <a:lstStyle/>
+          <a:p>
+            <a:pPr algn="ctr">
+              <a:lnSpc>
+                <a:spcPct val="110000"/>
+              </a:lnSpc>
+              <a:spcAft>
+                <a:spcPts val="100"/>
+              </a:spcAft>
+            </a:pPr>
+            <a:r>
+              <a:rPr sz="1600" b="1">
+                <a:solidFill>
+                  <a:srgbClr val="13294B"/>
+                </a:solidFill>
+                <a:latin typeface="맑은 고딕"/>
+                <a:ea typeface="맑은 고딕"/>
+                <a:cs typeface="맑은 고딕"/>
+              </a:rPr>
+              <a:t>팬 속도</a:t>
+            </a:r>
+          </a:p>
+          <a:p>
+            <a:pPr algn="ctr">
+              <a:lnSpc>
+                <a:spcPct val="110000"/>
+              </a:lnSpc>
+              <a:spcAft>
+                <a:spcPts val="100"/>
+              </a:spcAft>
+            </a:pPr>
+            <a:r>
+              <a:rPr sz="1300" b="0">
+                <a:solidFill>
+                  <a:srgbClr val="556175"/>
+                </a:solidFill>
+                <a:latin typeface="맑은 고딕"/>
+                <a:ea typeface="맑은 고딕"/>
+                <a:cs typeface="맑은 고딕"/>
+              </a:rPr>
+              <a:t>올린다</a:t>
+            </a:r>
+          </a:p>
+        </p:txBody>
+      </p:sp>
+      <p:sp>
+        <p:nvSpPr>
           <p:cNvPr id="9" name="TextBox 8"/>
           <p:cNvSpPr txBox="1"/>
           <p:nvPr/>
         </p:nvSpPr>
         <p:spPr>
           <a:xfrm>
-            <a:off x="713232" y="3752596"/>
-            <a:ext cx="3186074" cy="998728"/>
+            <a:off x="3455749" y="5721601"/>
+            <a:ext cx="1636424" cy="577342"/>
           </a:xfrm>
           <a:prstGeom prst="rect">
             <a:avLst/>
@@ -44152,16 +44544,16 @@
           <a:bodyPr wrap="square" anchor="t"/>
           <a:lstStyle/>
           <a:p>
-            <a:pPr algn="l">
+            <a:pPr algn="ctr">
               <a:lnSpc>
                 <a:spcPct val="110000"/>
               </a:lnSpc>
               <a:spcAft>
-                <a:spcPts val="400"/>
+                <a:spcPts val="100"/>
               </a:spcAft>
             </a:pPr>
             <a:r>
-              <a:rPr sz="1800" b="1">
+              <a:rPr sz="1600" b="1">
                 <a:solidFill>
                   <a:srgbClr val="13294B"/>
                 </a:solidFill>
@@ -44169,90 +44561,314 @@
                 <a:ea typeface="맑은 고딕"/>
                 <a:cs typeface="맑은 고딕"/>
               </a:rPr>
+              <a:t>펌프 부하</a:t>
+            </a:r>
+          </a:p>
+          <a:p>
+            <a:pPr algn="ctr">
+              <a:lnSpc>
+                <a:spcPct val="110000"/>
+              </a:lnSpc>
+              <a:spcAft>
+                <a:spcPts val="100"/>
+              </a:spcAft>
+            </a:pPr>
+            <a:r>
+              <a:rPr sz="1300" b="0">
+                <a:solidFill>
+                  <a:srgbClr val="556175"/>
+                </a:solidFill>
+                <a:latin typeface="맑은 고딕"/>
+                <a:ea typeface="맑은 고딕"/>
+                <a:cs typeface="맑은 고딕"/>
+              </a:rPr>
+              <a:t>내린다</a:t>
+            </a:r>
+          </a:p>
+        </p:txBody>
+      </p:sp>
+      <p:sp>
+        <p:nvSpPr>
+          <p:cNvPr id="10" name="TextBox 9"/>
+          <p:cNvSpPr txBox="1"/>
+          <p:nvPr/>
+        </p:nvSpPr>
+        <p:spPr>
+          <a:xfrm>
+            <a:off x="6150395" y="4227728"/>
+            <a:ext cx="1527329" cy="577342"/>
+          </a:xfrm>
+          <a:prstGeom prst="rect">
+            <a:avLst/>
+          </a:prstGeom>
+          <a:noFill/>
+        </p:spPr>
+        <p:txBody>
+          <a:bodyPr wrap="square" anchor="t"/>
+          <a:lstStyle/>
+          <a:p>
+            <a:pPr algn="ctr">
+              <a:lnSpc>
+                <a:spcPct val="110000"/>
+              </a:lnSpc>
+              <a:spcAft>
+                <a:spcPts val="100"/>
+              </a:spcAft>
+            </a:pPr>
+            <a:r>
+              <a:rPr sz="1600" b="1">
+                <a:solidFill>
+                  <a:srgbClr val="13294B"/>
+                </a:solidFill>
+                <a:latin typeface="맑은 고딕"/>
+                <a:ea typeface="맑은 고딕"/>
+                <a:cs typeface="맑은 고딕"/>
+              </a:rPr>
+              <a:t>유온</a:t>
+            </a:r>
+          </a:p>
+          <a:p>
+            <a:pPr algn="ctr">
+              <a:lnSpc>
+                <a:spcPct val="110000"/>
+              </a:lnSpc>
+              <a:spcAft>
+                <a:spcPts val="100"/>
+              </a:spcAft>
+            </a:pPr>
+            <a:r>
+              <a:rPr sz="1300" b="0">
+                <a:solidFill>
+                  <a:srgbClr val="556175"/>
+                </a:solidFill>
+                <a:latin typeface="맑은 고딕"/>
+                <a:ea typeface="맑은 고딕"/>
+                <a:cs typeface="맑은 고딕"/>
+              </a:rPr>
+              <a:t>내려간다</a:t>
+            </a:r>
+          </a:p>
+        </p:txBody>
+      </p:sp>
+      <p:sp>
+        <p:nvSpPr>
+          <p:cNvPr id="11" name="TextBox 10"/>
+          <p:cNvSpPr txBox="1"/>
+          <p:nvPr/>
+        </p:nvSpPr>
+        <p:spPr>
+          <a:xfrm>
+            <a:off x="6150395" y="5721601"/>
+            <a:ext cx="1527329" cy="577342"/>
+          </a:xfrm>
+          <a:prstGeom prst="rect">
+            <a:avLst/>
+          </a:prstGeom>
+          <a:noFill/>
+        </p:spPr>
+        <p:txBody>
+          <a:bodyPr wrap="square" anchor="t"/>
+          <a:lstStyle/>
+          <a:p>
+            <a:pPr algn="ctr">
+              <a:lnSpc>
+                <a:spcPct val="110000"/>
+              </a:lnSpc>
+              <a:spcAft>
+                <a:spcPts val="100"/>
+              </a:spcAft>
+            </a:pPr>
+            <a:r>
+              <a:rPr sz="1600" b="1">
+                <a:solidFill>
+                  <a:srgbClr val="13294B"/>
+                </a:solidFill>
+                <a:latin typeface="맑은 고딕"/>
+                <a:ea typeface="맑은 고딕"/>
+                <a:cs typeface="맑은 고딕"/>
+              </a:rPr>
+              <a:t>생산량</a:t>
+            </a:r>
+          </a:p>
+          <a:p>
+            <a:pPr algn="ctr">
+              <a:lnSpc>
+                <a:spcPct val="110000"/>
+              </a:lnSpc>
+              <a:spcAft>
+                <a:spcPts val="100"/>
+              </a:spcAft>
+            </a:pPr>
+            <a:r>
+              <a:rPr sz="1300" b="0">
+                <a:solidFill>
+                  <a:srgbClr val="556175"/>
+                </a:solidFill>
+                <a:latin typeface="맑은 고딕"/>
+                <a:ea typeface="맑은 고딕"/>
+                <a:cs typeface="맑은 고딕"/>
+              </a:rPr>
+              <a:t>줄어든다</a:t>
+            </a:r>
+          </a:p>
+        </p:txBody>
+      </p:sp>
+      <p:sp>
+        <p:nvSpPr>
+          <p:cNvPr id="12" name="TextBox 11"/>
+          <p:cNvSpPr txBox="1"/>
+          <p:nvPr/>
+        </p:nvSpPr>
+        <p:spPr>
+          <a:xfrm>
+            <a:off x="8506845" y="2601486"/>
+            <a:ext cx="2181899" cy="577342"/>
+          </a:xfrm>
+          <a:prstGeom prst="rect">
+            <a:avLst/>
+          </a:prstGeom>
+          <a:noFill/>
+        </p:spPr>
+        <p:txBody>
+          <a:bodyPr wrap="square" anchor="t"/>
+          <a:lstStyle/>
+          <a:p>
+            <a:pPr algn="ctr">
+              <a:lnSpc>
+                <a:spcPct val="110000"/>
+              </a:lnSpc>
+              <a:spcAft>
+                <a:spcPts val="100"/>
+              </a:spcAft>
+            </a:pPr>
+            <a:r>
+              <a:rPr sz="1600" b="1">
+                <a:solidFill>
+                  <a:srgbClr val="13294B"/>
+                </a:solidFill>
+                <a:latin typeface="맑은 고딕"/>
+                <a:ea typeface="맑은 고딕"/>
+                <a:cs typeface="맑은 고딕"/>
+              </a:rPr>
+              <a:t>전력 사용량</a:t>
+            </a:r>
+          </a:p>
+          <a:p>
+            <a:pPr algn="ctr">
+              <a:lnSpc>
+                <a:spcPct val="110000"/>
+              </a:lnSpc>
+              <a:spcAft>
+                <a:spcPts val="100"/>
+              </a:spcAft>
+            </a:pPr>
+            <a:r>
+              <a:rPr sz="1300" b="0">
+                <a:solidFill>
+                  <a:srgbClr val="556175"/>
+                </a:solidFill>
+                <a:latin typeface="맑은 고딕"/>
+                <a:ea typeface="맑은 고딕"/>
+                <a:cs typeface="맑은 고딕"/>
+              </a:rPr>
+              <a:t>불리하다</a:t>
+            </a:r>
+          </a:p>
+        </p:txBody>
+      </p:sp>
+      <p:sp>
+        <p:nvSpPr>
+          <p:cNvPr id="13" name="TextBox 12"/>
+          <p:cNvSpPr txBox="1"/>
+          <p:nvPr/>
+        </p:nvSpPr>
+        <p:spPr>
+          <a:xfrm>
+            <a:off x="8506845" y="4227728"/>
+            <a:ext cx="2181899" cy="577342"/>
+          </a:xfrm>
+          <a:prstGeom prst="rect">
+            <a:avLst/>
+          </a:prstGeom>
+          <a:noFill/>
+        </p:spPr>
+        <p:txBody>
+          <a:bodyPr wrap="square" anchor="t"/>
+          <a:lstStyle/>
+          <a:p>
+            <a:pPr algn="ctr">
+              <a:lnSpc>
+                <a:spcPct val="110000"/>
+              </a:lnSpc>
+              <a:spcAft>
+                <a:spcPts val="100"/>
+              </a:spcAft>
+            </a:pPr>
+            <a:r>
+              <a:rPr sz="1600" b="1">
+                <a:solidFill>
+                  <a:srgbClr val="1A6FC4"/>
+                </a:solidFill>
+                <a:latin typeface="맑은 고딕"/>
+                <a:ea typeface="맑은 고딕"/>
+                <a:cs typeface="맑은 고딕"/>
+              </a:rPr>
               <a:t>인터록 여유</a:t>
             </a:r>
           </a:p>
           <a:p>
-            <a:pPr algn="l">
+            <a:pPr algn="ctr">
               <a:lnSpc>
                 <a:spcPct val="110000"/>
               </a:lnSpc>
               <a:spcAft>
-                <a:spcPts val="400"/>
+                <a:spcPts val="100"/>
               </a:spcAft>
             </a:pPr>
             <a:r>
-              <a:rPr sz="1400" b="0">
-                <a:solidFill>
-                  <a:srgbClr val="1F2A3A"/>
-                </a:solidFill>
-                <a:latin typeface="맑은 고딕"/>
-                <a:ea typeface="맑은 고딕"/>
-                <a:cs typeface="맑은 고딕"/>
-              </a:rPr>
-              <a:t>유온이 내려가면 늘어난다</a:t>
-            </a:r>
-          </a:p>
-        </p:txBody>
-      </p:sp>
-      <p:sp>
-        <p:nvSpPr>
-          <p:cNvPr id="10" name="Rounded Rectangle 9"/>
-          <p:cNvSpPr/>
-          <p:nvPr/>
-        </p:nvSpPr>
-        <p:spPr>
-          <a:xfrm>
-            <a:off x="777240" y="4824476"/>
-            <a:ext cx="822960" cy="292608"/>
-          </a:xfrm>
-          <a:prstGeom prst="roundRect">
-            <a:avLst>
-              <a:gd name="adj" fmla="val 50000"/>
-            </a:avLst>
-          </a:prstGeom>
-          <a:solidFill>
-            <a:srgbClr val="D3D9E1"/>
-          </a:solidFill>
-          <a:ln>
-            <a:noFill/>
-          </a:ln>
-        </p:spPr>
-        <p:txBody>
-          <a:bodyPr rtlCol="0" anchor="ctr"/>
-          <a:lstStyle/>
-          <a:p>
-            <a:pPr algn="ctr"/>
-          </a:p>
-        </p:txBody>
-      </p:sp>
-      <p:sp>
-        <p:nvSpPr>
-          <p:cNvPr id="11" name="TextBox 10"/>
-          <p:cNvSpPr txBox="1"/>
-          <p:nvPr/>
-        </p:nvSpPr>
-        <p:spPr>
-          <a:xfrm>
-            <a:off x="777240" y="4824476"/>
-            <a:ext cx="822960" cy="292608"/>
-          </a:xfrm>
-          <a:prstGeom prst="rect">
-            <a:avLst/>
-          </a:prstGeom>
-          <a:noFill/>
-        </p:spPr>
-        <p:txBody>
-          <a:bodyPr wrap="square" anchor="ctr"/>
+              <a:rPr sz="1300" b="0">
+                <a:solidFill>
+                  <a:srgbClr val="556175"/>
+                </a:solidFill>
+                <a:latin typeface="맑은 고딕"/>
+                <a:ea typeface="맑은 고딕"/>
+                <a:cs typeface="맑은 고딕"/>
+              </a:rPr>
+              <a:t>이롭다</a:t>
+            </a:r>
+          </a:p>
+        </p:txBody>
+      </p:sp>
+      <p:sp>
+        <p:nvSpPr>
+          <p:cNvPr id="14" name="TextBox 13"/>
+          <p:cNvSpPr txBox="1"/>
+          <p:nvPr/>
+        </p:nvSpPr>
+        <p:spPr>
+          <a:xfrm>
+            <a:off x="8506845" y="5721601"/>
+            <a:ext cx="2181899" cy="577342"/>
+          </a:xfrm>
+          <a:prstGeom prst="rect">
+            <a:avLst/>
+          </a:prstGeom>
+          <a:noFill/>
+        </p:spPr>
+        <p:txBody>
+          <a:bodyPr wrap="square" anchor="t"/>
           <a:lstStyle/>
           <a:p>
             <a:pPr algn="ctr">
               <a:lnSpc>
                 <a:spcPct val="110000"/>
               </a:lnSpc>
-            </a:pPr>
-            <a:r>
-              <a:rPr sz="1200" b="1">
+              <a:spcAft>
+                <a:spcPts val="100"/>
+              </a:spcAft>
+            </a:pPr>
+            <a:r>
+              <a:rPr sz="1600" b="1">
                 <a:solidFill>
                   <a:srgbClr val="13294B"/>
                 </a:solidFill>
@@ -44260,97 +44876,32 @@
                 <a:ea typeface="맑은 고딕"/>
                 <a:cs typeface="맑은 고딕"/>
               </a:rPr>
-              <a:t>설비</a:t>
-            </a:r>
-          </a:p>
-        </p:txBody>
-      </p:sp>
-      <p:sp>
-        <p:nvSpPr>
-          <p:cNvPr id="12" name="Rounded Rectangle 11"/>
-          <p:cNvSpPr/>
-          <p:nvPr/>
-        </p:nvSpPr>
-        <p:spPr>
-          <a:xfrm>
-            <a:off x="4338218" y="2728468"/>
-            <a:ext cx="3515258" cy="2525776"/>
-          </a:xfrm>
-          <a:prstGeom prst="roundRect">
-            <a:avLst>
-              <a:gd name="adj" fmla="val 4000"/>
-            </a:avLst>
-          </a:prstGeom>
-          <a:solidFill>
-            <a:srgbClr val="FFFFFF"/>
-          </a:solidFill>
-          <a:ln w="15875">
-            <a:solidFill>
-              <a:srgbClr val="D3D9E1"/>
-            </a:solidFill>
-          </a:ln>
-        </p:spPr>
-        <p:txBody>
-          <a:bodyPr rtlCol="0" anchor="ctr"/>
-          <a:lstStyle/>
-          <a:p>
-            <a:pPr algn="ctr"/>
-          </a:p>
-        </p:txBody>
-      </p:sp>
-      <p:sp>
-        <p:nvSpPr>
-          <p:cNvPr id="13" name="Oval 12"/>
-          <p:cNvSpPr/>
-          <p:nvPr/>
-        </p:nvSpPr>
-        <p:spPr>
-          <a:xfrm>
-            <a:off x="4566818" y="2929636"/>
-            <a:ext cx="731520" cy="731520"/>
-          </a:xfrm>
-          <a:prstGeom prst="ellipse">
-            <a:avLst/>
-          </a:prstGeom>
-          <a:solidFill>
-            <a:srgbClr val="E7F3FD"/>
-          </a:solidFill>
-          <a:ln>
-            <a:noFill/>
-          </a:ln>
-        </p:spPr>
-        <p:txBody>
-          <a:bodyPr rtlCol="0" anchor="ctr"/>
-          <a:lstStyle/>
-          <a:p>
-            <a:pPr algn="ctr"/>
-          </a:p>
-        </p:txBody>
-      </p:sp>
-      <p:pic>
-        <p:nvPicPr>
-          <p:cNvPr id="14" name="아이콘:bolt" descr="bolt_13294B_1.6.png"/>
-          <p:cNvPicPr>
-            <a:picLocks noChangeAspect="1"/>
-          </p:cNvPicPr>
-          <p:nvPr/>
-        </p:nvPicPr>
-        <p:blipFill>
-          <a:blip r:embed="rId4"/>
-          <a:stretch>
-            <a:fillRect/>
-          </a:stretch>
-        </p:blipFill>
-        <p:spPr>
-          <a:xfrm>
-            <a:off x="4720437" y="3083255"/>
-            <a:ext cx="424281" cy="424281"/>
-          </a:xfrm>
-          <a:prstGeom prst="rect">
-            <a:avLst/>
-          </a:prstGeom>
-        </p:spPr>
-      </p:pic>
+              <a:t>납기 준수율</a:t>
+            </a:r>
+          </a:p>
+          <a:p>
+            <a:pPr algn="ctr">
+              <a:lnSpc>
+                <a:spcPct val="110000"/>
+              </a:lnSpc>
+              <a:spcAft>
+                <a:spcPts val="100"/>
+              </a:spcAft>
+            </a:pPr>
+            <a:r>
+              <a:rPr sz="1300" b="0">
+                <a:solidFill>
+                  <a:srgbClr val="556175"/>
+                </a:solidFill>
+                <a:latin typeface="맑은 고딕"/>
+                <a:ea typeface="맑은 고딕"/>
+                <a:cs typeface="맑은 고딕"/>
+              </a:rPr>
+              <a:t>불리하다</a:t>
+            </a:r>
+          </a:p>
+        </p:txBody>
+      </p:sp>
       <p:sp>
         <p:nvSpPr>
           <p:cNvPr id="15" name="TextBox 14"/>
@@ -44359,8 +44910,8 @@
         </p:nvSpPr>
         <p:spPr>
           <a:xfrm>
-            <a:off x="4502810" y="3752596"/>
-            <a:ext cx="3186074" cy="998728"/>
+            <a:off x="10241455" y="1958553"/>
+            <a:ext cx="1309139" cy="778764"/>
           </a:xfrm>
           <a:prstGeom prst="rect">
             <a:avLst/>
@@ -44371,16 +44922,16 @@
           <a:bodyPr wrap="square" anchor="t"/>
           <a:lstStyle/>
           <a:p>
-            <a:pPr algn="l">
+            <a:pPr algn="ctr">
               <a:lnSpc>
                 <a:spcPct val="110000"/>
               </a:lnSpc>
               <a:spcAft>
-                <a:spcPts val="400"/>
+                <a:spcPts val="100"/>
               </a:spcAft>
             </a:pPr>
             <a:r>
-              <a:rPr sz="1800" b="1">
+              <a:rPr sz="1600" b="1">
                 <a:solidFill>
                   <a:srgbClr val="13294B"/>
                 </a:solidFill>
@@ -44388,60 +44939,92 @@
                 <a:ea typeface="맑은 고딕"/>
                 <a:cs typeface="맑은 고딕"/>
               </a:rPr>
-              <a:t>전력 사용량</a:t>
-            </a:r>
-          </a:p>
-          <a:p>
-            <a:pPr algn="l">
+              <a:t>에너지 효율</a:t>
+            </a:r>
+          </a:p>
+          <a:p>
+            <a:pPr algn="ctr">
               <a:lnSpc>
                 <a:spcPct val="110000"/>
               </a:lnSpc>
               <a:spcAft>
-                <a:spcPts val="400"/>
+                <a:spcPts val="100"/>
               </a:spcAft>
             </a:pPr>
             <a:r>
-              <a:rPr sz="1400" b="0">
-                <a:solidFill>
-                  <a:srgbClr val="1F2A3A"/>
-                </a:solidFill>
-                <a:latin typeface="맑은 고딕"/>
-                <a:ea typeface="맑은 고딕"/>
-                <a:cs typeface="맑은 고딕"/>
-              </a:rPr>
-              <a:t>팬 속도를 올리면 늘어난다</a:t>
-            </a:r>
-          </a:p>
-        </p:txBody>
-      </p:sp>
-      <p:sp>
-        <p:nvSpPr>
-          <p:cNvPr id="16" name="Rounded Rectangle 15"/>
-          <p:cNvSpPr/>
-          <p:nvPr/>
-        </p:nvSpPr>
-        <p:spPr>
-          <a:xfrm>
-            <a:off x="4566818" y="4824476"/>
-            <a:ext cx="822960" cy="292608"/>
-          </a:xfrm>
-          <a:prstGeom prst="roundRect">
-            <a:avLst>
-              <a:gd name="adj" fmla="val 50000"/>
-            </a:avLst>
-          </a:prstGeom>
-          <a:solidFill>
-            <a:srgbClr val="D3D9E1"/>
-          </a:solidFill>
-          <a:ln>
-            <a:noFill/>
-          </a:ln>
-        </p:spPr>
-        <p:txBody>
-          <a:bodyPr rtlCol="0" anchor="ctr"/>
-          <a:lstStyle/>
-          <a:p>
-            <a:pPr algn="ctr"/>
+              <a:rPr sz="1300" b="0">
+                <a:solidFill>
+                  <a:srgbClr val="556175"/>
+                </a:solidFill>
+                <a:latin typeface="맑은 고딕"/>
+                <a:ea typeface="맑은 고딕"/>
+                <a:cs typeface="맑은 고딕"/>
+              </a:rPr>
+              <a:t>내부 프로세스 관점</a:t>
+            </a:r>
+          </a:p>
+        </p:txBody>
+      </p:sp>
+      <p:sp>
+        <p:nvSpPr>
+          <p:cNvPr id="16" name="TextBox 15"/>
+          <p:cNvSpPr txBox="1"/>
+          <p:nvPr/>
+        </p:nvSpPr>
+        <p:spPr>
+          <a:xfrm>
+            <a:off x="10241455" y="3684071"/>
+            <a:ext cx="1309139" cy="778764"/>
+          </a:xfrm>
+          <a:prstGeom prst="rect">
+            <a:avLst/>
+          </a:prstGeom>
+          <a:noFill/>
+        </p:spPr>
+        <p:txBody>
+          <a:bodyPr wrap="square" anchor="t"/>
+          <a:lstStyle/>
+          <a:p>
+            <a:pPr algn="ctr">
+              <a:lnSpc>
+                <a:spcPct val="110000"/>
+              </a:lnSpc>
+              <a:spcAft>
+                <a:spcPts val="100"/>
+              </a:spcAft>
+            </a:pPr>
+            <a:r>
+              <a:rPr sz="1600" b="1">
+                <a:solidFill>
+                  <a:srgbClr val="13294B"/>
+                </a:solidFill>
+                <a:latin typeface="맑은 고딕"/>
+                <a:ea typeface="맑은 고딕"/>
+                <a:cs typeface="맑은 고딕"/>
+              </a:rPr>
+              <a:t>무재해 운전</a:t>
+            </a:r>
+          </a:p>
+          <a:p>
+            <a:pPr algn="ctr">
+              <a:lnSpc>
+                <a:spcPct val="110000"/>
+              </a:lnSpc>
+              <a:spcAft>
+                <a:spcPts val="100"/>
+              </a:spcAft>
+            </a:pPr>
+            <a:r>
+              <a:rPr sz="1300" b="0">
+                <a:solidFill>
+                  <a:srgbClr val="556175"/>
+                </a:solidFill>
+                <a:latin typeface="맑은 고딕"/>
+                <a:ea typeface="맑은 고딕"/>
+                <a:cs typeface="맑은 고딕"/>
+              </a:rPr>
+              <a:t>내부 프로세스 관점</a:t>
+            </a:r>
           </a:p>
         </p:txBody>
       </p:sp>
@@ -44453,25 +45036,28 @@
         </p:nvSpPr>
         <p:spPr>
           <a:xfrm>
-            <a:off x="4566818" y="4824476"/>
-            <a:ext cx="822960" cy="292608"/>
-          </a:xfrm>
-          <a:prstGeom prst="rect">
-            <a:avLst/>
-          </a:prstGeom>
-          <a:noFill/>
-        </p:spPr>
-        <p:txBody>
-          <a:bodyPr wrap="square" anchor="ctr"/>
+            <a:off x="10241455" y="5244129"/>
+            <a:ext cx="1309139" cy="577342"/>
+          </a:xfrm>
+          <a:prstGeom prst="rect">
+            <a:avLst/>
+          </a:prstGeom>
+          <a:noFill/>
+        </p:spPr>
+        <p:txBody>
+          <a:bodyPr wrap="square" anchor="t"/>
           <a:lstStyle/>
           <a:p>
             <a:pPr algn="ctr">
               <a:lnSpc>
                 <a:spcPct val="110000"/>
               </a:lnSpc>
-            </a:pPr>
-            <a:r>
-              <a:rPr sz="1200" b="1">
+              <a:spcAft>
+                <a:spcPts val="100"/>
+              </a:spcAft>
+            </a:pPr>
+            <a:r>
+              <a:rPr sz="1600" b="1">
                 <a:solidFill>
                   <a:srgbClr val="13294B"/>
                 </a:solidFill>
@@ -44479,226 +45065,28 @@
                 <a:ea typeface="맑은 고딕"/>
                 <a:cs typeface="맑은 고딕"/>
               </a:rPr>
-              <a:t>비용</a:t>
-            </a:r>
-          </a:p>
-        </p:txBody>
-      </p:sp>
-      <p:sp>
-        <p:nvSpPr>
-          <p:cNvPr id="18" name="Rounded Rectangle 17"/>
-          <p:cNvSpPr/>
-          <p:nvPr/>
-        </p:nvSpPr>
-        <p:spPr>
-          <a:xfrm>
-            <a:off x="8127796" y="2728468"/>
-            <a:ext cx="3515258" cy="2525776"/>
-          </a:xfrm>
-          <a:prstGeom prst="roundRect">
-            <a:avLst>
-              <a:gd name="adj" fmla="val 4000"/>
-            </a:avLst>
-          </a:prstGeom>
-          <a:solidFill>
-            <a:srgbClr val="FFFFFF"/>
-          </a:solidFill>
-          <a:ln w="28575">
-            <a:solidFill>
-              <a:srgbClr val="5CB8F2"/>
-            </a:solidFill>
-          </a:ln>
-        </p:spPr>
-        <p:txBody>
-          <a:bodyPr rtlCol="0" anchor="ctr"/>
-          <a:lstStyle/>
-          <a:p>
-            <a:pPr algn="ctr"/>
-          </a:p>
-        </p:txBody>
-      </p:sp>
-      <p:sp>
-        <p:nvSpPr>
-          <p:cNvPr id="19" name="Oval 18"/>
-          <p:cNvSpPr/>
-          <p:nvPr/>
-        </p:nvSpPr>
-        <p:spPr>
-          <a:xfrm>
-            <a:off x="8356396" y="2929636"/>
-            <a:ext cx="731520" cy="731520"/>
-          </a:xfrm>
-          <a:prstGeom prst="ellipse">
-            <a:avLst/>
-          </a:prstGeom>
-          <a:solidFill>
-            <a:srgbClr val="5CB8F2"/>
-          </a:solidFill>
-          <a:ln>
-            <a:noFill/>
-          </a:ln>
-        </p:spPr>
-        <p:txBody>
-          <a:bodyPr rtlCol="0" anchor="ctr"/>
-          <a:lstStyle/>
-          <a:p>
-            <a:pPr algn="ctr"/>
-          </a:p>
-        </p:txBody>
-      </p:sp>
-      <p:pic>
-        <p:nvPicPr>
-          <p:cNvPr id="20" name="아이콘:calendar-time" descr="calendar-time_13294B_1.6.png"/>
-          <p:cNvPicPr>
-            <a:picLocks noChangeAspect="1"/>
-          </p:cNvPicPr>
-          <p:nvPr/>
-        </p:nvPicPr>
-        <p:blipFill>
-          <a:blip r:embed="rId5"/>
-          <a:stretch>
-            <a:fillRect/>
-          </a:stretch>
-        </p:blipFill>
-        <p:spPr>
-          <a:xfrm>
-            <a:off x="8510016" y="3083255"/>
-            <a:ext cx="424281" cy="424281"/>
-          </a:xfrm>
-          <a:prstGeom prst="rect">
-            <a:avLst/>
-          </a:prstGeom>
-        </p:spPr>
-      </p:pic>
-      <p:sp>
-        <p:nvSpPr>
-          <p:cNvPr id="21" name="TextBox 20"/>
-          <p:cNvSpPr txBox="1"/>
-          <p:nvPr/>
-        </p:nvSpPr>
-        <p:spPr>
-          <a:xfrm>
-            <a:off x="8292388" y="3752596"/>
-            <a:ext cx="3186074" cy="998728"/>
-          </a:xfrm>
-          <a:prstGeom prst="rect">
-            <a:avLst/>
-          </a:prstGeom>
-          <a:noFill/>
-        </p:spPr>
-        <p:txBody>
-          <a:bodyPr wrap="square" anchor="t"/>
-          <a:lstStyle/>
-          <a:p>
-            <a:pPr algn="l">
+              <a:t>납기 신뢰</a:t>
+            </a:r>
+          </a:p>
+          <a:p>
+            <a:pPr algn="ctr">
               <a:lnSpc>
                 <a:spcPct val="110000"/>
               </a:lnSpc>
               <a:spcAft>
-                <a:spcPts val="400"/>
+                <a:spcPts val="100"/>
               </a:spcAft>
             </a:pPr>
             <a:r>
-              <a:rPr sz="1800" b="1">
-                <a:solidFill>
-                  <a:srgbClr val="13294B"/>
-                </a:solidFill>
-                <a:latin typeface="맑은 고딕"/>
-                <a:ea typeface="맑은 고딕"/>
-                <a:cs typeface="맑은 고딕"/>
-              </a:rPr>
-              <a:t>납기 준수율</a:t>
-            </a:r>
-          </a:p>
-          <a:p>
-            <a:pPr algn="l">
-              <a:lnSpc>
-                <a:spcPct val="110000"/>
-              </a:lnSpc>
-              <a:spcAft>
-                <a:spcPts val="400"/>
-              </a:spcAft>
-            </a:pPr>
-            <a:r>
-              <a:rPr sz="1400" b="0">
-                <a:solidFill>
-                  <a:srgbClr val="1F2A3A"/>
-                </a:solidFill>
-                <a:latin typeface="맑은 고딕"/>
-                <a:ea typeface="맑은 고딕"/>
-                <a:cs typeface="맑은 고딕"/>
-              </a:rPr>
-              <a:t>펌프 부하를 내리면 낮아진다</a:t>
-            </a:r>
-          </a:p>
-        </p:txBody>
-      </p:sp>
-      <p:sp>
-        <p:nvSpPr>
-          <p:cNvPr id="22" name="Rounded Rectangle 21"/>
-          <p:cNvSpPr/>
-          <p:nvPr/>
-        </p:nvSpPr>
-        <p:spPr>
-          <a:xfrm>
-            <a:off x="8356396" y="4824476"/>
-            <a:ext cx="822960" cy="292608"/>
-          </a:xfrm>
-          <a:prstGeom prst="roundRect">
-            <a:avLst>
-              <a:gd name="adj" fmla="val 50000"/>
-            </a:avLst>
-          </a:prstGeom>
-          <a:solidFill>
-            <a:srgbClr val="5CB8F2"/>
-          </a:solidFill>
-          <a:ln>
-            <a:noFill/>
-          </a:ln>
-        </p:spPr>
-        <p:txBody>
-          <a:bodyPr rtlCol="0" anchor="ctr"/>
-          <a:lstStyle/>
-          <a:p>
-            <a:pPr algn="ctr"/>
-          </a:p>
-        </p:txBody>
-      </p:sp>
-      <p:sp>
-        <p:nvSpPr>
-          <p:cNvPr id="23" name="TextBox 22"/>
-          <p:cNvSpPr txBox="1"/>
-          <p:nvPr/>
-        </p:nvSpPr>
-        <p:spPr>
-          <a:xfrm>
-            <a:off x="8356396" y="4824476"/>
-            <a:ext cx="822960" cy="292608"/>
-          </a:xfrm>
-          <a:prstGeom prst="rect">
-            <a:avLst/>
-          </a:prstGeom>
-          <a:noFill/>
-        </p:spPr>
-        <p:txBody>
-          <a:bodyPr wrap="square" anchor="ctr"/>
-          <a:lstStyle/>
-          <a:p>
-            <a:pPr algn="ctr">
-              <a:lnSpc>
-                <a:spcPct val="110000"/>
-              </a:lnSpc>
-            </a:pPr>
-            <a:r>
-              <a:rPr sz="1200" b="1">
-                <a:solidFill>
-                  <a:srgbClr val="13294B"/>
-                </a:solidFill>
-                <a:latin typeface="맑은 고딕"/>
-                <a:ea typeface="맑은 고딕"/>
-                <a:cs typeface="맑은 고딕"/>
-              </a:rPr>
-              <a:t>고객</a:t>
+              <a:rPr sz="1300" b="0">
+                <a:solidFill>
+                  <a:srgbClr val="556175"/>
+                </a:solidFill>
+                <a:latin typeface="맑은 고딕"/>
+                <a:ea typeface="맑은 고딕"/>
+                <a:cs typeface="맑은 고딕"/>
+              </a:rPr>
+              <a:t>고객 관점</a:t>
             </a:r>
           </a:p>
         </p:txBody>
@@ -47031,7 +47419,7 @@
       </p:sp>
       <p:pic>
         <p:nvPicPr>
-          <p:cNvPr id="6" name="삽화:경로_3.svg" descr="illust_4037343831785095525_1791715399.png"/>
+          <p:cNvPr id="6" name="삽화:경로_3.svg" descr="illust_7925023059958122311_1791715399.png"/>
           <p:cNvPicPr>
             <a:picLocks noChangeAspect="1"/>
           </p:cNvPicPr>
@@ -48840,37 +49228,30 @@
           </a:p>
         </p:txBody>
       </p:sp>
-      <p:sp>
-        <p:nvSpPr>
-          <p:cNvPr id="6" name="Rounded Rectangle 5"/>
-          <p:cNvSpPr/>
-          <p:nvPr/>
-        </p:nvSpPr>
-        <p:spPr>
-          <a:xfrm>
-            <a:off x="548640" y="2418587"/>
-            <a:ext cx="11094415" cy="347472"/>
-          </a:xfrm>
-          <a:prstGeom prst="roundRect">
-            <a:avLst>
-              <a:gd name="adj" fmla="val 12000"/>
-            </a:avLst>
-          </a:prstGeom>
-          <a:solidFill>
-            <a:srgbClr val="13294B"/>
-          </a:solidFill>
-          <a:ln>
-            <a:noFill/>
-          </a:ln>
-        </p:spPr>
-        <p:txBody>
-          <a:bodyPr rtlCol="0" anchor="ctr"/>
-          <a:lstStyle/>
-          <a:p>
-            <a:pPr algn="ctr"/>
-          </a:p>
-        </p:txBody>
-      </p:sp>
+      <p:pic>
+        <p:nvPicPr>
+          <p:cNvPr id="6" name="삽화:원인후보.svg" descr="illust_3349541693998188975_1791770880.png"/>
+          <p:cNvPicPr>
+            <a:picLocks noChangeAspect="1"/>
+          </p:cNvPicPr>
+          <p:nvPr/>
+        </p:nvPicPr>
+        <p:blipFill>
+          <a:blip r:embed="rId3"/>
+          <a:stretch>
+            <a:fillRect/>
+          </a:stretch>
+        </p:blipFill>
+        <p:spPr>
+          <a:xfrm>
+            <a:off x="641100" y="1627632"/>
+            <a:ext cx="10909495" cy="4727448"/>
+          </a:xfrm>
+          <a:prstGeom prst="rect">
+            <a:avLst/>
+          </a:prstGeom>
+        </p:spPr>
+      </p:pic>
       <p:sp>
         <p:nvSpPr>
           <p:cNvPr id="7" name="TextBox 6"/>
@@ -48879,33 +49260,57 @@
         </p:nvSpPr>
         <p:spPr>
           <a:xfrm>
-            <a:off x="685800" y="2418587"/>
-            <a:ext cx="2514600" cy="347472"/>
-          </a:xfrm>
-          <a:prstGeom prst="rect">
-            <a:avLst/>
-          </a:prstGeom>
-          <a:noFill/>
-        </p:spPr>
-        <p:txBody>
-          <a:bodyPr wrap="square" anchor="ctr"/>
-          <a:lstStyle/>
-          <a:p>
-            <a:pPr algn="l">
-              <a:lnSpc>
-                <a:spcPct val="110000"/>
-              </a:lnSpc>
-            </a:pPr>
-            <a:r>
-              <a:rPr sz="1300" b="1">
-                <a:solidFill>
-                  <a:srgbClr val="FFFFFF"/>
-                </a:solidFill>
-                <a:latin typeface="맑은 고딕"/>
-                <a:ea typeface="맑은 고딕"/>
-                <a:cs typeface="맑은 고딕"/>
-              </a:rPr>
-              <a:t>원인 후보</a:t>
+            <a:off x="586552" y="4747747"/>
+            <a:ext cx="2181899" cy="577342"/>
+          </a:xfrm>
+          <a:prstGeom prst="rect">
+            <a:avLst/>
+          </a:prstGeom>
+          <a:noFill/>
+        </p:spPr>
+        <p:txBody>
+          <a:bodyPr wrap="square" anchor="t"/>
+          <a:lstStyle/>
+          <a:p>
+            <a:pPr algn="ctr">
+              <a:lnSpc>
+                <a:spcPct val="110000"/>
+              </a:lnSpc>
+              <a:spcAft>
+                <a:spcPts val="100"/>
+              </a:spcAft>
+            </a:pPr>
+            <a:r>
+              <a:rPr sz="1600" b="1">
+                <a:solidFill>
+                  <a:srgbClr val="13294B"/>
+                </a:solidFill>
+                <a:latin typeface="맑은 고딕"/>
+                <a:ea typeface="맑은 고딕"/>
+                <a:cs typeface="맑은 고딕"/>
+              </a:rPr>
+              <a:t>유온 상승</a:t>
+            </a:r>
+          </a:p>
+          <a:p>
+            <a:pPr algn="ctr">
+              <a:lnSpc>
+                <a:spcPct val="110000"/>
+              </a:lnSpc>
+              <a:spcAft>
+                <a:spcPts val="100"/>
+              </a:spcAft>
+            </a:pPr>
+            <a:r>
+              <a:rPr sz="1300" b="0">
+                <a:solidFill>
+                  <a:srgbClr val="556175"/>
+                </a:solidFill>
+                <a:latin typeface="맑은 고딕"/>
+                <a:ea typeface="맑은 고딕"/>
+                <a:cs typeface="맑은 고딕"/>
+              </a:rPr>
+              <a:t>경보가 알려 주는 증상</a:t>
             </a:r>
           </a:p>
         </p:txBody>
@@ -48918,33 +49323,57 @@
         </p:nvSpPr>
         <p:spPr>
           <a:xfrm>
-            <a:off x="3200400" y="2418587"/>
-            <a:ext cx="6248095" cy="347472"/>
-          </a:xfrm>
-          <a:prstGeom prst="rect">
-            <a:avLst/>
-          </a:prstGeom>
-          <a:noFill/>
-        </p:spPr>
-        <p:txBody>
-          <a:bodyPr wrap="square" anchor="ctr"/>
-          <a:lstStyle/>
-          <a:p>
-            <a:pPr algn="l">
-              <a:lnSpc>
-                <a:spcPct val="110000"/>
-              </a:lnSpc>
-            </a:pPr>
-            <a:r>
-              <a:rPr sz="1300" b="1">
-                <a:solidFill>
-                  <a:srgbClr val="FFFFFF"/>
-                </a:solidFill>
-                <a:latin typeface="맑은 고딕"/>
-                <a:ea typeface="맑은 고딕"/>
-                <a:cs typeface="맑은 고딕"/>
-              </a:rPr>
-              <a:t>증거 기준(지식)과 읽은 값(원천)</a:t>
+            <a:off x="3777579" y="1698543"/>
+            <a:ext cx="1963709" cy="577342"/>
+          </a:xfrm>
+          <a:prstGeom prst="rect">
+            <a:avLst/>
+          </a:prstGeom>
+          <a:noFill/>
+        </p:spPr>
+        <p:txBody>
+          <a:bodyPr wrap="square" anchor="t"/>
+          <a:lstStyle/>
+          <a:p>
+            <a:pPr algn="ctr">
+              <a:lnSpc>
+                <a:spcPct val="110000"/>
+              </a:lnSpc>
+              <a:spcAft>
+                <a:spcPts val="100"/>
+              </a:spcAft>
+            </a:pPr>
+            <a:r>
+              <a:rPr sz="1600" b="1">
+                <a:solidFill>
+                  <a:srgbClr val="13294B"/>
+                </a:solidFill>
+                <a:latin typeface="맑은 고딕"/>
+                <a:ea typeface="맑은 고딕"/>
+                <a:cs typeface="맑은 고딕"/>
+              </a:rPr>
+              <a:t>냉각 효율 46.2 %</a:t>
+            </a:r>
+          </a:p>
+          <a:p>
+            <a:pPr algn="ctr">
+              <a:lnSpc>
+                <a:spcPct val="110000"/>
+              </a:lnSpc>
+              <a:spcAft>
+                <a:spcPts val="100"/>
+              </a:spcAft>
+            </a:pPr>
+            <a:r>
+              <a:rPr sz="1300" b="0">
+                <a:solidFill>
+                  <a:srgbClr val="556175"/>
+                </a:solidFill>
+                <a:latin typeface="맑은 고딕"/>
+                <a:ea typeface="맑은 고딕"/>
+                <a:cs typeface="맑은 고딕"/>
+              </a:rPr>
+              <a:t>읽은 값</a:t>
             </a:r>
           </a:p>
         </p:txBody>
@@ -48957,65 +49386,121 @@
         </p:nvSpPr>
         <p:spPr>
           <a:xfrm>
-            <a:off x="9448495" y="2418587"/>
-            <a:ext cx="2194560" cy="347472"/>
-          </a:xfrm>
-          <a:prstGeom prst="rect">
-            <a:avLst/>
-          </a:prstGeom>
-          <a:noFill/>
-        </p:spPr>
-        <p:txBody>
-          <a:bodyPr wrap="square" anchor="ctr"/>
-          <a:lstStyle/>
-          <a:p>
-            <a:pPr algn="l">
-              <a:lnSpc>
-                <a:spcPct val="110000"/>
-              </a:lnSpc>
-            </a:pPr>
-            <a:r>
-              <a:rPr sz="1300" b="1">
-                <a:solidFill>
-                  <a:srgbClr val="FFFFFF"/>
-                </a:solidFill>
-                <a:latin typeface="맑은 고딕"/>
-                <a:ea typeface="맑은 고딕"/>
-                <a:cs typeface="맑은 고딕"/>
-              </a:rPr>
-              <a:t>판정</a:t>
-            </a:r>
-          </a:p>
-        </p:txBody>
-      </p:sp>
-      <p:sp>
-        <p:nvSpPr>
-          <p:cNvPr id="10" name="Rounded Rectangle 9"/>
-          <p:cNvSpPr/>
-          <p:nvPr/>
-        </p:nvSpPr>
-        <p:spPr>
-          <a:xfrm>
-            <a:off x="548640" y="2852927"/>
-            <a:ext cx="11094415" cy="850392"/>
-          </a:xfrm>
-          <a:prstGeom prst="roundRect">
-            <a:avLst>
-              <a:gd name="adj" fmla="val 8000"/>
-            </a:avLst>
-          </a:prstGeom>
-          <a:solidFill>
-            <a:srgbClr val="E7F3FD"/>
-          </a:solidFill>
-          <a:ln>
-            <a:noFill/>
-          </a:ln>
-        </p:spPr>
-        <p:txBody>
-          <a:bodyPr rtlCol="0" anchor="ctr"/>
-          <a:lstStyle/>
-          <a:p>
-            <a:pPr algn="ctr"/>
+            <a:off x="3668484" y="3164052"/>
+            <a:ext cx="2181899" cy="577342"/>
+          </a:xfrm>
+          <a:prstGeom prst="rect">
+            <a:avLst/>
+          </a:prstGeom>
+          <a:noFill/>
+        </p:spPr>
+        <p:txBody>
+          <a:bodyPr wrap="square" anchor="t"/>
+          <a:lstStyle/>
+          <a:p>
+            <a:pPr algn="ctr">
+              <a:lnSpc>
+                <a:spcPct val="110000"/>
+              </a:lnSpc>
+              <a:spcAft>
+                <a:spcPts val="100"/>
+              </a:spcAft>
+            </a:pPr>
+            <a:r>
+              <a:rPr sz="1600" b="1">
+                <a:solidFill>
+                  <a:srgbClr val="13294B"/>
+                </a:solidFill>
+                <a:latin typeface="맑은 고딕"/>
+                <a:ea typeface="맑은 고딕"/>
+                <a:cs typeface="맑은 고딕"/>
+              </a:rPr>
+              <a:t>팬 진동 0.575 mm/s</a:t>
+            </a:r>
+          </a:p>
+          <a:p>
+            <a:pPr algn="ctr">
+              <a:lnSpc>
+                <a:spcPct val="110000"/>
+              </a:lnSpc>
+              <a:spcAft>
+                <a:spcPts val="100"/>
+              </a:spcAft>
+            </a:pPr>
+            <a:r>
+              <a:rPr sz="1300" b="0">
+                <a:solidFill>
+                  <a:srgbClr val="556175"/>
+                </a:solidFill>
+                <a:latin typeface="맑은 고딕"/>
+                <a:ea typeface="맑은 고딕"/>
+                <a:cs typeface="맑은 고딕"/>
+              </a:rPr>
+              <a:t>읽은 값</a:t>
+            </a:r>
+          </a:p>
+        </p:txBody>
+      </p:sp>
+      <p:sp>
+        <p:nvSpPr>
+          <p:cNvPr id="10" name="TextBox 9"/>
+          <p:cNvSpPr txBox="1"/>
+          <p:nvPr/>
+        </p:nvSpPr>
+        <p:spPr>
+          <a:xfrm>
+            <a:off x="3777579" y="4639016"/>
+            <a:ext cx="1963709" cy="577342"/>
+          </a:xfrm>
+          <a:prstGeom prst="rect">
+            <a:avLst/>
+          </a:prstGeom>
+          <a:noFill/>
+        </p:spPr>
+        <p:txBody>
+          <a:bodyPr wrap="square" anchor="t"/>
+          <a:lstStyle/>
+          <a:p>
+            <a:pPr algn="ctr">
+              <a:lnSpc>
+                <a:spcPct val="110000"/>
+              </a:lnSpc>
+              <a:spcAft>
+                <a:spcPts val="100"/>
+              </a:spcAft>
+            </a:pPr>
+            <a:r>
+              <a:rPr sz="1600" b="1">
+                <a:solidFill>
+                  <a:srgbClr val="13294B"/>
+                </a:solidFill>
+                <a:latin typeface="맑은 고딕"/>
+                <a:ea typeface="맑은 고딕"/>
+                <a:cs typeface="맑은 고딕"/>
+              </a:rPr>
+              <a:t>캐비닛 온도 28 ℃</a:t>
+            </a:r>
+          </a:p>
+          <a:p>
+            <a:pPr algn="ctr">
+              <a:lnSpc>
+                <a:spcPct val="110000"/>
+              </a:lnSpc>
+              <a:spcAft>
+                <a:spcPts val="100"/>
+              </a:spcAft>
+            </a:pPr>
+            <a:r>
+              <a:rPr sz="1300" b="0">
+                <a:solidFill>
+                  <a:srgbClr val="556175"/>
+                </a:solidFill>
+                <a:latin typeface="맑은 고딕"/>
+                <a:ea typeface="맑은 고딕"/>
+                <a:cs typeface="맑은 고딕"/>
+              </a:rPr>
+              <a:t>읽은 값</a:t>
+            </a:r>
           </a:p>
         </p:txBody>
       </p:sp>
@@ -49027,90 +49512,183 @@
         </p:nvSpPr>
         <p:spPr>
           <a:xfrm>
-            <a:off x="685800" y="2820923"/>
-            <a:ext cx="2514600" cy="914400"/>
-          </a:xfrm>
-          <a:prstGeom prst="rect">
-            <a:avLst/>
-          </a:prstGeom>
-          <a:noFill/>
-        </p:spPr>
-        <p:txBody>
-          <a:bodyPr wrap="square" anchor="ctr"/>
-          <a:lstStyle/>
-          <a:p>
-            <a:pPr algn="l">
-              <a:lnSpc>
-                <a:spcPct val="110000"/>
-              </a:lnSpc>
+            <a:off x="7394077" y="2076739"/>
+            <a:ext cx="4036513" cy="980185"/>
+          </a:xfrm>
+          <a:prstGeom prst="rect">
+            <a:avLst/>
+          </a:prstGeom>
+          <a:noFill/>
+        </p:spPr>
+        <p:txBody>
+          <a:bodyPr wrap="square" anchor="t"/>
+          <a:lstStyle/>
+          <a:p>
+            <a:pPr algn="ctr">
+              <a:lnSpc>
+                <a:spcPct val="110000"/>
+              </a:lnSpc>
+              <a:spcAft>
+                <a:spcPts val="100"/>
+              </a:spcAft>
             </a:pPr>
             <a:r>
               <a:rPr sz="1600" b="1">
                 <a:solidFill>
+                  <a:srgbClr val="1A6FC4"/>
+                </a:solidFill>
+                <a:latin typeface="맑은 고딕"/>
+                <a:ea typeface="맑은 고딕"/>
+                <a:cs typeface="맑은 고딕"/>
+              </a:rPr>
+              <a:t>쿨러 핀 오염</a:t>
+            </a:r>
+          </a:p>
+          <a:p>
+            <a:pPr algn="ctr">
+              <a:lnSpc>
+                <a:spcPct val="110000"/>
+              </a:lnSpc>
+              <a:spcAft>
+                <a:spcPts val="100"/>
+              </a:spcAft>
+            </a:pPr>
+            <a:r>
+              <a:rPr sz="1300" b="0">
+                <a:solidFill>
+                  <a:srgbClr val="556175"/>
+                </a:solidFill>
+                <a:latin typeface="맑은 고딕"/>
+                <a:ea typeface="맑은 고딕"/>
+                <a:cs typeface="맑은 고딕"/>
+              </a:rPr>
+              <a:t>기준: 냉각 효율 평균 70 % 미만,</a:t>
+            </a:r>
+          </a:p>
+          <a:p>
+            <a:pPr algn="ctr">
+              <a:lnSpc>
+                <a:spcPct val="110000"/>
+              </a:lnSpc>
+              <a:spcAft>
+                <a:spcPts val="100"/>
+              </a:spcAft>
+            </a:pPr>
+            <a:r>
+              <a:rPr sz="1300" b="0">
+                <a:solidFill>
+                  <a:srgbClr val="556175"/>
+                </a:solidFill>
+                <a:latin typeface="맑은 고딕"/>
+                <a:ea typeface="맑은 고딕"/>
+                <a:cs typeface="맑은 고딕"/>
+              </a:rPr>
+              <a:t>팬 진동 평균 0.9 mm/s 미만</a:t>
+            </a:r>
+          </a:p>
+          <a:p>
+            <a:pPr algn="ctr">
+              <a:lnSpc>
+                <a:spcPct val="110000"/>
+              </a:lnSpc>
+              <a:spcAft>
+                <a:spcPts val="100"/>
+              </a:spcAft>
+            </a:pPr>
+            <a:r>
+              <a:rPr sz="1300" b="0">
+                <a:solidFill>
+                  <a:srgbClr val="556175"/>
+                </a:solidFill>
+                <a:latin typeface="맑은 고딕"/>
+                <a:ea typeface="맑은 고딕"/>
+                <a:cs typeface="맑은 고딕"/>
+              </a:rPr>
+              <a:t>판정: 맞음</a:t>
+            </a:r>
+          </a:p>
+        </p:txBody>
+      </p:sp>
+      <p:sp>
+        <p:nvSpPr>
+          <p:cNvPr id="12" name="TextBox 11"/>
+          <p:cNvSpPr txBox="1"/>
+          <p:nvPr/>
+        </p:nvSpPr>
+        <p:spPr>
+          <a:xfrm>
+            <a:off x="7394077" y="3627342"/>
+            <a:ext cx="4036513" cy="778764"/>
+          </a:xfrm>
+          <a:prstGeom prst="rect">
+            <a:avLst/>
+          </a:prstGeom>
+          <a:noFill/>
+        </p:spPr>
+        <p:txBody>
+          <a:bodyPr wrap="square" anchor="t"/>
+          <a:lstStyle/>
+          <a:p>
+            <a:pPr algn="ctr">
+              <a:lnSpc>
+                <a:spcPct val="110000"/>
+              </a:lnSpc>
+              <a:spcAft>
+                <a:spcPts val="100"/>
+              </a:spcAft>
+            </a:pPr>
+            <a:r>
+              <a:rPr sz="1600" b="1">
+                <a:solidFill>
                   <a:srgbClr val="13294B"/>
                 </a:solidFill>
                 <a:latin typeface="맑은 고딕"/>
                 <a:ea typeface="맑은 고딕"/>
                 <a:cs typeface="맑은 고딕"/>
               </a:rPr>
-              <a:t>쿨러 핀 오염</a:t>
-            </a:r>
-          </a:p>
-        </p:txBody>
-      </p:sp>
-      <p:sp>
-        <p:nvSpPr>
-          <p:cNvPr id="12" name="TextBox 11"/>
-          <p:cNvSpPr txBox="1"/>
-          <p:nvPr/>
-        </p:nvSpPr>
-        <p:spPr>
-          <a:xfrm>
-            <a:off x="3200400" y="2820923"/>
-            <a:ext cx="6156655" cy="914400"/>
-          </a:xfrm>
-          <a:prstGeom prst="rect">
-            <a:avLst/>
-          </a:prstGeom>
-          <a:noFill/>
-        </p:spPr>
-        <p:txBody>
-          <a:bodyPr wrap="square" anchor="ctr"/>
-          <a:lstStyle/>
-          <a:p>
-            <a:pPr algn="l">
-              <a:lnSpc>
-                <a:spcPct val="110000"/>
-              </a:lnSpc>
-            </a:pPr>
-            <a:r>
-              <a:rPr sz="1400" b="0">
-                <a:solidFill>
-                  <a:srgbClr val="1F2A3A"/>
-                </a:solidFill>
-                <a:latin typeface="맑은 고딕"/>
-                <a:ea typeface="맑은 고딕"/>
-                <a:cs typeface="맑은 고딕"/>
-              </a:rPr>
-              <a:t>기준: 냉각 효율 평균 70 % 미만이고 팬 진동 평균 0.9 mm/s 미만</a:t>
-            </a:r>
-          </a:p>
-          <a:p>
-            <a:pPr algn="l">
-              <a:lnSpc>
-                <a:spcPct val="110000"/>
-              </a:lnSpc>
-            </a:pPr>
-            <a:r>
-              <a:rPr sz="1400" b="0">
-                <a:solidFill>
-                  <a:srgbClr val="1F2A3A"/>
-                </a:solidFill>
-                <a:latin typeface="맑은 고딕"/>
-                <a:ea typeface="맑은 고딕"/>
-                <a:cs typeface="맑은 고딕"/>
-              </a:rPr>
-              <a:t>읽은 값: 냉각 효율 46.2 %, 팬 진동 0.575 mm/s</a:t>
+              <a:t>팬 구동 불량</a:t>
+            </a:r>
+          </a:p>
+          <a:p>
+            <a:pPr algn="ctr">
+              <a:lnSpc>
+                <a:spcPct val="110000"/>
+              </a:lnSpc>
+              <a:spcAft>
+                <a:spcPts val="100"/>
+              </a:spcAft>
+            </a:pPr>
+            <a:r>
+              <a:rPr sz="1300" b="0">
+                <a:solidFill>
+                  <a:srgbClr val="556175"/>
+                </a:solidFill>
+                <a:latin typeface="맑은 고딕"/>
+                <a:ea typeface="맑은 고딕"/>
+                <a:cs typeface="맑은 고딕"/>
+              </a:rPr>
+              <a:t>기준: 팬 진동 평균 0.9 mm/s 이상</a:t>
+            </a:r>
+          </a:p>
+          <a:p>
+            <a:pPr algn="ctr">
+              <a:lnSpc>
+                <a:spcPct val="110000"/>
+              </a:lnSpc>
+              <a:spcAft>
+                <a:spcPts val="100"/>
+              </a:spcAft>
+            </a:pPr>
+            <a:r>
+              <a:rPr sz="1300" b="0">
+                <a:solidFill>
+                  <a:srgbClr val="556175"/>
+                </a:solidFill>
+                <a:latin typeface="맑은 고딕"/>
+                <a:ea typeface="맑은 고딕"/>
+                <a:cs typeface="맑은 고딕"/>
+              </a:rPr>
+              <a:t>판정: 아님</a:t>
             </a:r>
           </a:p>
         </p:txBody>
@@ -49123,92 +49701,25 @@
         </p:nvSpPr>
         <p:spPr>
           <a:xfrm>
-            <a:off x="9448495" y="2820923"/>
-            <a:ext cx="2103120" cy="914400"/>
-          </a:xfrm>
-          <a:prstGeom prst="rect">
-            <a:avLst/>
-          </a:prstGeom>
-          <a:noFill/>
-        </p:spPr>
-        <p:txBody>
-          <a:bodyPr wrap="square" anchor="ctr"/>
-          <a:lstStyle/>
-          <a:p>
-            <a:pPr algn="l">
-              <a:lnSpc>
-                <a:spcPct val="110000"/>
-              </a:lnSpc>
-            </a:pPr>
-            <a:r>
-              <a:rPr sz="1250" b="1">
-                <a:solidFill>
-                  <a:srgbClr val="1A6FC4"/>
-                </a:solidFill>
-                <a:latin typeface="맑은 고딕"/>
-                <a:ea typeface="맑은 고딕"/>
-                <a:cs typeface="맑은 고딕"/>
-              </a:rPr>
-              <a:t>맞음</a:t>
-            </a:r>
-          </a:p>
-        </p:txBody>
-      </p:sp>
-      <p:sp>
-        <p:nvSpPr>
-          <p:cNvPr id="14" name="Rounded Rectangle 13"/>
-          <p:cNvSpPr/>
-          <p:nvPr/>
-        </p:nvSpPr>
-        <p:spPr>
-          <a:xfrm>
-            <a:off x="548640" y="3767327"/>
-            <a:ext cx="11094415" cy="850392"/>
-          </a:xfrm>
-          <a:prstGeom prst="roundRect">
-            <a:avLst>
-              <a:gd name="adj" fmla="val 8000"/>
-            </a:avLst>
-          </a:prstGeom>
-          <a:solidFill>
-            <a:srgbClr val="F3F6F9"/>
-          </a:solidFill>
-          <a:ln>
-            <a:noFill/>
-          </a:ln>
-        </p:spPr>
-        <p:txBody>
-          <a:bodyPr rtlCol="0" anchor="ctr"/>
-          <a:lstStyle/>
-          <a:p>
-            <a:pPr algn="ctr"/>
-          </a:p>
-        </p:txBody>
-      </p:sp>
-      <p:sp>
-        <p:nvSpPr>
-          <p:cNvPr id="15" name="TextBox 14"/>
-          <p:cNvSpPr txBox="1"/>
-          <p:nvPr/>
-        </p:nvSpPr>
-        <p:spPr>
-          <a:xfrm>
-            <a:off x="685800" y="3735323"/>
-            <a:ext cx="2514600" cy="914400"/>
-          </a:xfrm>
-          <a:prstGeom prst="rect">
-            <a:avLst/>
-          </a:prstGeom>
-          <a:noFill/>
-        </p:spPr>
-        <p:txBody>
-          <a:bodyPr wrap="square" anchor="ctr"/>
-          <a:lstStyle/>
-          <a:p>
-            <a:pPr algn="l">
-              <a:lnSpc>
-                <a:spcPct val="110000"/>
-              </a:lnSpc>
+            <a:off x="7394077" y="5102306"/>
+            <a:ext cx="4036513" cy="778764"/>
+          </a:xfrm>
+          <a:prstGeom prst="rect">
+            <a:avLst/>
+          </a:prstGeom>
+          <a:noFill/>
+        </p:spPr>
+        <p:txBody>
+          <a:bodyPr wrap="square" anchor="t"/>
+          <a:lstStyle/>
+          <a:p>
+            <a:pPr algn="ctr">
+              <a:lnSpc>
+                <a:spcPct val="110000"/>
+              </a:lnSpc>
+              <a:spcAft>
+                <a:spcPts val="100"/>
+              </a:spcAft>
             </a:pPr>
             <a:r>
               <a:rPr sz="1600" b="1">
@@ -49219,95 +49730,20 @@
                 <a:ea typeface="맑은 고딕"/>
                 <a:cs typeface="맑은 고딕"/>
               </a:rPr>
-              <a:t>팬 구동 불량</a:t>
-            </a:r>
-          </a:p>
-        </p:txBody>
-      </p:sp>
-      <p:sp>
-        <p:nvSpPr>
-          <p:cNvPr id="16" name="TextBox 15"/>
-          <p:cNvSpPr txBox="1"/>
-          <p:nvPr/>
-        </p:nvSpPr>
-        <p:spPr>
-          <a:xfrm>
-            <a:off x="3200400" y="3735323"/>
-            <a:ext cx="6156655" cy="914400"/>
-          </a:xfrm>
-          <a:prstGeom prst="rect">
-            <a:avLst/>
-          </a:prstGeom>
-          <a:noFill/>
-        </p:spPr>
-        <p:txBody>
-          <a:bodyPr wrap="square" anchor="ctr"/>
-          <a:lstStyle/>
-          <a:p>
-            <a:pPr algn="l">
-              <a:lnSpc>
-                <a:spcPct val="110000"/>
-              </a:lnSpc>
-            </a:pPr>
-            <a:r>
-              <a:rPr sz="1400" b="0">
-                <a:solidFill>
-                  <a:srgbClr val="1F2A3A"/>
-                </a:solidFill>
-                <a:latin typeface="맑은 고딕"/>
-                <a:ea typeface="맑은 고딕"/>
-                <a:cs typeface="맑은 고딕"/>
-              </a:rPr>
-              <a:t>기준: 팬 진동 평균 0.9 mm/s 이상</a:t>
-            </a:r>
-          </a:p>
-          <a:p>
-            <a:pPr algn="l">
-              <a:lnSpc>
-                <a:spcPct val="110000"/>
-              </a:lnSpc>
-            </a:pPr>
-            <a:r>
-              <a:rPr sz="1400" b="0">
-                <a:solidFill>
-                  <a:srgbClr val="1F2A3A"/>
-                </a:solidFill>
-                <a:latin typeface="맑은 고딕"/>
-                <a:ea typeface="맑은 고딕"/>
-                <a:cs typeface="맑은 고딕"/>
-              </a:rPr>
-              <a:t>읽은 값: 팬 진동 0.575 mm/s</a:t>
-            </a:r>
-          </a:p>
-        </p:txBody>
-      </p:sp>
-      <p:sp>
-        <p:nvSpPr>
-          <p:cNvPr id="17" name="TextBox 16"/>
-          <p:cNvSpPr txBox="1"/>
-          <p:nvPr/>
-        </p:nvSpPr>
-        <p:spPr>
-          <a:xfrm>
-            <a:off x="9448495" y="3735323"/>
-            <a:ext cx="2103120" cy="914400"/>
-          </a:xfrm>
-          <a:prstGeom prst="rect">
-            <a:avLst/>
-          </a:prstGeom>
-          <a:noFill/>
-        </p:spPr>
-        <p:txBody>
-          <a:bodyPr wrap="square" anchor="ctr"/>
-          <a:lstStyle/>
-          <a:p>
-            <a:pPr algn="l">
-              <a:lnSpc>
-                <a:spcPct val="110000"/>
-              </a:lnSpc>
-            </a:pPr>
-            <a:r>
-              <a:rPr sz="1250" b="1">
+              <a:t>주변 온도 상승</a:t>
+            </a:r>
+          </a:p>
+          <a:p>
+            <a:pPr algn="ctr">
+              <a:lnSpc>
+                <a:spcPct val="110000"/>
+              </a:lnSpc>
+              <a:spcAft>
+                <a:spcPts val="100"/>
+              </a:spcAft>
+            </a:pPr>
+            <a:r>
+              <a:rPr sz="1300" b="0">
                 <a:solidFill>
                   <a:srgbClr val="556175"/>
                 </a:solidFill>
@@ -49315,66 +49751,59 @@
                 <a:ea typeface="맑은 고딕"/>
                 <a:cs typeface="맑은 고딕"/>
               </a:rPr>
-              <a:t>아님</a:t>
-            </a:r>
-          </a:p>
-        </p:txBody>
-      </p:sp>
-      <p:sp>
-        <p:nvSpPr>
-          <p:cNvPr id="18" name="Rounded Rectangle 17"/>
-          <p:cNvSpPr/>
-          <p:nvPr/>
-        </p:nvSpPr>
-        <p:spPr>
-          <a:xfrm>
-            <a:off x="548640" y="4681727"/>
-            <a:ext cx="11094415" cy="850392"/>
-          </a:xfrm>
-          <a:prstGeom prst="roundRect">
-            <a:avLst>
-              <a:gd name="adj" fmla="val 8000"/>
-            </a:avLst>
-          </a:prstGeom>
-          <a:solidFill>
-            <a:srgbClr val="F3F6F9"/>
-          </a:solidFill>
-          <a:ln>
-            <a:noFill/>
-          </a:ln>
-        </p:spPr>
-        <p:txBody>
-          <a:bodyPr rtlCol="0" anchor="ctr"/>
-          <a:lstStyle/>
-          <a:p>
-            <a:pPr algn="ctr"/>
-          </a:p>
-        </p:txBody>
-      </p:sp>
-      <p:sp>
-        <p:nvSpPr>
-          <p:cNvPr id="19" name="TextBox 18"/>
-          <p:cNvSpPr txBox="1"/>
-          <p:nvPr/>
-        </p:nvSpPr>
-        <p:spPr>
-          <a:xfrm>
-            <a:off x="685800" y="4649723"/>
-            <a:ext cx="2514600" cy="914400"/>
-          </a:xfrm>
-          <a:prstGeom prst="rect">
-            <a:avLst/>
-          </a:prstGeom>
-          <a:noFill/>
-        </p:spPr>
-        <p:txBody>
-          <a:bodyPr wrap="square" anchor="ctr"/>
-          <a:lstStyle/>
-          <a:p>
-            <a:pPr algn="l">
-              <a:lnSpc>
-                <a:spcPct val="110000"/>
-              </a:lnSpc>
+              <a:t>기준: 캐비닛 온도 평균 35 ℃ 이상</a:t>
+            </a:r>
+          </a:p>
+          <a:p>
+            <a:pPr algn="ctr">
+              <a:lnSpc>
+                <a:spcPct val="110000"/>
+              </a:lnSpc>
+              <a:spcAft>
+                <a:spcPts val="100"/>
+              </a:spcAft>
+            </a:pPr>
+            <a:r>
+              <a:rPr sz="1300" b="0">
+                <a:solidFill>
+                  <a:srgbClr val="556175"/>
+                </a:solidFill>
+                <a:latin typeface="맑은 고딕"/>
+                <a:ea typeface="맑은 고딕"/>
+                <a:cs typeface="맑은 고딕"/>
+              </a:rPr>
+              <a:t>판정: 아님</a:t>
+            </a:r>
+          </a:p>
+        </p:txBody>
+      </p:sp>
+      <p:sp>
+        <p:nvSpPr>
+          <p:cNvPr id="14" name="TextBox 13"/>
+          <p:cNvSpPr txBox="1"/>
+          <p:nvPr/>
+        </p:nvSpPr>
+        <p:spPr>
+          <a:xfrm>
+            <a:off x="3450295" y="5835060"/>
+            <a:ext cx="2618278" cy="778764"/>
+          </a:xfrm>
+          <a:prstGeom prst="rect">
+            <a:avLst/>
+          </a:prstGeom>
+          <a:noFill/>
+        </p:spPr>
+        <p:txBody>
+          <a:bodyPr wrap="square" anchor="t"/>
+          <a:lstStyle/>
+          <a:p>
+            <a:pPr algn="ctr">
+              <a:lnSpc>
+                <a:spcPct val="110000"/>
+              </a:lnSpc>
+              <a:spcAft>
+                <a:spcPts val="100"/>
+              </a:spcAft>
             </a:pPr>
             <a:r>
               <a:rPr sz="1600" b="1">
@@ -49385,95 +49814,20 @@
                 <a:ea typeface="맑은 고딕"/>
                 <a:cs typeface="맑은 고딕"/>
               </a:rPr>
-              <a:t>주변 온도 상승</a:t>
-            </a:r>
-          </a:p>
-        </p:txBody>
-      </p:sp>
-      <p:sp>
-        <p:nvSpPr>
-          <p:cNvPr id="20" name="TextBox 19"/>
-          <p:cNvSpPr txBox="1"/>
-          <p:nvPr/>
-        </p:nvSpPr>
-        <p:spPr>
-          <a:xfrm>
-            <a:off x="3200400" y="4649723"/>
-            <a:ext cx="6156655" cy="914400"/>
-          </a:xfrm>
-          <a:prstGeom prst="rect">
-            <a:avLst/>
-          </a:prstGeom>
-          <a:noFill/>
-        </p:spPr>
-        <p:txBody>
-          <a:bodyPr wrap="square" anchor="ctr"/>
-          <a:lstStyle/>
-          <a:p>
-            <a:pPr algn="l">
-              <a:lnSpc>
-                <a:spcPct val="110000"/>
-              </a:lnSpc>
-            </a:pPr>
-            <a:r>
-              <a:rPr sz="1400" b="0">
-                <a:solidFill>
-                  <a:srgbClr val="1F2A3A"/>
-                </a:solidFill>
-                <a:latin typeface="맑은 고딕"/>
-                <a:ea typeface="맑은 고딕"/>
-                <a:cs typeface="맑은 고딕"/>
-              </a:rPr>
-              <a:t>기준: 캐비닛 온도 평균 35 ℃ 이상</a:t>
-            </a:r>
-          </a:p>
-          <a:p>
-            <a:pPr algn="l">
-              <a:lnSpc>
-                <a:spcPct val="110000"/>
-              </a:lnSpc>
-            </a:pPr>
-            <a:r>
-              <a:rPr sz="1400" b="0">
-                <a:solidFill>
-                  <a:srgbClr val="1F2A3A"/>
-                </a:solidFill>
-                <a:latin typeface="맑은 고딕"/>
-                <a:ea typeface="맑은 고딕"/>
-                <a:cs typeface="맑은 고딕"/>
-              </a:rPr>
-              <a:t>읽은 값: 캐비닛 온도 28 ℃</a:t>
-            </a:r>
-          </a:p>
-        </p:txBody>
-      </p:sp>
-      <p:sp>
-        <p:nvSpPr>
-          <p:cNvPr id="21" name="TextBox 20"/>
-          <p:cNvSpPr txBox="1"/>
-          <p:nvPr/>
-        </p:nvSpPr>
-        <p:spPr>
-          <a:xfrm>
-            <a:off x="9448495" y="4649723"/>
-            <a:ext cx="2103120" cy="914400"/>
-          </a:xfrm>
-          <a:prstGeom prst="rect">
-            <a:avLst/>
-          </a:prstGeom>
-          <a:noFill/>
-        </p:spPr>
-        <p:txBody>
-          <a:bodyPr wrap="square" anchor="ctr"/>
-          <a:lstStyle/>
-          <a:p>
-            <a:pPr algn="l">
-              <a:lnSpc>
-                <a:spcPct val="110000"/>
-              </a:lnSpc>
-            </a:pPr>
-            <a:r>
-              <a:rPr sz="1250" b="1">
+              <a:t>값은 원천에 있다</a:t>
+            </a:r>
+          </a:p>
+          <a:p>
+            <a:pPr algn="ctr">
+              <a:lnSpc>
+                <a:spcPct val="110000"/>
+              </a:lnSpc>
+              <a:spcAft>
+                <a:spcPts val="100"/>
+              </a:spcAft>
+            </a:pPr>
+            <a:r>
+              <a:rPr sz="1300" b="0">
                 <a:solidFill>
                   <a:srgbClr val="556175"/>
                 </a:solidFill>
@@ -49481,7 +49835,7 @@
                 <a:ea typeface="맑은 고딕"/>
                 <a:cs typeface="맑은 고딕"/>
               </a:rPr>
-              <a:t>아님</a:t>
+              <a:t>판단하는 순간에 시계열 DB에서 읽는다</a:t>
             </a:r>
           </a:p>
         </p:txBody>
@@ -50909,36 +51263,60 @@
           </a:p>
         </p:txBody>
       </p:sp>
-      <p:sp>
-        <p:nvSpPr>
-          <p:cNvPr id="6" name="TextBox 5"/>
-          <p:cNvSpPr txBox="1"/>
-          <p:nvPr/>
-        </p:nvSpPr>
-        <p:spPr>
-          <a:xfrm>
-            <a:off x="640080" y="1933956"/>
-            <a:ext cx="3291839" cy="1371600"/>
-          </a:xfrm>
-          <a:prstGeom prst="rect">
-            <a:avLst/>
-          </a:prstGeom>
-          <a:noFill/>
-        </p:spPr>
-        <p:txBody>
-          <a:bodyPr wrap="square" anchor="ctr"/>
-          <a:lstStyle/>
-          <a:p>
-            <a:pPr algn="l">
+      <p:pic>
+        <p:nvPicPr>
+          <p:cNvPr id="6" name="삽화:세층.svg" descr="illust_5420824522105916302_1791770880.png"/>
+          <p:cNvPicPr>
+            <a:picLocks noChangeAspect="1"/>
+          </p:cNvPicPr>
+          <p:nvPr/>
+        </p:nvPicPr>
+        <p:blipFill>
+          <a:blip r:embed="rId3"/>
+          <a:stretch>
+            <a:fillRect/>
+          </a:stretch>
+        </p:blipFill>
+        <p:spPr>
+          <a:xfrm>
+            <a:off x="641100" y="1627632"/>
+            <a:ext cx="10909495" cy="4727448"/>
+          </a:xfrm>
+          <a:prstGeom prst="rect">
+            <a:avLst/>
+          </a:prstGeom>
+        </p:spPr>
+      </p:pic>
+      <p:sp>
+        <p:nvSpPr>
+          <p:cNvPr id="7" name="TextBox 6"/>
+          <p:cNvSpPr txBox="1"/>
+          <p:nvPr/>
+        </p:nvSpPr>
+        <p:spPr>
+          <a:xfrm>
+            <a:off x="761104" y="1958553"/>
+            <a:ext cx="2072804" cy="678053"/>
+          </a:xfrm>
+          <a:prstGeom prst="rect">
+            <a:avLst/>
+          </a:prstGeom>
+          <a:noFill/>
+        </p:spPr>
+        <p:txBody>
+          <a:bodyPr wrap="square" anchor="t"/>
+          <a:lstStyle/>
+          <a:p>
+            <a:pPr algn="ctr">
               <a:lnSpc>
                 <a:spcPct val="110000"/>
               </a:lnSpc>
               <a:spcAft>
-                <a:spcPts val="200"/>
+                <a:spcPts val="100"/>
               </a:spcAft>
             </a:pPr>
             <a:r>
-              <a:rPr sz="1800" b="1">
+              <a:rPr sz="1350" b="1">
                 <a:solidFill>
                   <a:srgbClr val="13294B"/>
                 </a:solidFill>
@@ -50950,16 +51328,16 @@
             </a:r>
           </a:p>
           <a:p>
-            <a:pPr algn="l">
+            <a:pPr algn="ctr">
               <a:lnSpc>
                 <a:spcPct val="110000"/>
               </a:lnSpc>
               <a:spcAft>
-                <a:spcPts val="200"/>
+                <a:spcPts val="100"/>
               </a:spcAft>
             </a:pPr>
             <a:r>
-              <a:rPr sz="1150" b="0">
+              <a:rPr sz="1100" b="0">
                 <a:solidFill>
                   <a:srgbClr val="556175"/>
                 </a:solidFill>
@@ -50970,97 +51348,110 @@
               <a:t>지식의 구조</a:t>
             </a:r>
           </a:p>
-        </p:txBody>
-      </p:sp>
-      <p:sp>
-        <p:nvSpPr>
-          <p:cNvPr id="7" name="TextBox 6"/>
-          <p:cNvSpPr txBox="1"/>
-          <p:nvPr/>
-        </p:nvSpPr>
-        <p:spPr>
-          <a:xfrm>
-            <a:off x="4023359" y="1933956"/>
-            <a:ext cx="7528255" cy="1371600"/>
-          </a:xfrm>
-          <a:prstGeom prst="rect">
-            <a:avLst/>
-          </a:prstGeom>
-          <a:noFill/>
-        </p:spPr>
-        <p:txBody>
-          <a:bodyPr wrap="square" anchor="ctr"/>
-          <a:lstStyle/>
-          <a:p>
-            <a:pPr algn="l">
+          <a:p>
+            <a:pPr algn="ctr">
               <a:lnSpc>
                 <a:spcPct val="110000"/>
               </a:lnSpc>
               <a:spcAft>
-                <a:spcPts val="300"/>
+                <a:spcPts val="100"/>
               </a:spcAft>
             </a:pPr>
             <a:r>
-              <a:rPr sz="1400" b="0">
-                <a:solidFill>
-                  <a:srgbClr val="1F2A3A"/>
-                </a:solidFill>
-                <a:latin typeface="맑은 고딕"/>
-                <a:ea typeface="맑은 고딕"/>
-                <a:cs typeface="맑은 고딕"/>
-              </a:rPr>
-              <a:t>예: 원인은 고장 유형을 CAUSES로 가리킨다.</a:t>
-            </a:r>
-          </a:p>
-          <a:p>
-            <a:pPr algn="l">
+              <a:rPr sz="1100" b="0">
+                <a:solidFill>
+                  <a:srgbClr val="556175"/>
+                </a:solidFill>
+                <a:latin typeface="맑은 고딕"/>
+                <a:ea typeface="맑은 고딕"/>
+                <a:cs typeface="맑은 고딕"/>
+              </a:rPr>
+              <a:t>설계를 고칠 때만 바뀐다</a:t>
+            </a:r>
+          </a:p>
+        </p:txBody>
+      </p:sp>
+      <p:sp>
+        <p:nvSpPr>
+          <p:cNvPr id="8" name="TextBox 7"/>
+          <p:cNvSpPr txBox="1"/>
+          <p:nvPr/>
+        </p:nvSpPr>
+        <p:spPr>
+          <a:xfrm>
+            <a:off x="761104" y="3424062"/>
+            <a:ext cx="2072804" cy="678053"/>
+          </a:xfrm>
+          <a:prstGeom prst="rect">
+            <a:avLst/>
+          </a:prstGeom>
+          <a:noFill/>
+        </p:spPr>
+        <p:txBody>
+          <a:bodyPr wrap="square" anchor="t"/>
+          <a:lstStyle/>
+          <a:p>
+            <a:pPr algn="ctr">
               <a:lnSpc>
                 <a:spcPct val="110000"/>
               </a:lnSpc>
               <a:spcAft>
-                <a:spcPts val="300"/>
+                <a:spcPts val="100"/>
               </a:spcAft>
             </a:pPr>
             <a:r>
-              <a:rPr sz="1400" b="0">
-                <a:solidFill>
-                  <a:srgbClr val="1F2A3A"/>
-                </a:solidFill>
-                <a:latin typeface="맑은 고딕"/>
-                <a:ea typeface="맑은 고딕"/>
-                <a:cs typeface="맑은 고딕"/>
-              </a:rPr>
-              <a:t>설계를 고칠 때만 바뀐다.</a:t>
-            </a:r>
-          </a:p>
-        </p:txBody>
-      </p:sp>
-      <p:sp>
-        <p:nvSpPr>
-          <p:cNvPr id="8" name="Rectangle 7"/>
-          <p:cNvSpPr/>
-          <p:nvPr/>
-        </p:nvSpPr>
-        <p:spPr>
-          <a:xfrm>
-            <a:off x="548640" y="3296412"/>
-            <a:ext cx="11094415" cy="13716"/>
-          </a:xfrm>
-          <a:prstGeom prst="rect">
-            <a:avLst/>
-          </a:prstGeom>
-          <a:solidFill>
-            <a:srgbClr val="D3D9E1"/>
-          </a:solidFill>
-          <a:ln>
-            <a:noFill/>
-          </a:ln>
-        </p:spPr>
-        <p:txBody>
-          <a:bodyPr rtlCol="0" anchor="ctr"/>
-          <a:lstStyle/>
-          <a:p>
-            <a:pPr algn="ctr"/>
+              <a:rPr sz="1350" b="1">
+                <a:solidFill>
+                  <a:srgbClr val="13294B"/>
+                </a:solidFill>
+                <a:latin typeface="맑은 고딕"/>
+                <a:ea typeface="맑은 고딕"/>
+                <a:cs typeface="맑은 고딕"/>
+              </a:rPr>
+              <a:t>인스턴스 데이터</a:t>
+            </a:r>
+          </a:p>
+          <a:p>
+            <a:pPr algn="ctr">
+              <a:lnSpc>
+                <a:spcPct val="110000"/>
+              </a:lnSpc>
+              <a:spcAft>
+                <a:spcPts val="100"/>
+              </a:spcAft>
+            </a:pPr>
+            <a:r>
+              <a:rPr sz="1100" b="0">
+                <a:solidFill>
+                  <a:srgbClr val="556175"/>
+                </a:solidFill>
+                <a:latin typeface="맑은 고딕"/>
+                <a:ea typeface="맑은 고딕"/>
+                <a:cs typeface="맑은 고딕"/>
+              </a:rPr>
+              <a:t>지식</a:t>
+            </a:r>
+          </a:p>
+          <a:p>
+            <a:pPr algn="ctr">
+              <a:lnSpc>
+                <a:spcPct val="110000"/>
+              </a:lnSpc>
+              <a:spcAft>
+                <a:spcPts val="100"/>
+              </a:spcAft>
+            </a:pPr>
+            <a:r>
+              <a:rPr sz="1100" b="0">
+                <a:solidFill>
+                  <a:srgbClr val="556175"/>
+                </a:solidFill>
+                <a:latin typeface="맑은 고딕"/>
+                <a:ea typeface="맑은 고딕"/>
+                <a:cs typeface="맑은 고딕"/>
+              </a:rPr>
+              <a:t>근거 문서가 개정될 때 바뀐다</a:t>
+            </a:r>
           </a:p>
         </p:txBody>
       </p:sp>
@@ -51072,28 +51463,112 @@
         </p:nvSpPr>
         <p:spPr>
           <a:xfrm>
-            <a:off x="640080" y="3305556"/>
-            <a:ext cx="3291839" cy="1371600"/>
-          </a:xfrm>
-          <a:prstGeom prst="rect">
-            <a:avLst/>
-          </a:prstGeom>
-          <a:noFill/>
-        </p:spPr>
-        <p:txBody>
-          <a:bodyPr wrap="square" anchor="ctr"/>
-          <a:lstStyle/>
-          <a:p>
-            <a:pPr algn="l">
+            <a:off x="761104" y="5125943"/>
+            <a:ext cx="2072804" cy="848487"/>
+          </a:xfrm>
+          <a:prstGeom prst="rect">
+            <a:avLst/>
+          </a:prstGeom>
+          <a:noFill/>
+        </p:spPr>
+        <p:txBody>
+          <a:bodyPr wrap="square" anchor="t"/>
+          <a:lstStyle/>
+          <a:p>
+            <a:pPr algn="ctr">
               <a:lnSpc>
                 <a:spcPct val="110000"/>
               </a:lnSpc>
               <a:spcAft>
-                <a:spcPts val="200"/>
+                <a:spcPts val="100"/>
               </a:spcAft>
             </a:pPr>
             <a:r>
-              <a:rPr sz="1800" b="1">
+              <a:rPr sz="1350" b="1">
+                <a:solidFill>
+                  <a:srgbClr val="1A6FC4"/>
+                </a:solidFill>
+                <a:latin typeface="맑은 고딕"/>
+                <a:ea typeface="맑은 고딕"/>
+                <a:cs typeface="맑은 고딕"/>
+              </a:rPr>
+              <a:t>값</a:t>
+            </a:r>
+          </a:p>
+          <a:p>
+            <a:pPr algn="ctr">
+              <a:lnSpc>
+                <a:spcPct val="110000"/>
+              </a:lnSpc>
+              <a:spcAft>
+                <a:spcPts val="100"/>
+              </a:spcAft>
+            </a:pPr>
+            <a:r>
+              <a:rPr sz="1100" b="0">
+                <a:solidFill>
+                  <a:srgbClr val="556175"/>
+                </a:solidFill>
+                <a:latin typeface="맑은 고딕"/>
+                <a:ea typeface="맑은 고딕"/>
+                <a:cs typeface="맑은 고딕"/>
+              </a:rPr>
+              <a:t>실제 데이터</a:t>
+            </a:r>
+          </a:p>
+          <a:p>
+            <a:pPr algn="ctr">
+              <a:lnSpc>
+                <a:spcPct val="110000"/>
+              </a:lnSpc>
+              <a:spcAft>
+                <a:spcPts val="100"/>
+              </a:spcAft>
+            </a:pPr>
+            <a:r>
+              <a:rPr sz="1100" b="0">
+                <a:solidFill>
+                  <a:srgbClr val="556175"/>
+                </a:solidFill>
+                <a:latin typeface="맑은 고딕"/>
+                <a:ea typeface="맑은 고딕"/>
+                <a:cs typeface="맑은 고딕"/>
+              </a:rPr>
+              <a:t>매초, 또는 업무가 일어날 때마다 바뀐다</a:t>
+            </a:r>
+          </a:p>
+        </p:txBody>
+      </p:sp>
+      <p:sp>
+        <p:nvSpPr>
+          <p:cNvPr id="10" name="TextBox 9"/>
+          <p:cNvSpPr txBox="1"/>
+          <p:nvPr/>
+        </p:nvSpPr>
+        <p:spPr>
+          <a:xfrm>
+            <a:off x="3892129" y="2275292"/>
+            <a:ext cx="1309139" cy="507618"/>
+          </a:xfrm>
+          <a:prstGeom prst="rect">
+            <a:avLst/>
+          </a:prstGeom>
+          <a:noFill/>
+        </p:spPr>
+        <p:txBody>
+          <a:bodyPr wrap="square" anchor="t"/>
+          <a:lstStyle/>
+          <a:p>
+            <a:pPr algn="ctr">
+              <a:lnSpc>
+                <a:spcPct val="110000"/>
+              </a:lnSpc>
+              <a:spcAft>
+                <a:spcPts val="100"/>
+              </a:spcAft>
+            </a:pPr>
+            <a:r>
+              <a:rPr sz="1350" b="1">
                 <a:solidFill>
                   <a:srgbClr val="13294B"/>
                 </a:solidFill>
@@ -51101,20 +51576,20 @@
                 <a:ea typeface="맑은 고딕"/>
                 <a:cs typeface="맑은 고딕"/>
               </a:rPr>
-              <a:t>인스턴스 데이터</a:t>
-            </a:r>
-          </a:p>
-          <a:p>
-            <a:pPr algn="l">
+              <a:t>FailureMode</a:t>
+            </a:r>
+          </a:p>
+          <a:p>
+            <a:pPr algn="ctr">
               <a:lnSpc>
                 <a:spcPct val="110000"/>
               </a:lnSpc>
               <a:spcAft>
-                <a:spcPts val="200"/>
+                <a:spcPts val="100"/>
               </a:spcAft>
             </a:pPr>
             <a:r>
-              <a:rPr sz="1150" b="0">
+              <a:rPr sz="1100" b="0">
                 <a:solidFill>
                   <a:srgbClr val="556175"/>
                 </a:solidFill>
@@ -51122,131 +51597,134 @@
                 <a:ea typeface="맑은 고딕"/>
                 <a:cs typeface="맑은 고딕"/>
               </a:rPr>
-              <a:t>지식</a:t>
-            </a:r>
-          </a:p>
-        </p:txBody>
-      </p:sp>
-      <p:sp>
-        <p:nvSpPr>
-          <p:cNvPr id="10" name="TextBox 9"/>
-          <p:cNvSpPr txBox="1"/>
-          <p:nvPr/>
-        </p:nvSpPr>
-        <p:spPr>
-          <a:xfrm>
-            <a:off x="4023359" y="3305556"/>
-            <a:ext cx="7528255" cy="1371600"/>
-          </a:xfrm>
-          <a:prstGeom prst="rect">
-            <a:avLst/>
-          </a:prstGeom>
-          <a:noFill/>
-        </p:spPr>
-        <p:txBody>
-          <a:bodyPr wrap="square" anchor="ctr"/>
-          <a:lstStyle/>
-          <a:p>
-            <a:pPr algn="l">
+              <a:t>고장 유형</a:t>
+            </a:r>
+          </a:p>
+        </p:txBody>
+      </p:sp>
+      <p:sp>
+        <p:nvSpPr>
+          <p:cNvPr id="11" name="TextBox 10"/>
+          <p:cNvSpPr txBox="1"/>
+          <p:nvPr/>
+        </p:nvSpPr>
+        <p:spPr>
+          <a:xfrm>
+            <a:off x="6444951" y="2275292"/>
+            <a:ext cx="1309139" cy="507618"/>
+          </a:xfrm>
+          <a:prstGeom prst="rect">
+            <a:avLst/>
+          </a:prstGeom>
+          <a:noFill/>
+        </p:spPr>
+        <p:txBody>
+          <a:bodyPr wrap="square" anchor="t"/>
+          <a:lstStyle/>
+          <a:p>
+            <a:pPr algn="ctr">
               <a:lnSpc>
                 <a:spcPct val="110000"/>
               </a:lnSpc>
               <a:spcAft>
-                <a:spcPts val="300"/>
+                <a:spcPts val="100"/>
               </a:spcAft>
             </a:pPr>
             <a:r>
-              <a:rPr sz="1400" b="0">
-                <a:solidFill>
-                  <a:srgbClr val="1F2A3A"/>
-                </a:solidFill>
-                <a:latin typeface="맑은 고딕"/>
-                <a:ea typeface="맑은 고딕"/>
-                <a:cs typeface="맑은 고딕"/>
-              </a:rPr>
-              <a:t>예: 쿨러 핀 오염이 쿨러 냉각 성능 상실을 일으킨다.</a:t>
-            </a:r>
-          </a:p>
-          <a:p>
-            <a:pPr algn="l">
+              <a:rPr sz="1350" b="1">
+                <a:solidFill>
+                  <a:srgbClr val="13294B"/>
+                </a:solidFill>
+                <a:latin typeface="맑은 고딕"/>
+                <a:ea typeface="맑은 고딕"/>
+                <a:cs typeface="맑은 고딕"/>
+              </a:rPr>
+              <a:t>Cause</a:t>
+            </a:r>
+          </a:p>
+          <a:p>
+            <a:pPr algn="ctr">
               <a:lnSpc>
                 <a:spcPct val="110000"/>
               </a:lnSpc>
               <a:spcAft>
-                <a:spcPts val="300"/>
+                <a:spcPts val="100"/>
               </a:spcAft>
             </a:pPr>
             <a:r>
-              <a:rPr sz="1400" b="0">
-                <a:solidFill>
-                  <a:srgbClr val="1F2A3A"/>
-                </a:solidFill>
-                <a:latin typeface="맑은 고딕"/>
-                <a:ea typeface="맑은 고딕"/>
-                <a:cs typeface="맑은 고딕"/>
-              </a:rPr>
-              <a:t>근거 문서가 개정될 때 바뀐다.</a:t>
-            </a:r>
-          </a:p>
-        </p:txBody>
-      </p:sp>
-      <p:sp>
-        <p:nvSpPr>
-          <p:cNvPr id="11" name="Rectangle 10"/>
-          <p:cNvSpPr/>
-          <p:nvPr/>
-        </p:nvSpPr>
-        <p:spPr>
-          <a:xfrm>
-            <a:off x="548640" y="4668012"/>
-            <a:ext cx="11094415" cy="13716"/>
-          </a:xfrm>
-          <a:prstGeom prst="rect">
-            <a:avLst/>
-          </a:prstGeom>
-          <a:solidFill>
-            <a:srgbClr val="D3D9E1"/>
-          </a:solidFill>
-          <a:ln>
-            <a:noFill/>
-          </a:ln>
-        </p:spPr>
-        <p:txBody>
-          <a:bodyPr rtlCol="0" anchor="ctr"/>
-          <a:lstStyle/>
-          <a:p>
-            <a:pPr algn="ctr"/>
-          </a:p>
-        </p:txBody>
-      </p:sp>
-      <p:sp>
-        <p:nvSpPr>
-          <p:cNvPr id="12" name="Rounded Rectangle 11"/>
-          <p:cNvSpPr/>
-          <p:nvPr/>
-        </p:nvSpPr>
-        <p:spPr>
-          <a:xfrm>
-            <a:off x="548640" y="4704588"/>
-            <a:ext cx="11094415" cy="1316736"/>
-          </a:xfrm>
-          <a:prstGeom prst="roundRect">
-            <a:avLst>
-              <a:gd name="adj" fmla="val 6000"/>
-            </a:avLst>
-          </a:prstGeom>
-          <a:solidFill>
-            <a:srgbClr val="E7F3FD"/>
-          </a:solidFill>
-          <a:ln>
-            <a:noFill/>
-          </a:ln>
-        </p:spPr>
-        <p:txBody>
-          <a:bodyPr rtlCol="0" anchor="ctr"/>
-          <a:lstStyle/>
-          <a:p>
-            <a:pPr algn="ctr"/>
+              <a:rPr sz="1100" b="0">
+                <a:solidFill>
+                  <a:srgbClr val="556175"/>
+                </a:solidFill>
+                <a:latin typeface="맑은 고딕"/>
+                <a:ea typeface="맑은 고딕"/>
+                <a:cs typeface="맑은 고딕"/>
+              </a:rPr>
+              <a:t>원인</a:t>
+            </a:r>
+          </a:p>
+        </p:txBody>
+      </p:sp>
+      <p:sp>
+        <p:nvSpPr>
+          <p:cNvPr id="12" name="TextBox 11"/>
+          <p:cNvSpPr txBox="1"/>
+          <p:nvPr/>
+        </p:nvSpPr>
+        <p:spPr>
+          <a:xfrm>
+            <a:off x="8986863" y="2275292"/>
+            <a:ext cx="1309139" cy="507618"/>
+          </a:xfrm>
+          <a:prstGeom prst="rect">
+            <a:avLst/>
+          </a:prstGeom>
+          <a:noFill/>
+        </p:spPr>
+        <p:txBody>
+          <a:bodyPr wrap="square" anchor="t"/>
+          <a:lstStyle/>
+          <a:p>
+            <a:pPr algn="ctr">
+              <a:lnSpc>
+                <a:spcPct val="110000"/>
+              </a:lnSpc>
+              <a:spcAft>
+                <a:spcPts val="100"/>
+              </a:spcAft>
+            </a:pPr>
+            <a:r>
+              <a:rPr sz="1350" b="1">
+                <a:solidFill>
+                  <a:srgbClr val="13294B"/>
+                </a:solidFill>
+                <a:latin typeface="맑은 고딕"/>
+                <a:ea typeface="맑은 고딕"/>
+                <a:cs typeface="맑은 고딕"/>
+              </a:rPr>
+              <a:t>Evidence</a:t>
+            </a:r>
+          </a:p>
+          <a:p>
+            <a:pPr algn="ctr">
+              <a:lnSpc>
+                <a:spcPct val="110000"/>
+              </a:lnSpc>
+              <a:spcAft>
+                <a:spcPts val="100"/>
+              </a:spcAft>
+            </a:pPr>
+            <a:r>
+              <a:rPr sz="1100" b="0">
+                <a:solidFill>
+                  <a:srgbClr val="556175"/>
+                </a:solidFill>
+                <a:latin typeface="맑은 고딕"/>
+                <a:ea typeface="맑은 고딕"/>
+                <a:cs typeface="맑은 고딕"/>
+              </a:rPr>
+              <a:t>증거</a:t>
+            </a:r>
           </a:p>
         </p:txBody>
       </p:sp>
@@ -51258,28 +51736,28 @@
         </p:nvSpPr>
         <p:spPr>
           <a:xfrm>
-            <a:off x="640080" y="4677156"/>
-            <a:ext cx="3291839" cy="1371600"/>
-          </a:xfrm>
-          <a:prstGeom prst="rect">
-            <a:avLst/>
-          </a:prstGeom>
-          <a:noFill/>
-        </p:spPr>
-        <p:txBody>
-          <a:bodyPr wrap="square" anchor="ctr"/>
-          <a:lstStyle/>
-          <a:p>
-            <a:pPr algn="l">
+            <a:off x="5277635" y="1793092"/>
+            <a:ext cx="1090949" cy="337185"/>
+          </a:xfrm>
+          <a:prstGeom prst="rect">
+            <a:avLst/>
+          </a:prstGeom>
+          <a:noFill/>
+        </p:spPr>
+        <p:txBody>
+          <a:bodyPr wrap="square" anchor="t"/>
+          <a:lstStyle/>
+          <a:p>
+            <a:pPr algn="ctr">
               <a:lnSpc>
                 <a:spcPct val="110000"/>
               </a:lnSpc>
               <a:spcAft>
-                <a:spcPts val="200"/>
+                <a:spcPts val="100"/>
               </a:spcAft>
             </a:pPr>
             <a:r>
-              <a:rPr sz="1800" b="1">
+              <a:rPr sz="1350" b="1">
                 <a:solidFill>
                   <a:srgbClr val="13294B"/>
                 </a:solidFill>
@@ -51287,20 +51765,230 @@
                 <a:ea typeface="맑은 고딕"/>
                 <a:cs typeface="맑은 고딕"/>
               </a:rPr>
-              <a:t>값</a:t>
-            </a:r>
-          </a:p>
-          <a:p>
-            <a:pPr algn="l">
+              <a:t>CAUSES</a:t>
+            </a:r>
+          </a:p>
+        </p:txBody>
+      </p:sp>
+      <p:sp>
+        <p:nvSpPr>
+          <p:cNvPr id="14" name="TextBox 13"/>
+          <p:cNvSpPr txBox="1"/>
+          <p:nvPr/>
+        </p:nvSpPr>
+        <p:spPr>
+          <a:xfrm>
+            <a:off x="7601357" y="1793092"/>
+            <a:ext cx="1527329" cy="337185"/>
+          </a:xfrm>
+          <a:prstGeom prst="rect">
+            <a:avLst/>
+          </a:prstGeom>
+          <a:noFill/>
+        </p:spPr>
+        <p:txBody>
+          <a:bodyPr wrap="square" anchor="t"/>
+          <a:lstStyle/>
+          <a:p>
+            <a:pPr algn="ctr">
               <a:lnSpc>
                 <a:spcPct val="110000"/>
               </a:lnSpc>
               <a:spcAft>
-                <a:spcPts val="200"/>
+                <a:spcPts val="100"/>
               </a:spcAft>
             </a:pPr>
             <a:r>
-              <a:rPr sz="1150" b="0">
+              <a:rPr sz="1350" b="1">
+                <a:solidFill>
+                  <a:srgbClr val="13294B"/>
+                </a:solidFill>
+                <a:latin typeface="맑은 고딕"/>
+                <a:ea typeface="맑은 고딕"/>
+                <a:cs typeface="맑은 고딕"/>
+              </a:rPr>
+              <a:t>EVIDENCED_BY</a:t>
+            </a:r>
+          </a:p>
+        </p:txBody>
+      </p:sp>
+      <p:sp>
+        <p:nvSpPr>
+          <p:cNvPr id="15" name="TextBox 14"/>
+          <p:cNvSpPr txBox="1"/>
+          <p:nvPr/>
+        </p:nvSpPr>
+        <p:spPr>
+          <a:xfrm>
+            <a:off x="3455749" y="4180453"/>
+            <a:ext cx="2181899" cy="337185"/>
+          </a:xfrm>
+          <a:prstGeom prst="rect">
+            <a:avLst/>
+          </a:prstGeom>
+          <a:noFill/>
+        </p:spPr>
+        <p:txBody>
+          <a:bodyPr wrap="square" anchor="t"/>
+          <a:lstStyle/>
+          <a:p>
+            <a:pPr algn="ctr">
+              <a:lnSpc>
+                <a:spcPct val="110000"/>
+              </a:lnSpc>
+              <a:spcAft>
+                <a:spcPts val="100"/>
+              </a:spcAft>
+            </a:pPr>
+            <a:r>
+              <a:rPr sz="1350" b="1">
+                <a:solidFill>
+                  <a:srgbClr val="13294B"/>
+                </a:solidFill>
+                <a:latin typeface="맑은 고딕"/>
+                <a:ea typeface="맑은 고딕"/>
+                <a:cs typeface="맑은 고딕"/>
+              </a:rPr>
+              <a:t>쿨러 냉각 성능 상실</a:t>
+            </a:r>
+          </a:p>
+        </p:txBody>
+      </p:sp>
+      <p:sp>
+        <p:nvSpPr>
+          <p:cNvPr id="16" name="TextBox 15"/>
+          <p:cNvSpPr txBox="1"/>
+          <p:nvPr/>
+        </p:nvSpPr>
+        <p:spPr>
+          <a:xfrm>
+            <a:off x="6226761" y="4180453"/>
+            <a:ext cx="1745519" cy="337185"/>
+          </a:xfrm>
+          <a:prstGeom prst="rect">
+            <a:avLst/>
+          </a:prstGeom>
+          <a:noFill/>
+        </p:spPr>
+        <p:txBody>
+          <a:bodyPr wrap="square" anchor="t"/>
+          <a:lstStyle/>
+          <a:p>
+            <a:pPr algn="ctr">
+              <a:lnSpc>
+                <a:spcPct val="110000"/>
+              </a:lnSpc>
+              <a:spcAft>
+                <a:spcPts val="100"/>
+              </a:spcAft>
+            </a:pPr>
+            <a:r>
+              <a:rPr sz="1350" b="1">
+                <a:solidFill>
+                  <a:srgbClr val="13294B"/>
+                </a:solidFill>
+                <a:latin typeface="맑은 고딕"/>
+                <a:ea typeface="맑은 고딕"/>
+                <a:cs typeface="맑은 고딕"/>
+              </a:rPr>
+              <a:t>쿨러 핀 오염</a:t>
+            </a:r>
+          </a:p>
+        </p:txBody>
+      </p:sp>
+      <p:sp>
+        <p:nvSpPr>
+          <p:cNvPr id="17" name="TextBox 16"/>
+          <p:cNvSpPr txBox="1"/>
+          <p:nvPr/>
+        </p:nvSpPr>
+        <p:spPr>
+          <a:xfrm>
+            <a:off x="8605031" y="4180453"/>
+            <a:ext cx="2072804" cy="337185"/>
+          </a:xfrm>
+          <a:prstGeom prst="rect">
+            <a:avLst/>
+          </a:prstGeom>
+          <a:noFill/>
+        </p:spPr>
+        <p:txBody>
+          <a:bodyPr wrap="square" anchor="t"/>
+          <a:lstStyle/>
+          <a:p>
+            <a:pPr algn="ctr">
+              <a:lnSpc>
+                <a:spcPct val="110000"/>
+              </a:lnSpc>
+              <a:spcAft>
+                <a:spcPts val="100"/>
+              </a:spcAft>
+            </a:pPr>
+            <a:r>
+              <a:rPr sz="1350" b="1">
+                <a:solidFill>
+                  <a:srgbClr val="13294B"/>
+                </a:solidFill>
+                <a:latin typeface="맑은 고딕"/>
+                <a:ea typeface="맑은 고딕"/>
+                <a:cs typeface="맑은 고딕"/>
+              </a:rPr>
+              <a:t>냉각 효율 70 % 미만</a:t>
+            </a:r>
+          </a:p>
+        </p:txBody>
+      </p:sp>
+      <p:sp>
+        <p:nvSpPr>
+          <p:cNvPr id="18" name="TextBox 17"/>
+          <p:cNvSpPr txBox="1"/>
+          <p:nvPr/>
+        </p:nvSpPr>
+        <p:spPr>
+          <a:xfrm>
+            <a:off x="3564844" y="5740511"/>
+            <a:ext cx="1963709" cy="507618"/>
+          </a:xfrm>
+          <a:prstGeom prst="rect">
+            <a:avLst/>
+          </a:prstGeom>
+          <a:noFill/>
+        </p:spPr>
+        <p:txBody>
+          <a:bodyPr wrap="square" anchor="t"/>
+          <a:lstStyle/>
+          <a:p>
+            <a:pPr algn="ctr">
+              <a:lnSpc>
+                <a:spcPct val="110000"/>
+              </a:lnSpc>
+              <a:spcAft>
+                <a:spcPts val="100"/>
+              </a:spcAft>
+            </a:pPr>
+            <a:r>
+              <a:rPr sz="1350" b="1">
+                <a:solidFill>
+                  <a:srgbClr val="13294B"/>
+                </a:solidFill>
+                <a:latin typeface="맑은 고딕"/>
+                <a:ea typeface="맑은 고딕"/>
+                <a:cs typeface="맑은 고딕"/>
+              </a:rPr>
+              <a:t>납기까지 5.98시간</a:t>
+            </a:r>
+          </a:p>
+          <a:p>
+            <a:pPr algn="ctr">
+              <a:lnSpc>
+                <a:spcPct val="110000"/>
+              </a:lnSpc>
+              <a:spcAft>
+                <a:spcPts val="100"/>
+              </a:spcAft>
+            </a:pPr>
+            <a:r>
+              <a:rPr sz="1100" b="0">
                 <a:solidFill>
                   <a:srgbClr val="556175"/>
                 </a:solidFill>
@@ -51308,70 +51996,175 @@
                 <a:ea typeface="맑은 고딕"/>
                 <a:cs typeface="맑은 고딕"/>
               </a:rPr>
-              <a:t>실제 데이터</a:t>
-            </a:r>
-          </a:p>
-        </p:txBody>
-      </p:sp>
-      <p:sp>
-        <p:nvSpPr>
-          <p:cNvPr id="14" name="TextBox 13"/>
-          <p:cNvSpPr txBox="1"/>
-          <p:nvPr/>
-        </p:nvSpPr>
-        <p:spPr>
-          <a:xfrm>
-            <a:off x="4023359" y="4677156"/>
-            <a:ext cx="7528255" cy="1371600"/>
-          </a:xfrm>
-          <a:prstGeom prst="rect">
-            <a:avLst/>
-          </a:prstGeom>
-          <a:noFill/>
-        </p:spPr>
-        <p:txBody>
-          <a:bodyPr wrap="square" anchor="ctr"/>
-          <a:lstStyle/>
-          <a:p>
-            <a:pPr algn="l">
+              <a:t>MES</a:t>
+            </a:r>
+          </a:p>
+        </p:txBody>
+      </p:sp>
+      <p:sp>
+        <p:nvSpPr>
+          <p:cNvPr id="19" name="TextBox 18"/>
+          <p:cNvSpPr txBox="1"/>
+          <p:nvPr/>
+        </p:nvSpPr>
+        <p:spPr>
+          <a:xfrm>
+            <a:off x="6117666" y="5740511"/>
+            <a:ext cx="1963709" cy="507618"/>
+          </a:xfrm>
+          <a:prstGeom prst="rect">
+            <a:avLst/>
+          </a:prstGeom>
+          <a:noFill/>
+        </p:spPr>
+        <p:txBody>
+          <a:bodyPr wrap="square" anchor="t"/>
+          <a:lstStyle/>
+          <a:p>
+            <a:pPr algn="ctr">
               <a:lnSpc>
                 <a:spcPct val="110000"/>
               </a:lnSpc>
               <a:spcAft>
-                <a:spcPts val="300"/>
+                <a:spcPts val="100"/>
               </a:spcAft>
             </a:pPr>
             <a:r>
-              <a:rPr sz="1400" b="0">
-                <a:solidFill>
-                  <a:srgbClr val="1F2A3A"/>
-                </a:solidFill>
-                <a:latin typeface="맑은 고딕"/>
-                <a:ea typeface="맑은 고딕"/>
-                <a:cs typeface="맑은 고딕"/>
-              </a:rPr>
-              <a:t>예: 경보가 난 순간의 냉각 효율 46.2 %</a:t>
-            </a:r>
-          </a:p>
-          <a:p>
-            <a:pPr algn="l">
+              <a:rPr sz="1350" b="1">
+                <a:solidFill>
+                  <a:srgbClr val="13294B"/>
+                </a:solidFill>
+                <a:latin typeface="맑은 고딕"/>
+                <a:ea typeface="맑은 고딕"/>
+                <a:cs typeface="맑은 고딕"/>
+              </a:rPr>
+              <a:t>운전 모드 원격 자동</a:t>
+            </a:r>
+          </a:p>
+          <a:p>
+            <a:pPr algn="ctr">
               <a:lnSpc>
                 <a:spcPct val="110000"/>
               </a:lnSpc>
               <a:spcAft>
-                <a:spcPts val="300"/>
+                <a:spcPts val="100"/>
               </a:spcAft>
             </a:pPr>
             <a:r>
-              <a:rPr sz="1400" b="0">
-                <a:solidFill>
-                  <a:srgbClr val="1F2A3A"/>
-                </a:solidFill>
-                <a:latin typeface="맑은 고딕"/>
-                <a:ea typeface="맑은 고딕"/>
-                <a:cs typeface="맑은 고딕"/>
-              </a:rPr>
-              <a:t>매초, 또는 업무가 일어날 때마다 바뀐다.</a:t>
+              <a:rPr sz="1100" b="0">
+                <a:solidFill>
+                  <a:srgbClr val="556175"/>
+                </a:solidFill>
+                <a:latin typeface="맑은 고딕"/>
+                <a:ea typeface="맑은 고딕"/>
+                <a:cs typeface="맑은 고딕"/>
+              </a:rPr>
+              <a:t>PLC</a:t>
+            </a:r>
+          </a:p>
+        </p:txBody>
+      </p:sp>
+      <p:sp>
+        <p:nvSpPr>
+          <p:cNvPr id="20" name="TextBox 19"/>
+          <p:cNvSpPr txBox="1"/>
+          <p:nvPr/>
+        </p:nvSpPr>
+        <p:spPr>
+          <a:xfrm>
+            <a:off x="8659578" y="5740511"/>
+            <a:ext cx="1963709" cy="507618"/>
+          </a:xfrm>
+          <a:prstGeom prst="rect">
+            <a:avLst/>
+          </a:prstGeom>
+          <a:noFill/>
+        </p:spPr>
+        <p:txBody>
+          <a:bodyPr wrap="square" anchor="t"/>
+          <a:lstStyle/>
+          <a:p>
+            <a:pPr algn="ctr">
+              <a:lnSpc>
+                <a:spcPct val="110000"/>
+              </a:lnSpc>
+              <a:spcAft>
+                <a:spcPts val="100"/>
+              </a:spcAft>
+            </a:pPr>
+            <a:r>
+              <a:rPr sz="1350" b="1">
+                <a:solidFill>
+                  <a:srgbClr val="13294B"/>
+                </a:solidFill>
+                <a:latin typeface="맑은 고딕"/>
+                <a:ea typeface="맑은 고딕"/>
+                <a:cs typeface="맑은 고딕"/>
+              </a:rPr>
+              <a:t>냉각 효율 46.2 %</a:t>
+            </a:r>
+          </a:p>
+          <a:p>
+            <a:pPr algn="ctr">
+              <a:lnSpc>
+                <a:spcPct val="110000"/>
+              </a:lnSpc>
+              <a:spcAft>
+                <a:spcPts val="100"/>
+              </a:spcAft>
+            </a:pPr>
+            <a:r>
+              <a:rPr sz="1100" b="0">
+                <a:solidFill>
+                  <a:srgbClr val="556175"/>
+                </a:solidFill>
+                <a:latin typeface="맑은 고딕"/>
+                <a:ea typeface="맑은 고딕"/>
+                <a:cs typeface="맑은 고딕"/>
+              </a:rPr>
+              <a:t>시계열 DB</a:t>
+            </a:r>
+          </a:p>
+        </p:txBody>
+      </p:sp>
+      <p:sp>
+        <p:nvSpPr>
+          <p:cNvPr id="21" name="TextBox 20"/>
+          <p:cNvSpPr txBox="1"/>
+          <p:nvPr/>
+        </p:nvSpPr>
+        <p:spPr>
+          <a:xfrm>
+            <a:off x="6750417" y="4605924"/>
+            <a:ext cx="2400088" cy="337185"/>
+          </a:xfrm>
+          <a:prstGeom prst="rect">
+            <a:avLst/>
+          </a:prstGeom>
+          <a:noFill/>
+        </p:spPr>
+        <p:txBody>
+          <a:bodyPr wrap="square" anchor="t"/>
+          <a:lstStyle/>
+          <a:p>
+            <a:pPr algn="ctr">
+              <a:lnSpc>
+                <a:spcPct val="110000"/>
+              </a:lnSpc>
+              <a:spcAft>
+                <a:spcPts val="100"/>
+              </a:spcAft>
+            </a:pPr>
+            <a:r>
+              <a:rPr sz="1350" b="1">
+                <a:solidFill>
+                  <a:srgbClr val="13294B"/>
+                </a:solidFill>
+                <a:latin typeface="맑은 고딕"/>
+                <a:ea typeface="맑은 고딕"/>
+                <a:cs typeface="맑은 고딕"/>
+              </a:rPr>
+              <a:t>판단하는 순간에 읽는다</a:t>
             </a:r>
           </a:p>
         </p:txBody>
@@ -59653,7 +60446,7 @@
                 <a:ea typeface="맑은 고딕"/>
                 <a:cs typeface="맑은 고딕"/>
               </a:rPr>
-              <a:t>쿨러 과열 한 건에서 「팬 최대 운전과 부하 80 %」는 예측 유온이 44.6 ℃로 가장 낮았으나 3순위였다.</a:t>
+              <a:t>쿨러 사건에서 「팬 최대 운전과 부하 80 %」는 예측 유온이 44.6 ℃로 가장 낮았으나 1순위가 아니었다.</a:t>
             </a:r>
           </a:p>
         </p:txBody>

--- a/docs/교재/실전반/03일차/실전반_03일차.pptx
+++ b/docs/교재/실전반/03일차/실전반_03일차.pptx
@@ -646,7 +646,7 @@
           <a:lstStyle/>
           <a:p>
             <a:r>
-              <a:t>그 저울질의 실제 결과입니다. 네 후보에 점수가 매겨졌고 팬 최대 운전이 가장 높았습니다. 부하를 낮추는 두 조치는 유온을 더 내리는데도 점수가 낮습니다. 이 둘은 점수가 +2.75로 같아서, 표의 둘째 줄과 셋째 줄 사이의 순서에는 뜻을 두지 않습니다.</a:t>
+              <a:t>그 저울질의 실제 결과입니다. 네 후보에 점수가 매겨졌고 팬 최대 운전이 가장 높았습니다. 부하를 낮추는 두 조치는 유온을 더 내리는데도 점수가 낮습니다. 이 둘은 점수가 +2.75로 같아서 순위도 공동 2순위로 같습니다.</a:t>
             </a:r>
           </a:p>
         </p:txBody>
@@ -8618,7 +8618,7 @@
       </p:sp>
       <p:pic>
         <p:nvPicPr>
-          <p:cNvPr id="6" name="삽화:인터록여유_1.svg" descr="illust_4761761449605343997_1791769661.png"/>
+          <p:cNvPr id="6" name="삽화:인터록여유_1.svg" descr="illust_9140362760948618873_1791769661.png"/>
           <p:cNvPicPr>
             <a:picLocks noChangeAspect="1"/>
           </p:cNvPicPr>
@@ -9213,7 +9213,7 @@
       </p:sp>
       <p:pic>
         <p:nvPicPr>
-          <p:cNvPr id="6" name="삽화:성과경로_2.svg" descr="illust_5150522425874776888_1791769661.png"/>
+          <p:cNvPr id="6" name="삽화:성과경로_2.svg" descr="illust_4871382575321470042_1791769661.png"/>
           <p:cNvPicPr>
             <a:picLocks noChangeAspect="1"/>
           </p:cNvPicPr>
@@ -9724,7 +9724,7 @@
       </p:sp>
       <p:pic>
         <p:nvPicPr>
-          <p:cNvPr id="6" name="삽화:성과경로_5.svg" descr="illust_8091845198819376105_1791769661.png"/>
+          <p:cNvPr id="6" name="삽화:성과경로_5.svg" descr="illust_7569108956490253656_1791769661.png"/>
           <p:cNvPicPr>
             <a:picLocks noChangeAspect="1"/>
           </p:cNvPicPr>
@@ -10783,7 +10783,7 @@
                 <a:ea typeface="맑은 고딕"/>
                 <a:cs typeface="맑은 고딕"/>
               </a:rPr>
-              <a:t>2  부하 70 %와 야간 핀 세척</a:t>
+              <a:t>공동 2  부하 70 %와 야간 핀 세척</a:t>
             </a:r>
           </a:p>
         </p:txBody>
@@ -10931,7 +10931,7 @@
                 <a:ea typeface="맑은 고딕"/>
                 <a:cs typeface="맑은 고딕"/>
               </a:rPr>
-              <a:t>3  팬 최대 운전과 부하 80 %</a:t>
+              <a:t>공동 2  팬 최대 운전과 부하 80 %</a:t>
             </a:r>
           </a:p>
         </p:txBody>
@@ -12848,7 +12848,7 @@
       </p:sp>
       <p:pic>
         <p:nvPicPr>
-          <p:cNvPr id="6" name="삽화:가정분석_2.svg" descr="illust_2840670803297004563_1791769661.png"/>
+          <p:cNvPr id="6" name="삽화:가정분석_2.svg" descr="illust_9071405039677977576_1791769661.png"/>
           <p:cNvPicPr>
             <a:picLocks noChangeAspect="1"/>
           </p:cNvPicPr>
@@ -13338,7 +13338,7 @@
       </p:sp>
       <p:pic>
         <p:nvPicPr>
-          <p:cNvPr id="6" name="삽화:가정분석_5.svg" descr="illust_1981780010052619609_1791769661.png"/>
+          <p:cNvPr id="6" name="삽화:가정분석_5.svg" descr="illust_4578998771515963080_1791769661.png"/>
           <p:cNvPicPr>
             <a:picLocks noChangeAspect="1"/>
           </p:cNvPicPr>
@@ -20735,7 +20735,7 @@
       </p:sp>
       <p:pic>
         <p:nvPicPr>
-          <p:cNvPr id="6" name="삽화:인제스천_전체.svg" descr="illust_2426465941144567842_1791770333.png"/>
+          <p:cNvPr id="6" name="삽화:인제스천_전체.svg" descr="illust_4636526059766036070_1791770333.png"/>
           <p:cNvPicPr>
             <a:picLocks noChangeAspect="1"/>
           </p:cNvPicPr>
@@ -27759,7 +27759,7 @@
       </p:sp>
       <p:pic>
         <p:nvPicPr>
-          <p:cNvPr id="6" name="삽화:한문장.svg" descr="illust_3131223168920983005_1791770333.png"/>
+          <p:cNvPr id="6" name="삽화:한문장.svg" descr="illust_5732886865193947505_1791770333.png"/>
           <p:cNvPicPr>
             <a:picLocks noChangeAspect="1"/>
           </p:cNvPicPr>
@@ -29267,7 +29267,7 @@
       </p:sp>
       <p:pic>
         <p:nvPicPr>
-          <p:cNvPr id="6" name="삽화:인용.svg" descr="illust_7194022710018681946_1791770333.png"/>
+          <p:cNvPr id="6" name="삽화:인용.svg" descr="illust_3569241041469724454_1791770333.png"/>
           <p:cNvPicPr>
             <a:picLocks noChangeAspect="1"/>
           </p:cNvPicPr>
@@ -30868,7 +30868,7 @@
       </p:sp>
       <p:pic>
         <p:nvPicPr>
-          <p:cNvPr id="6" name="삽화:인제스천_6.svg" descr="illust_8994685440392938235_1791770333.png"/>
+          <p:cNvPr id="6" name="삽화:인제스천_6.svg" descr="illust_6054463080501845588_1791770333.png"/>
           <p:cNvPicPr>
             <a:picLocks noChangeAspect="1"/>
           </p:cNvPicPr>
@@ -31422,7 +31422,7 @@
       </p:sp>
       <p:pic>
         <p:nvPicPr>
-          <p:cNvPr id="6" name="삽화:적재묶음_사슬.svg" descr="illust_3483673401988418668_1791770333.png"/>
+          <p:cNvPr id="6" name="삽화:적재묶음_사슬.svg" descr="illust_8601892024668872821_1791770333.png"/>
           <p:cNvPicPr>
             <a:picLocks noChangeAspect="1"/>
           </p:cNvPicPr>
@@ -34442,7 +34442,7 @@
       </p:sp>
       <p:pic>
         <p:nvPicPr>
-          <p:cNvPr id="6" name="삽화:입력데이터_자리.svg" descr="illust_4687401238430181515_1791770333.png"/>
+          <p:cNvPr id="6" name="삽화:입력데이터_자리.svg" descr="illust_8043047128175647433_1791770333.png"/>
           <p:cNvPicPr>
             <a:picLocks noChangeAspect="1"/>
           </p:cNvPicPr>
@@ -40521,7 +40521,7 @@
       </p:sp>
       <p:pic>
         <p:nvPicPr>
-          <p:cNvPr id="6" name="삽화:네일차_흐름.svg" descr="illust_3180783256676859588_1791770333.png"/>
+          <p:cNvPr id="6" name="삽화:네일차_흐름.svg" descr="illust_529358919560449062_1791770333.png"/>
           <p:cNvPicPr>
             <a:picLocks noChangeAspect="1"/>
           </p:cNvPicPr>
@@ -41200,7 +41200,7 @@
       </p:sp>
       <p:pic>
         <p:nvPicPr>
-          <p:cNvPr id="6" name="삽화:관계.svg" descr="illust_8363113913182383374_1791715399.png"/>
+          <p:cNvPr id="6" name="삽화:관계.svg" descr="illust_7811397904476336855_1791715399.png"/>
           <p:cNvPicPr>
             <a:picLocks noChangeAspect="1"/>
           </p:cNvPicPr>
@@ -42447,7 +42447,7 @@
       </p:sp>
       <p:pic>
         <p:nvPicPr>
-          <p:cNvPr id="6" name="삽화:두층_3.svg" descr="illust_4351859361709594569_1791770880.png"/>
+          <p:cNvPr id="6" name="삽화:두층_3.svg" descr="illust_7400492555762215549_1791770880.png"/>
           <p:cNvPicPr>
             <a:picLocks noChangeAspect="1"/>
           </p:cNvPicPr>
@@ -44376,7 +44376,7 @@
       </p:sp>
       <p:pic>
         <p:nvPicPr>
-          <p:cNvPr id="6" name="삽화:성과경로_5.svg" descr="illust_8091845198819376105_1791769661.png"/>
+          <p:cNvPr id="6" name="삽화:성과경로_5.svg" descr="illust_7569108956490253656_1791769661.png"/>
           <p:cNvPicPr>
             <a:picLocks noChangeAspect="1"/>
           </p:cNvPicPr>
@@ -47419,7 +47419,7 @@
       </p:sp>
       <p:pic>
         <p:nvPicPr>
-          <p:cNvPr id="6" name="삽화:경로_3.svg" descr="illust_7925023059958122311_1791715399.png"/>
+          <p:cNvPr id="6" name="삽화:경로_3.svg" descr="illust_6196536976357924818_1791715399.png"/>
           <p:cNvPicPr>
             <a:picLocks noChangeAspect="1"/>
           </p:cNvPicPr>
@@ -49230,7 +49230,7 @@
       </p:sp>
       <p:pic>
         <p:nvPicPr>
-          <p:cNvPr id="6" name="삽화:원인후보.svg" descr="illust_3349541693998188975_1791770880.png"/>
+          <p:cNvPr id="6" name="삽화:원인후보.svg" descr="illust_1993795717545089743_1791770880.png"/>
           <p:cNvPicPr>
             <a:picLocks noChangeAspect="1"/>
           </p:cNvPicPr>
@@ -51265,7 +51265,7 @@
       </p:sp>
       <p:pic>
         <p:nvPicPr>
-          <p:cNvPr id="6" name="삽화:세층.svg" descr="illust_5420824522105916302_1791770880.png"/>
+          <p:cNvPr id="6" name="삽화:세층.svg" descr="illust_6427483588211245178_1791770880.png"/>
           <p:cNvPicPr>
             <a:picLocks noChangeAspect="1"/>
           </p:cNvPicPr>
@@ -60342,7 +60342,7 @@
                 <a:ea typeface="맑은 고딕"/>
                 <a:cs typeface="맑은 고딕"/>
               </a:rPr>
-              <a:t>배운 내용을 바탕으로 정답을 맞춰보세요.</a:t>
+              <a:t>배운 내용을 바탕으로 정답을 맞혀 보세요.</a:t>
             </a:r>
           </a:p>
         </p:txBody>

--- a/docs/교재/실전반/03일차/실전반_03일차.pptx
+++ b/docs/교재/실전반/03일차/실전반_03일차.pptx
@@ -8618,7 +8618,7 @@
       </p:sp>
       <p:pic>
         <p:nvPicPr>
-          <p:cNvPr id="6" name="삽화:인터록여유_1.svg" descr="illust_9140362760948618873_1791769661.png"/>
+          <p:cNvPr id="6" name="삽화:인터록여유_1.svg" descr="illust_8507709441046142423_1791769661.png"/>
           <p:cNvPicPr>
             <a:picLocks noChangeAspect="1"/>
           </p:cNvPicPr>
@@ -9213,7 +9213,7 @@
       </p:sp>
       <p:pic>
         <p:nvPicPr>
-          <p:cNvPr id="6" name="삽화:성과경로_2.svg" descr="illust_4871382575321470042_1791769661.png"/>
+          <p:cNvPr id="6" name="삽화:성과경로_2.svg" descr="illust_2913283201321713373_1791769661.png"/>
           <p:cNvPicPr>
             <a:picLocks noChangeAspect="1"/>
           </p:cNvPicPr>
@@ -9724,7 +9724,7 @@
       </p:sp>
       <p:pic>
         <p:nvPicPr>
-          <p:cNvPr id="6" name="삽화:성과경로_5.svg" descr="illust_7569108956490253656_1791769661.png"/>
+          <p:cNvPr id="6" name="삽화:성과경로_5.svg" descr="illust_5290878554599270576_1791769661.png"/>
           <p:cNvPicPr>
             <a:picLocks noChangeAspect="1"/>
           </p:cNvPicPr>
@@ -12848,7 +12848,7 @@
       </p:sp>
       <p:pic>
         <p:nvPicPr>
-          <p:cNvPr id="6" name="삽화:가정분석_2.svg" descr="illust_9071405039677977576_1791769661.png"/>
+          <p:cNvPr id="6" name="삽화:가정분석_2.svg" descr="illust_1872347850263892038_1791769661.png"/>
           <p:cNvPicPr>
             <a:picLocks noChangeAspect="1"/>
           </p:cNvPicPr>
@@ -13338,7 +13338,7 @@
       </p:sp>
       <p:pic>
         <p:nvPicPr>
-          <p:cNvPr id="6" name="삽화:가정분석_5.svg" descr="illust_4578998771515963080_1791769661.png"/>
+          <p:cNvPr id="6" name="삽화:가정분석_5.svg" descr="illust_7554753954985713393_1791769661.png"/>
           <p:cNvPicPr>
             <a:picLocks noChangeAspect="1"/>
           </p:cNvPicPr>
@@ -16220,7 +16220,7 @@
                 <a:ea typeface="맑은 고딕"/>
                 <a:cs typeface="맑은 고딕"/>
               </a:rPr>
-              <a:t>결정표를 읽어 조치를 가르고 남은 후보를 비교하는 기능을 Claude Code로 만든다</a:t>
+              <a:t>결정표를 읽어 조치를 가르고 남은 후보를 비교하는 기능을 바이브 코딩으로 만든다</a:t>
             </a:r>
           </a:p>
         </p:txBody>
@@ -20735,7 +20735,7 @@
       </p:sp>
       <p:pic>
         <p:nvPicPr>
-          <p:cNvPr id="6" name="삽화:인제스천_전체.svg" descr="illust_4636526059766036070_1791770333.png"/>
+          <p:cNvPr id="6" name="삽화:인제스천_전체.svg" descr="illust_3068552927606686532_1791770333.png"/>
           <p:cNvPicPr>
             <a:picLocks noChangeAspect="1"/>
           </p:cNvPicPr>
@@ -27759,7 +27759,7 @@
       </p:sp>
       <p:pic>
         <p:nvPicPr>
-          <p:cNvPr id="6" name="삽화:한문장.svg" descr="illust_5732886865193947505_1791770333.png"/>
+          <p:cNvPr id="6" name="삽화:한문장.svg" descr="illust_8507764297434476851_1791770333.png"/>
           <p:cNvPicPr>
             <a:picLocks noChangeAspect="1"/>
           </p:cNvPicPr>
@@ -29267,7 +29267,7 @@
       </p:sp>
       <p:pic>
         <p:nvPicPr>
-          <p:cNvPr id="6" name="삽화:인용.svg" descr="illust_3569241041469724454_1791770333.png"/>
+          <p:cNvPr id="6" name="삽화:인용.svg" descr="illust_7292907426804533229_1791770333.png"/>
           <p:cNvPicPr>
             <a:picLocks noChangeAspect="1"/>
           </p:cNvPicPr>
@@ -30868,7 +30868,7 @@
       </p:sp>
       <p:pic>
         <p:nvPicPr>
-          <p:cNvPr id="6" name="삽화:인제스천_6.svg" descr="illust_6054463080501845588_1791770333.png"/>
+          <p:cNvPr id="6" name="삽화:인제스천_6.svg" descr="illust_4347644211597323371_1791770333.png"/>
           <p:cNvPicPr>
             <a:picLocks noChangeAspect="1"/>
           </p:cNvPicPr>
@@ -31422,7 +31422,7 @@
       </p:sp>
       <p:pic>
         <p:nvPicPr>
-          <p:cNvPr id="6" name="삽화:적재묶음_사슬.svg" descr="illust_8601892024668872821_1791770333.png"/>
+          <p:cNvPr id="6" name="삽화:적재묶음_사슬.svg" descr="illust_2142718894692588577_1791770333.png"/>
           <p:cNvPicPr>
             <a:picLocks noChangeAspect="1"/>
           </p:cNvPicPr>
@@ -34442,7 +34442,7 @@
       </p:sp>
       <p:pic>
         <p:nvPicPr>
-          <p:cNvPr id="6" name="삽화:입력데이터_자리.svg" descr="illust_8043047128175647433_1791770333.png"/>
+          <p:cNvPr id="6" name="삽화:입력데이터_자리.svg" descr="illust_4785749671649903377_1791770333.png"/>
           <p:cNvPicPr>
             <a:picLocks noChangeAspect="1"/>
           </p:cNvPicPr>
@@ -36880,7 +36880,7 @@
                 <a:ea typeface="맑은 고딕"/>
                 <a:cs typeface="맑은 고딕"/>
               </a:rPr>
-              <a:t>실습: Claude Code로 문서에서 지식 추출하기</a:t>
+              <a:t>실습: 바이브 코딩으로 문서에서 지식 추출하기</a:t>
             </a:r>
           </a:p>
         </p:txBody>
@@ -37174,8 +37174,8 @@
         </p:nvSpPr>
         <p:spPr>
           <a:xfrm>
-            <a:off x="548640" y="2186178"/>
-            <a:ext cx="3515258" cy="3610356"/>
+            <a:off x="548640" y="2294635"/>
+            <a:ext cx="3515258" cy="3393440"/>
           </a:xfrm>
           <a:prstGeom prst="roundRect">
             <a:avLst>
@@ -37207,7 +37207,7 @@
         </p:nvSpPr>
         <p:spPr>
           <a:xfrm>
-            <a:off x="777240" y="2387346"/>
+            <a:off x="777240" y="2495804"/>
             <a:ext cx="731520" cy="731520"/>
           </a:xfrm>
           <a:prstGeom prst="ellipse">
@@ -37244,7 +37244,7 @@
         </p:blipFill>
         <p:spPr>
           <a:xfrm>
-            <a:off x="930859" y="2540965"/>
+            <a:off x="930859" y="2649423"/>
             <a:ext cx="424281" cy="424281"/>
           </a:xfrm>
           <a:prstGeom prst="rect">
@@ -37260,8 +37260,8 @@
         </p:nvSpPr>
         <p:spPr>
           <a:xfrm>
-            <a:off x="713232" y="3210306"/>
-            <a:ext cx="3186074" cy="2083308"/>
+            <a:off x="713232" y="3318764"/>
+            <a:ext cx="3186074" cy="1866392"/>
           </a:xfrm>
           <a:prstGeom prst="rect">
             <a:avLst/>
@@ -37344,7 +37344,7 @@
         </p:nvSpPr>
         <p:spPr>
           <a:xfrm>
-            <a:off x="777240" y="5366766"/>
+            <a:off x="777240" y="5258308"/>
             <a:ext cx="1021080" cy="292608"/>
           </a:xfrm>
           <a:prstGeom prst="roundRect">
@@ -37375,7 +37375,7 @@
         </p:nvSpPr>
         <p:spPr>
           <a:xfrm>
-            <a:off x="777240" y="5366766"/>
+            <a:off x="777240" y="5258308"/>
             <a:ext cx="1021080" cy="292608"/>
           </a:xfrm>
           <a:prstGeom prst="rect">
@@ -37414,8 +37414,8 @@
         </p:nvSpPr>
         <p:spPr>
           <a:xfrm>
-            <a:off x="4338218" y="2186178"/>
-            <a:ext cx="3515258" cy="3610356"/>
+            <a:off x="4338218" y="2294635"/>
+            <a:ext cx="3515258" cy="3393440"/>
           </a:xfrm>
           <a:prstGeom prst="roundRect">
             <a:avLst>
@@ -37447,7 +37447,7 @@
         </p:nvSpPr>
         <p:spPr>
           <a:xfrm>
-            <a:off x="4566818" y="2387346"/>
+            <a:off x="4566818" y="2495804"/>
             <a:ext cx="731520" cy="731520"/>
           </a:xfrm>
           <a:prstGeom prst="ellipse">
@@ -37470,7 +37470,7 @@
       </p:sp>
       <p:pic>
         <p:nvPicPr>
-          <p:cNvPr id="14" name="아이콘:terminal-2" descr="terminal-2_13294B_1.6.png"/>
+          <p:cNvPr id="14" name="아이콘:message-chatbot" descr="message-chatbot_13294B_1.6.png"/>
           <p:cNvPicPr>
             <a:picLocks noChangeAspect="1"/>
           </p:cNvPicPr>
@@ -37484,7 +37484,7 @@
         </p:blipFill>
         <p:spPr>
           <a:xfrm>
-            <a:off x="4720437" y="2540965"/>
+            <a:off x="4720437" y="2649423"/>
             <a:ext cx="424281" cy="424281"/>
           </a:xfrm>
           <a:prstGeom prst="rect">
@@ -37500,8 +37500,8 @@
         </p:nvSpPr>
         <p:spPr>
           <a:xfrm>
-            <a:off x="4502810" y="3210306"/>
-            <a:ext cx="3186074" cy="2083308"/>
+            <a:off x="4502810" y="3318764"/>
+            <a:ext cx="3186074" cy="1866392"/>
           </a:xfrm>
           <a:prstGeom prst="rect">
             <a:avLst/>
@@ -37550,7 +37550,7 @@
                 <a:ea typeface="맑은 고딕"/>
                 <a:cs typeface="맑은 고딕"/>
               </a:rPr>
-              <a:t>• 원인, 조치, 수행 조건을 스키마의 클래스에 맞춰 뽑도록 Claude Code에 지시한다</a:t>
+              <a:t>• AI에게 원인, 조치, 수행 조건을 스키마의 클래스에 맞춰 뽑게 한다</a:t>
             </a:r>
           </a:p>
           <a:p>
@@ -37584,7 +37584,7 @@
         </p:nvSpPr>
         <p:spPr>
           <a:xfrm>
-            <a:off x="4566818" y="5366766"/>
+            <a:off x="4566818" y="5258308"/>
             <a:ext cx="1173480" cy="292608"/>
           </a:xfrm>
           <a:prstGeom prst="roundRect">
@@ -37615,7 +37615,7 @@
         </p:nvSpPr>
         <p:spPr>
           <a:xfrm>
-            <a:off x="4566818" y="5366766"/>
+            <a:off x="4566818" y="5258308"/>
             <a:ext cx="1173480" cy="292608"/>
           </a:xfrm>
           <a:prstGeom prst="rect">
@@ -37654,8 +37654,8 @@
         </p:nvSpPr>
         <p:spPr>
           <a:xfrm>
-            <a:off x="8127796" y="2186178"/>
-            <a:ext cx="3515258" cy="3610356"/>
+            <a:off x="8127796" y="2294635"/>
+            <a:ext cx="3515258" cy="3393440"/>
           </a:xfrm>
           <a:prstGeom prst="roundRect">
             <a:avLst>
@@ -37687,7 +37687,7 @@
         </p:nvSpPr>
         <p:spPr>
           <a:xfrm>
-            <a:off x="8356396" y="2387346"/>
+            <a:off x="8356396" y="2495804"/>
             <a:ext cx="731520" cy="731520"/>
           </a:xfrm>
           <a:prstGeom prst="ellipse">
@@ -37724,7 +37724,7 @@
         </p:blipFill>
         <p:spPr>
           <a:xfrm>
-            <a:off x="8510016" y="2540965"/>
+            <a:off x="8510016" y="2649423"/>
             <a:ext cx="424281" cy="424281"/>
           </a:xfrm>
           <a:prstGeom prst="rect">
@@ -37740,8 +37740,8 @@
         </p:nvSpPr>
         <p:spPr>
           <a:xfrm>
-            <a:off x="8292388" y="3210306"/>
-            <a:ext cx="3186074" cy="2083308"/>
+            <a:off x="8292388" y="3318764"/>
+            <a:ext cx="3186074" cy="1866392"/>
           </a:xfrm>
           <a:prstGeom prst="rect">
             <a:avLst/>
@@ -37824,7 +37824,7 @@
         </p:nvSpPr>
         <p:spPr>
           <a:xfrm>
-            <a:off x="8356396" y="5366766"/>
+            <a:off x="8356396" y="5258308"/>
             <a:ext cx="1325879" cy="292608"/>
           </a:xfrm>
           <a:prstGeom prst="roundRect">
@@ -37855,7 +37855,7 @@
         </p:nvSpPr>
         <p:spPr>
           <a:xfrm>
-            <a:off x="8356396" y="5366766"/>
+            <a:off x="8356396" y="5258308"/>
             <a:ext cx="1325879" cy="292608"/>
           </a:xfrm>
           <a:prstGeom prst="rect">
@@ -38924,7 +38924,7 @@
                 <a:ea typeface="맑은 고딕"/>
                 <a:cs typeface="맑은 고딕"/>
               </a:rPr>
-              <a:t>• Claude Code로 적재 코드를 만든다</a:t>
+              <a:t>• 바이브 코딩으로 적재 코드를 만든다</a:t>
             </a:r>
           </a:p>
           <a:p>
@@ -40521,7 +40521,7 @@
       </p:sp>
       <p:pic>
         <p:nvPicPr>
-          <p:cNvPr id="6" name="삽화:네일차_흐름.svg" descr="illust_529358919560449062_1791770333.png"/>
+          <p:cNvPr id="6" name="삽화:네일차_흐름.svg" descr="illust_7429775050631453754_1791770333.png"/>
           <p:cNvPicPr>
             <a:picLocks noChangeAspect="1"/>
           </p:cNvPicPr>
@@ -41200,7 +41200,7 @@
       </p:sp>
       <p:pic>
         <p:nvPicPr>
-          <p:cNvPr id="6" name="삽화:관계.svg" descr="illust_7811397904476336855_1791715399.png"/>
+          <p:cNvPr id="6" name="삽화:관계.svg" descr="illust_6468548514182957752_1791715399.png"/>
           <p:cNvPicPr>
             <a:picLocks noChangeAspect="1"/>
           </p:cNvPicPr>
@@ -42447,7 +42447,7 @@
       </p:sp>
       <p:pic>
         <p:nvPicPr>
-          <p:cNvPr id="6" name="삽화:두층_3.svg" descr="illust_7400492555762215549_1791770880.png"/>
+          <p:cNvPr id="6" name="삽화:두층_3.svg" descr="illust_7018067902198820006_1791770880.png"/>
           <p:cNvPicPr>
             <a:picLocks noChangeAspect="1"/>
           </p:cNvPicPr>
@@ -44376,7 +44376,7 @@
       </p:sp>
       <p:pic>
         <p:nvPicPr>
-          <p:cNvPr id="6" name="삽화:성과경로_5.svg" descr="illust_7569108956490253656_1791769661.png"/>
+          <p:cNvPr id="6" name="삽화:성과경로_5.svg" descr="illust_5290878554599270576_1791769661.png"/>
           <p:cNvPicPr>
             <a:picLocks noChangeAspect="1"/>
           </p:cNvPicPr>
@@ -47419,7 +47419,7 @@
       </p:sp>
       <p:pic>
         <p:nvPicPr>
-          <p:cNvPr id="6" name="삽화:경로_3.svg" descr="illust_6196536976357924818_1791715399.png"/>
+          <p:cNvPr id="6" name="삽화:경로_3.svg" descr="illust_7716702693942635831_1791715399.png"/>
           <p:cNvPicPr>
             <a:picLocks noChangeAspect="1"/>
           </p:cNvPicPr>
@@ -49230,7 +49230,7 @@
       </p:sp>
       <p:pic>
         <p:nvPicPr>
-          <p:cNvPr id="6" name="삽화:원인후보.svg" descr="illust_1993795717545089743_1791770880.png"/>
+          <p:cNvPr id="6" name="삽화:원인후보.svg" descr="illust_258795632092844855_1791770880.png"/>
           <p:cNvPicPr>
             <a:picLocks noChangeAspect="1"/>
           </p:cNvPicPr>
@@ -51265,7 +51265,7 @@
       </p:sp>
       <p:pic>
         <p:nvPicPr>
-          <p:cNvPr id="6" name="삽화:세층.svg" descr="illust_6427483588211245178_1791770880.png"/>
+          <p:cNvPr id="6" name="삽화:세층.svg" descr="illust_610874005366639608_1791770880.png"/>
           <p:cNvPicPr>
             <a:picLocks noChangeAspect="1"/>
           </p:cNvPicPr>
